--- a/docs/deck/Hiraia-progress-update-2026-09.pptx
+++ b/docs/deck/Hiraia-progress-update-2026-09.pptx
@@ -647,7 +647,7 @@
           <a:lstStyle/>
           <a:p>
             <a:r>
-              <a:t>Weighting: rag/pipeline/FEED-WEIGHTING.md; simulation from packages/shared/src/curriculum/feedWeighting.ts on the bundled tags (docs/deck/data/draw-share-by-month.json; the chart attributes a multi-cell card to the Grade-5 cell that won, so its Aug figure (26.1%) is not the same statistic as feed-calibration.mts's 'draws carrying a G5-Q2 cell' (25.5%) — both come from the same module and pool). Quarter weighting applies to all 324 competencies (elementary and junior high). Coverage: rag/bank/COVERAGE-ROUNDUP.md (below floor now = 38, all junior high; laggards after module cards = 16). Quiz: packages/mobile/src/data/cards-questions.json (25,746 of 36,487).</a:t>
+              <a:t>Screenshots are from the current UI build (card-ui branch, 26 Aug 2026, installed on an Android 34 emulator); the curriculum weighting charted here is implemented on the question-cards branch at commit 58d358495 and the two branches are not yet merged, so the screenshots show the interface, not the weighting. Weighting: rag/pipeline/FEED-WEIGHTING.md; simulation from packages/shared/src/curriculum/feedWeighting.ts on the bundled tags (docs/deck/data/draw-share-by-month.json; the chart attributes a multi-cell card to the Grade-5 cell that won, so its Aug figure (26.1%) is not the same statistic as feed-calibration.mts's 'draws carrying a G5-Q2 cell' (25.5%) — both come from the same module and pool). Quarter weighting applies to all 324 competencies (elementary and junior high). Coverage: rag/bank/COVERAGE-ROUNDUP.md (below floor now = 38, all junior high; laggards after module cards = 16). Quiz: packages/mobile/src/data/cards-questions.json (25,746 of 36,487).</a:t>
             </a:r>
           </a:p>
         </p:txBody>
@@ -4043,7 +4043,7 @@
       <p:grpSpPr/>
       <p:pic>
         <p:nvPicPr>
-          <p:cNvPr id="2" name="Picture 1" descr="logo.png"/>
+          <p:cNvPr id="2" name="Picture 1" descr="icon.png"/>
           <p:cNvPicPr>
             <a:picLocks noChangeAspect="1"/>
           </p:cNvPicPr>
@@ -4057,8 +4057,8 @@
         </p:blipFill>
         <p:spPr>
           <a:xfrm>
-            <a:off x="822960" y="731520"/>
-            <a:ext cx="1005840" cy="1005840"/>
+            <a:off x="822960" y="685800"/>
+            <a:ext cx="1097280" cy="1097280"/>
           </a:xfrm>
           <a:prstGeom prst="rect">
             <a:avLst/>
@@ -4089,11 +4089,11 @@
           <a:p>
             <a:pPr algn="l"/>
             <a:r>
-              <a:rPr sz="5400" b="0">
+              <a:rPr sz="4600" b="0">
                 <a:solidFill>
-                  <a:srgbClr val="165A6A"/>
+                  <a:srgbClr val="20342C"/>
                 </a:solidFill>
-                <a:latin typeface="Mansalva"/>
+                <a:latin typeface="Alfa Slab One"/>
               </a:rPr>
               <a:t>Hiraia — progress update</a:t>
             </a:r>
@@ -4124,11 +4124,11 @@
           <a:p>
             <a:pPr algn="l"/>
             <a:r>
-              <a:rPr sz="3000" b="0">
+              <a:rPr sz="2400" b="1">
                 <a:solidFill>
-                  <a:srgbClr val="0C343D"/>
+                  <a:srgbClr val="7A2E22"/>
                 </a:solidFill>
-                <a:latin typeface="Caveat Brush"/>
+                <a:latin typeface="Inter"/>
               </a:rPr>
               <a:t>Early September 2026</a:t>
             </a:r>
@@ -4144,7 +4144,7 @@
         <p:spPr>
           <a:xfrm>
             <a:off x="822960" y="3657600"/>
-            <a:ext cx="10515600" cy="1097280"/>
+            <a:ext cx="8412480" cy="1097280"/>
           </a:xfrm>
           <a:prstGeom prst="rect">
             <a:avLst/>
@@ -4159,11 +4159,11 @@
           <a:p>
             <a:pPr algn="l"/>
             <a:r>
-              <a:rPr sz="1700" b="0">
+              <a:rPr sz="1500" b="0">
                 <a:solidFill>
-                  <a:srgbClr val="0C343D"/>
+                  <a:srgbClr val="1C3B2E"/>
                 </a:solidFill>
-                <a:latin typeface="Patrick Hand"/>
+                <a:latin typeface="Inter"/>
               </a:rPr>
               <a:t>An offline, on-device science tutor for Filipino grade-school students (Grades 3–10), aligned to the DepEd MATATAG curriculum, in Tagalog, Cebuano and English. The published build (v0.1) targets Android 12+ phones with 6 GB+ memory; a 1B budget tier runs on a Redmi (Snapdragon 685) in unpublished builds.</a:t>
             </a:r>
@@ -4179,18 +4179,20 @@
         <p:spPr>
           <a:xfrm>
             <a:off x="822960" y="4892040"/>
-            <a:ext cx="2606040" cy="1051560"/>
+            <a:ext cx="2011680" cy="1051560"/>
           </a:xfrm>
           <a:prstGeom prst="roundRect">
             <a:avLst>
-              <a:gd name="adj" fmla="val 12000"/>
+              <a:gd name="adj" fmla="val 6000"/>
             </a:avLst>
           </a:prstGeom>
           <a:solidFill>
-            <a:srgbClr val="DDE7E4"/>
+            <a:srgbClr val="F4EAD5"/>
           </a:solidFill>
-          <a:ln>
-            <a:noFill/>
+          <a:ln w="12700">
+            <a:solidFill>
+              <a:srgbClr val="1C3B2E"/>
+            </a:solidFill>
           </a:ln>
         </p:spPr>
         <p:style>
@@ -4223,8 +4225,8 @@
         </p:nvSpPr>
         <p:spPr>
           <a:xfrm>
-            <a:off x="822960" y="4937759"/>
-            <a:ext cx="2606040" cy="594360"/>
+            <a:off x="822960" y="4965192"/>
+            <a:ext cx="2011680" cy="594360"/>
           </a:xfrm>
           <a:prstGeom prst="rect">
             <a:avLst/>
@@ -4239,11 +4241,11 @@
           <a:p>
             <a:pPr algn="ctr"/>
             <a:r>
-              <a:rPr sz="2800" b="0">
+              <a:rPr sz="2400" b="0">
                 <a:solidFill>
-                  <a:srgbClr val="165A6A"/>
+                  <a:srgbClr val="1C3B2E"/>
                 </a:solidFill>
-                <a:latin typeface="Caveat Brush"/>
+                <a:latin typeface="Alfa Slab One"/>
               </a:rPr>
               <a:t>36,487</a:t>
             </a:r>
@@ -4258,8 +4260,8 @@
         </p:nvSpPr>
         <p:spPr>
           <a:xfrm>
-            <a:off x="822960" y="5513831"/>
-            <a:ext cx="2606040" cy="384048"/>
+            <a:off x="822960" y="5532120"/>
+            <a:ext cx="2011680" cy="384048"/>
           </a:xfrm>
           <a:prstGeom prst="rect">
             <a:avLst/>
@@ -4274,11 +4276,11 @@
           <a:p>
             <a:pPr algn="ctr"/>
             <a:r>
-              <a:rPr sz="1200" b="0">
+              <a:rPr sz="1100" b="0">
                 <a:solidFill>
-                  <a:srgbClr val="0C343D"/>
+                  <a:srgbClr val="1C3B2E"/>
                 </a:solidFill>
-                <a:latin typeface="Patrick Hand"/>
+                <a:latin typeface="Inter"/>
               </a:rPr>
               <a:t>illustrated fact cards</a:t>
             </a:r>
@@ -4293,19 +4295,21 @@
         </p:nvSpPr>
         <p:spPr>
           <a:xfrm>
-            <a:off x="3611879" y="4892040"/>
-            <a:ext cx="2606040" cy="1051560"/>
+            <a:off x="2980944" y="4892040"/>
+            <a:ext cx="2011680" cy="1051560"/>
           </a:xfrm>
           <a:prstGeom prst="roundRect">
             <a:avLst>
-              <a:gd name="adj" fmla="val 12000"/>
+              <a:gd name="adj" fmla="val 6000"/>
             </a:avLst>
           </a:prstGeom>
           <a:solidFill>
-            <a:srgbClr val="DDE7E4"/>
+            <a:srgbClr val="F4EAD5"/>
           </a:solidFill>
-          <a:ln>
-            <a:noFill/>
+          <a:ln w="12700">
+            <a:solidFill>
+              <a:srgbClr val="1C3B2E"/>
+            </a:solidFill>
           </a:ln>
         </p:spPr>
         <p:style>
@@ -4338,8 +4342,8 @@
         </p:nvSpPr>
         <p:spPr>
           <a:xfrm>
-            <a:off x="3611879" y="4937759"/>
-            <a:ext cx="2606040" cy="594360"/>
+            <a:off x="2980944" y="4965192"/>
+            <a:ext cx="2011680" cy="594360"/>
           </a:xfrm>
           <a:prstGeom prst="rect">
             <a:avLst/>
@@ -4354,11 +4358,11 @@
           <a:p>
             <a:pPr algn="ctr"/>
             <a:r>
-              <a:rPr sz="2800" b="0">
+              <a:rPr sz="2400" b="0">
                 <a:solidFill>
-                  <a:srgbClr val="165A6A"/>
+                  <a:srgbClr val="1C3B2E"/>
                 </a:solidFill>
-                <a:latin typeface="Caveat Brush"/>
+                <a:latin typeface="Alfa Slab One"/>
               </a:rPr>
               <a:t>50,279</a:t>
             </a:r>
@@ -4373,8 +4377,8 @@
         </p:nvSpPr>
         <p:spPr>
           <a:xfrm>
-            <a:off x="3611879" y="5513831"/>
-            <a:ext cx="2606040" cy="384048"/>
+            <a:off x="2980944" y="5532120"/>
+            <a:ext cx="2011680" cy="384048"/>
           </a:xfrm>
           <a:prstGeom prst="rect">
             <a:avLst/>
@@ -4389,11 +4393,11 @@
           <a:p>
             <a:pPr algn="ctr"/>
             <a:r>
-              <a:rPr sz="1200" b="0">
+              <a:rPr sz="1100" b="0">
                 <a:solidFill>
-                  <a:srgbClr val="0C343D"/>
+                  <a:srgbClr val="1C3B2E"/>
                 </a:solidFill>
-                <a:latin typeface="Patrick Hand"/>
+                <a:latin typeface="Inter"/>
               </a:rPr>
               <a:t>verified trilingual facts</a:t>
             </a:r>
@@ -4408,19 +4412,21 @@
         </p:nvSpPr>
         <p:spPr>
           <a:xfrm>
-            <a:off x="6400800" y="4892040"/>
-            <a:ext cx="2606040" cy="1051560"/>
+            <a:off x="5138928" y="4892040"/>
+            <a:ext cx="2011680" cy="1051560"/>
           </a:xfrm>
           <a:prstGeom prst="roundRect">
             <a:avLst>
-              <a:gd name="adj" fmla="val 12000"/>
+              <a:gd name="adj" fmla="val 6000"/>
             </a:avLst>
           </a:prstGeom>
           <a:solidFill>
-            <a:srgbClr val="DDE7E4"/>
+            <a:srgbClr val="F4EAD5"/>
           </a:solidFill>
-          <a:ln>
-            <a:noFill/>
+          <a:ln w="12700">
+            <a:solidFill>
+              <a:srgbClr val="1C3B2E"/>
+            </a:solidFill>
           </a:ln>
         </p:spPr>
         <p:style>
@@ -4453,8 +4459,8 @@
         </p:nvSpPr>
         <p:spPr>
           <a:xfrm>
-            <a:off x="6400800" y="4937759"/>
-            <a:ext cx="2606040" cy="594360"/>
+            <a:off x="5138928" y="4965192"/>
+            <a:ext cx="2011680" cy="594360"/>
           </a:xfrm>
           <a:prstGeom prst="rect">
             <a:avLst/>
@@ -4469,11 +4475,11 @@
           <a:p>
             <a:pPr algn="ctr"/>
             <a:r>
-              <a:rPr sz="2800" b="0">
+              <a:rPr sz="2400" b="0">
                 <a:solidFill>
-                  <a:srgbClr val="165A6A"/>
+                  <a:srgbClr val="1C3B2E"/>
                 </a:solidFill>
-                <a:latin typeface="Caveat Brush"/>
+                <a:latin typeface="Alfa Slab One"/>
               </a:rPr>
               <a:t>324</a:t>
             </a:r>
@@ -4488,8 +4494,8 @@
         </p:nvSpPr>
         <p:spPr>
           <a:xfrm>
-            <a:off x="6400800" y="5513831"/>
-            <a:ext cx="2606040" cy="384048"/>
+            <a:off x="5138928" y="5532120"/>
+            <a:ext cx="2011680" cy="384048"/>
           </a:xfrm>
           <a:prstGeom prst="rect">
             <a:avLst/>
@@ -4504,11 +4510,11 @@
           <a:p>
             <a:pPr algn="ctr"/>
             <a:r>
-              <a:rPr sz="1200" b="0">
+              <a:rPr sz="1100" b="0">
                 <a:solidFill>
-                  <a:srgbClr val="0C343D"/>
+                  <a:srgbClr val="1C3B2E"/>
                 </a:solidFill>
-                <a:latin typeface="Patrick Hand"/>
+                <a:latin typeface="Inter"/>
               </a:rPr>
               <a:t>MATATAG competencies tracked (321 with cards)</a:t>
             </a:r>
@@ -4523,19 +4529,21 @@
         </p:nvSpPr>
         <p:spPr>
           <a:xfrm>
-            <a:off x="9189719" y="4892040"/>
-            <a:ext cx="2606040" cy="1051560"/>
+            <a:off x="7296912" y="4892040"/>
+            <a:ext cx="2011680" cy="1051560"/>
           </a:xfrm>
           <a:prstGeom prst="roundRect">
             <a:avLst>
-              <a:gd name="adj" fmla="val 12000"/>
+              <a:gd name="adj" fmla="val 6000"/>
             </a:avLst>
           </a:prstGeom>
           <a:solidFill>
-            <a:srgbClr val="DDE7E4"/>
+            <a:srgbClr val="F4EAD5"/>
           </a:solidFill>
-          <a:ln>
-            <a:noFill/>
+          <a:ln w="12700">
+            <a:solidFill>
+              <a:srgbClr val="1C3B2E"/>
+            </a:solidFill>
           </a:ln>
         </p:spPr>
         <p:style>
@@ -4568,8 +4576,8 @@
         </p:nvSpPr>
         <p:spPr>
           <a:xfrm>
-            <a:off x="9189719" y="4937759"/>
-            <a:ext cx="2606040" cy="594360"/>
+            <a:off x="7296912" y="4965192"/>
+            <a:ext cx="2011680" cy="594360"/>
           </a:xfrm>
           <a:prstGeom prst="rect">
             <a:avLst/>
@@ -4584,11 +4592,11 @@
           <a:p>
             <a:pPr algn="ctr"/>
             <a:r>
-              <a:rPr sz="2800" b="0">
+              <a:rPr sz="2400" b="0">
                 <a:solidFill>
-                  <a:srgbClr val="165A6A"/>
+                  <a:srgbClr val="1C3B2E"/>
                 </a:solidFill>
-                <a:latin typeface="Caveat Brush"/>
+                <a:latin typeface="Alfa Slab One"/>
               </a:rPr>
               <a:t>25,746</a:t>
             </a:r>
@@ -4603,8 +4611,8 @@
         </p:nvSpPr>
         <p:spPr>
           <a:xfrm>
-            <a:off x="9189719" y="5513831"/>
-            <a:ext cx="2606040" cy="384048"/>
+            <a:off x="7296912" y="5532120"/>
+            <a:ext cx="2011680" cy="384048"/>
           </a:xfrm>
           <a:prstGeom prst="rect">
             <a:avLst/>
@@ -4619,27 +4627,51 @@
           <a:p>
             <a:pPr algn="ctr"/>
             <a:r>
-              <a:rPr sz="1200" b="0">
+              <a:rPr sz="1100" b="0">
                 <a:solidFill>
-                  <a:srgbClr val="0C343D"/>
+                  <a:srgbClr val="1C3B2E"/>
                 </a:solidFill>
-                <a:latin typeface="Patrick Hand"/>
+                <a:latin typeface="Inter"/>
               </a:rPr>
               <a:t>cards with a quiz question</a:t>
             </a:r>
           </a:p>
         </p:txBody>
       </p:sp>
-      <p:sp>
-        <p:nvSpPr>
-          <p:cNvPr id="18" name="TextBox 17"/>
+      <p:pic>
+        <p:nvPicPr>
+          <p:cNvPr id="18" name="Picture 17" descr="01-engraving-card.png"/>
+          <p:cNvPicPr>
+            <a:picLocks noChangeAspect="1"/>
+          </p:cNvPicPr>
+          <p:nvPr/>
+        </p:nvPicPr>
+        <p:blipFill>
+          <a:blip r:embed="rId4"/>
+          <a:stretch>
+            <a:fillRect/>
+          </a:stretch>
+        </p:blipFill>
+        <p:spPr>
+          <a:xfrm>
+            <a:off x="9464040" y="960120"/>
+            <a:ext cx="2343705" cy="5029200"/>
+          </a:xfrm>
+          <a:prstGeom prst="rect">
+            <a:avLst/>
+          </a:prstGeom>
+        </p:spPr>
+      </p:pic>
+      <p:sp>
+        <p:nvSpPr>
+          <p:cNvPr id="19" name="TextBox 18"/>
           <p:cNvSpPr txBox="1"/>
           <p:nvPr/>
         </p:nvSpPr>
         <p:spPr>
           <a:xfrm>
-            <a:off x="822960" y="6126480"/>
-            <a:ext cx="10515600" cy="365760"/>
+            <a:off x="9189719" y="6044183"/>
+            <a:ext cx="2892247" cy="365760"/>
           </a:xfrm>
           <a:prstGeom prst="rect">
             <a:avLst/>
@@ -4652,13 +4684,48 @@
           </a:bodyPr>
           <a:lstStyle/>
           <a:p>
+            <a:pPr algn="ctr"/>
+            <a:r>
+              <a:rPr sz="1050" b="0">
+                <a:solidFill>
+                  <a:srgbClr val="5B6B52"/>
+                </a:solidFill>
+                <a:latin typeface="Inter"/>
+              </a:rPr>
+              <a:t>current build (card-ui, 26 Aug 2026)</a:t>
+            </a:r>
+          </a:p>
+        </p:txBody>
+      </p:sp>
+      <p:sp>
+        <p:nvSpPr>
+          <p:cNvPr id="20" name="TextBox 19"/>
+          <p:cNvSpPr txBox="1"/>
+          <p:nvPr/>
+        </p:nvSpPr>
+        <p:spPr>
+          <a:xfrm>
+            <a:off x="822960" y="6126480"/>
+            <a:ext cx="8412480" cy="365760"/>
+          </a:xfrm>
+          <a:prstGeom prst="rect">
+            <a:avLst/>
+          </a:prstGeom>
+          <a:noFill/>
+        </p:spPr>
+        <p:txBody>
+          <a:bodyPr wrap="square" anchor="t">
+            <a:spAutoFit/>
+          </a:bodyPr>
+          <a:lstStyle/>
+          <a:p>
             <a:pPr algn="l"/>
             <a:r>
               <a:rPr sz="1100" b="0">
                 <a:solidFill>
-                  <a:srgbClr val="5F7A80"/>
+                  <a:srgbClr val="5B6B52"/>
                 </a:solidFill>
-                <a:latin typeface="Patrick Hand"/>
+                <a:latin typeface="Inter"/>
               </a:rPr>
               <a:t>Evidence: repository at commit 58d358495 (branch question-cards) and its evaluation records; the published app is app v0.1 — the feed shown here ships in the next build. Sources are in the slide notes.</a:t>
             </a:r>
@@ -4693,7 +4760,7 @@
       <p:grpSpPr/>
       <p:pic>
         <p:nvPicPr>
-          <p:cNvPr id="2" name="Picture 1" descr="logo.png"/>
+          <p:cNvPr id="2" name="Picture 1" descr="icon.png"/>
           <p:cNvPicPr>
             <a:picLocks noChangeAspect="1"/>
           </p:cNvPicPr>
@@ -4707,8 +4774,8 @@
         </p:blipFill>
         <p:spPr>
           <a:xfrm>
-            <a:off x="411480" y="292608"/>
-            <a:ext cx="502920" cy="502920"/>
+            <a:off x="411480" y="274320"/>
+            <a:ext cx="548640" cy="548640"/>
           </a:xfrm>
           <a:prstGeom prst="rect">
             <a:avLst/>
@@ -4723,7 +4790,7 @@
         </p:nvSpPr>
         <p:spPr>
           <a:xfrm>
-            <a:off x="1051560" y="256032"/>
+            <a:off x="1097280" y="274320"/>
             <a:ext cx="10607040" cy="640080"/>
           </a:xfrm>
           <a:prstGeom prst="rect">
@@ -4739,11 +4806,11 @@
           <a:p>
             <a:pPr algn="l"/>
             <a:r>
-              <a:rPr sz="3000" b="0">
+              <a:rPr sz="2600" b="0">
                 <a:solidFill>
-                  <a:srgbClr val="165A6A"/>
+                  <a:srgbClr val="20342C"/>
                 </a:solidFill>
-                <a:latin typeface="Mansalva"/>
+                <a:latin typeface="Alfa Slab One"/>
               </a:rPr>
               <a:t>Training runs on RunPod</a:t>
             </a:r>
@@ -4758,7 +4825,7 @@
         </p:nvSpPr>
         <p:spPr>
           <a:xfrm>
-            <a:off x="457200" y="896112"/>
+            <a:off x="457200" y="914400"/>
             <a:ext cx="11247120" cy="640080"/>
           </a:xfrm>
           <a:prstGeom prst="rect">
@@ -4774,11 +4841,11 @@
           <a:p>
             <a:pPr algn="l"/>
             <a:r>
-              <a:rPr sz="2000" b="0">
+              <a:rPr sz="1600" b="1">
                 <a:solidFill>
-                  <a:srgbClr val="0C343D"/>
+                  <a:srgbClr val="1C3B2E"/>
                 </a:solidFill>
-                <a:latin typeface="Caveat Brush"/>
+                <a:latin typeface="Inter"/>
               </a:rPr>
               <a:t>Most of the compute went into a continued-pretrained Filipino base model; the rest into tutoring fine-tunes, a pruning experiment, and evaluation.</a:t>
             </a:r>
@@ -4794,13 +4861,13 @@
         <p:spPr>
           <a:xfrm>
             <a:off x="457200" y="1554480"/>
-            <a:ext cx="11274552" cy="9000"/>
+            <a:ext cx="11274552" cy="18000"/>
           </a:xfrm>
           <a:prstGeom prst="rect">
             <a:avLst/>
           </a:prstGeom>
           <a:solidFill>
-            <a:srgbClr val="165A6A"/>
+            <a:srgbClr val="D8A03A"/>
           </a:solidFill>
           <a:ln>
             <a:noFill/>
@@ -4854,9 +4921,9 @@
             <a:r>
               <a:rPr sz="1100" b="0">
                 <a:solidFill>
-                  <a:srgbClr val="5F7A80"/>
+                  <a:srgbClr val="5B6B52"/>
                 </a:solidFill>
-                <a:latin typeface="Patrick Hand"/>
+                <a:latin typeface="Inter"/>
               </a:rPr>
               <a:t>Hiraia · progress update · early September 2026 · hiraia.org</a:t>
             </a:r>
@@ -4889,9 +4956,9 @@
             <a:r>
               <a:rPr sz="1100" b="0">
                 <a:solidFill>
-                  <a:srgbClr val="5F7A80"/>
+                  <a:srgbClr val="5B6B52"/>
                 </a:solidFill>
-                <a:latin typeface="Patrick Hand"/>
+                <a:latin typeface="Inter"/>
               </a:rPr>
               <a:t>2</a:t>
             </a:r>
@@ -4933,9 +5000,9 @@
                       <a:r>
                         <a:rPr sz="1100" b="1">
                           <a:solidFill>
-                            <a:srgbClr val="0C343D"/>
+                            <a:srgbClr val="1C3B2E"/>
                           </a:solidFill>
-                          <a:latin typeface="Patrick Hand"/>
+                          <a:latin typeface="Inter"/>
                         </a:rPr>
                         <a:t>run</a:t>
                       </a:r>
@@ -4943,7 +5010,7 @@
                   </a:txBody>
                   <a:tcPr marL="54864" marR="54864" marT="18288" marB="18288">
                     <a:solidFill>
-                      <a:srgbClr val="DDE7E4"/>
+                      <a:srgbClr val="F4EAD5"/>
                     </a:solidFill>
                   </a:tcPr>
                 </a:tc>
@@ -4955,9 +5022,9 @@
                       <a:r>
                         <a:rPr sz="1100" b="1">
                           <a:solidFill>
-                            <a:srgbClr val="0C343D"/>
+                            <a:srgbClr val="1C3B2E"/>
                           </a:solidFill>
-                          <a:latin typeface="Patrick Hand"/>
+                          <a:latin typeface="Inter"/>
                         </a:rPr>
                         <a:t>GPUs</a:t>
                       </a:r>
@@ -4965,7 +5032,7 @@
                   </a:txBody>
                   <a:tcPr marL="54864" marR="54864" marT="18288" marB="18288">
                     <a:solidFill>
-                      <a:srgbClr val="DDE7E4"/>
+                      <a:srgbClr val="F4EAD5"/>
                     </a:solidFill>
                   </a:tcPr>
                 </a:tc>
@@ -4977,9 +5044,9 @@
                       <a:r>
                         <a:rPr sz="1100" b="1">
                           <a:solidFill>
-                            <a:srgbClr val="0C343D"/>
+                            <a:srgbClr val="1C3B2E"/>
                           </a:solidFill>
-                          <a:latin typeface="Patrick Hand"/>
+                          <a:latin typeface="Inter"/>
                         </a:rPr>
                         <a:t>GPU-h</a:t>
                       </a:r>
@@ -4987,7 +5054,7 @@
                   </a:txBody>
                   <a:tcPr marL="54864" marR="54864" marT="18288" marB="18288">
                     <a:solidFill>
-                      <a:srgbClr val="DDE7E4"/>
+                      <a:srgbClr val="F4EAD5"/>
                     </a:solidFill>
                   </a:tcPr>
                 </a:tc>
@@ -4999,9 +5066,9 @@
                       <a:r>
                         <a:rPr sz="1100" b="1">
                           <a:solidFill>
-                            <a:srgbClr val="0C343D"/>
+                            <a:srgbClr val="1C3B2E"/>
                           </a:solidFill>
-                          <a:latin typeface="Patrick Hand"/>
+                          <a:latin typeface="Inter"/>
                         </a:rPr>
                         <a:t>cost</a:t>
                       </a:r>
@@ -5009,7 +5076,7 @@
                   </a:txBody>
                   <a:tcPr marL="54864" marR="54864" marT="18288" marB="18288">
                     <a:solidFill>
-                      <a:srgbClr val="DDE7E4"/>
+                      <a:srgbClr val="F4EAD5"/>
                     </a:solidFill>
                   </a:tcPr>
                 </a:tc>
@@ -5021,9 +5088,9 @@
                       <a:r>
                         <a:rPr sz="1100" b="1">
                           <a:solidFill>
-                            <a:srgbClr val="0C343D"/>
+                            <a:srgbClr val="1C3B2E"/>
                           </a:solidFill>
-                          <a:latin typeface="Patrick Hand"/>
+                          <a:latin typeface="Inter"/>
                         </a:rPr>
                         <a:t>basis</a:t>
                       </a:r>
@@ -5031,7 +5098,7 @@
                   </a:txBody>
                   <a:tcPr marL="54864" marR="54864" marT="18288" marB="18288">
                     <a:solidFill>
-                      <a:srgbClr val="DDE7E4"/>
+                      <a:srgbClr val="F4EAD5"/>
                     </a:solidFill>
                   </a:tcPr>
                 </a:tc>
@@ -5043,9 +5110,9 @@
                       <a:r>
                         <a:rPr sz="1100" b="1">
                           <a:solidFill>
-                            <a:srgbClr val="0C343D"/>
+                            <a:srgbClr val="1C3B2E"/>
                           </a:solidFill>
-                          <a:latin typeface="Patrick Hand"/>
+                          <a:latin typeface="Inter"/>
                         </a:rPr>
                         <a:t>outcome</a:t>
                       </a:r>
@@ -5053,7 +5120,7 @@
                   </a:txBody>
                   <a:tcPr marL="54864" marR="54864" marT="18288" marB="18288">
                     <a:solidFill>
-                      <a:srgbClr val="DDE7E4"/>
+                      <a:srgbClr val="F4EAD5"/>
                     </a:solidFill>
                   </a:tcPr>
                 </a:tc>
@@ -5067,9 +5134,9 @@
                       <a:r>
                         <a:rPr sz="1100" b="0">
                           <a:solidFill>
-                            <a:srgbClr val="0C343D"/>
+                            <a:srgbClr val="1C3B2E"/>
                           </a:solidFill>
-                          <a:latin typeface="Patrick Hand"/>
+                          <a:latin typeface="Inter"/>
                         </a:rPr>
                         <a:t>Full continued pre-training — Qwen3.5-2B, ≈13.7B tokens</a:t>
                       </a:r>
@@ -5089,9 +5156,9 @@
                       <a:r>
                         <a:rPr sz="1100" b="0">
                           <a:solidFill>
-                            <a:srgbClr val="0C343D"/>
+                            <a:srgbClr val="1C3B2E"/>
                           </a:solidFill>
-                          <a:latin typeface="Patrick Hand"/>
+                          <a:latin typeface="Inter"/>
                         </a:rPr>
                         <a:t>8 × H100 80GB</a:t>
                       </a:r>
@@ -5111,9 +5178,9 @@
                       <a:r>
                         <a:rPr sz="1100" b="0">
                           <a:solidFill>
-                            <a:srgbClr val="0C343D"/>
+                            <a:srgbClr val="1C3B2E"/>
                           </a:solidFill>
-                          <a:latin typeface="Patrick Hand"/>
+                          <a:latin typeface="Inter"/>
                         </a:rPr>
                         <a:t>294</a:t>
                       </a:r>
@@ -5133,9 +5200,9 @@
                       <a:r>
                         <a:rPr sz="1100" b="0">
                           <a:solidFill>
-                            <a:srgbClr val="0C343D"/>
+                            <a:srgbClr val="1C3B2E"/>
                           </a:solidFill>
-                          <a:latin typeface="Patrick Hand"/>
+                          <a:latin typeface="Inter"/>
                         </a:rPr>
                         <a:t>$972</a:t>
                       </a:r>
@@ -5155,9 +5222,9 @@
                       <a:r>
                         <a:rPr sz="1100" b="0">
                           <a:solidFill>
-                            <a:srgbClr val="0C343D"/>
+                            <a:srgbClr val="1C3B2E"/>
                           </a:solidFill>
-                          <a:latin typeface="Patrick Hand"/>
+                          <a:latin typeface="Inter"/>
                         </a:rPr>
                         <a:t>cost documented; hours from pod age</a:t>
                       </a:r>
@@ -5177,9 +5244,9 @@
                       <a:r>
                         <a:rPr sz="1100" b="0">
                           <a:solidFill>
-                            <a:srgbClr val="0C343D"/>
+                            <a:srgbClr val="1C3B2E"/>
                           </a:solidFill>
-                          <a:latin typeface="Patrick Hand"/>
+                          <a:latin typeface="Inter"/>
                         </a:rPr>
                         <a:t>Held-out perplexity: Tagalog −80%, Cebuano −82%, English −4% (improved)</a:t>
                       </a:r>
@@ -5201,9 +5268,9 @@
                       <a:r>
                         <a:rPr sz="1100" b="0">
                           <a:solidFill>
-                            <a:srgbClr val="0C343D"/>
+                            <a:srgbClr val="1C3B2E"/>
                           </a:solidFill>
-                          <a:latin typeface="Patrick Hand"/>
+                          <a:latin typeface="Inter"/>
                         </a:rPr>
                         <a:t>CPT probe run 2 (full-parameter, ZeRO-2)</a:t>
                       </a:r>
@@ -5223,9 +5290,9 @@
                       <a:r>
                         <a:rPr sz="1100" b="0">
                           <a:solidFill>
-                            <a:srgbClr val="0C343D"/>
+                            <a:srgbClr val="1C3B2E"/>
                           </a:solidFill>
-                          <a:latin typeface="Patrick Hand"/>
+                          <a:latin typeface="Inter"/>
                         </a:rPr>
                         <a:t>8 × H100</a:t>
                       </a:r>
@@ -5245,9 +5312,9 @@
                       <a:r>
                         <a:rPr sz="1100" b="0">
                           <a:solidFill>
-                            <a:srgbClr val="0C343D"/>
+                            <a:srgbClr val="1C3B2E"/>
                           </a:solidFill>
-                          <a:latin typeface="Patrick Hand"/>
+                          <a:latin typeface="Inter"/>
                         </a:rPr>
                         <a:t>167</a:t>
                       </a:r>
@@ -5267,9 +5334,9 @@
                       <a:r>
                         <a:rPr sz="1100" b="0">
                           <a:solidFill>
-                            <a:srgbClr val="0C343D"/>
+                            <a:srgbClr val="1C3B2E"/>
                           </a:solidFill>
-                          <a:latin typeface="Patrick Hand"/>
+                          <a:latin typeface="Inter"/>
                         </a:rPr>
                         <a:t>$550</a:t>
                       </a:r>
@@ -5289,9 +5356,9 @@
                       <a:r>
                         <a:rPr sz="1100" b="0">
                           <a:solidFill>
-                            <a:srgbClr val="0C343D"/>
+                            <a:srgbClr val="1C3B2E"/>
                           </a:solidFill>
-                          <a:latin typeface="Patrick Hand"/>
+                          <a:latin typeface="Inter"/>
                         </a:rPr>
                         <a:t>documented</a:t>
                       </a:r>
@@ -5311,9 +5378,9 @@
                       <a:r>
                         <a:rPr sz="1100" b="0">
                           <a:solidFill>
-                            <a:srgbClr val="0C343D"/>
+                            <a:srgbClr val="1C3B2E"/>
                           </a:solidFill>
-                          <a:latin typeface="Patrick Hand"/>
+                          <a:latin typeface="Inter"/>
                         </a:rPr>
                         <a:t>Only checkpoint-125 (525M tokens) survived a cross-DC sync failure — it validated the thesis: perplexity −63% tl / −63% ceb; GGUF export de-risked</a:t>
                       </a:r>
@@ -5335,9 +5402,9 @@
                       <a:r>
                         <a:rPr sz="1100" b="0">
                           <a:solidFill>
-                            <a:srgbClr val="0C343D"/>
+                            <a:srgbClr val="1C3B2E"/>
                           </a:solidFill>
-                          <a:latin typeface="Patrick Hand"/>
+                          <a:latin typeface="Inter"/>
                         </a:rPr>
                         <a:t>CPT probe run 1 (≈5.1B tokens, trained as LoRA by mistake)</a:t>
                       </a:r>
@@ -5357,9 +5424,9 @@
                       <a:r>
                         <a:rPr sz="1100" b="0">
                           <a:solidFill>
-                            <a:srgbClr val="0C343D"/>
+                            <a:srgbClr val="1C3B2E"/>
                           </a:solidFill>
-                          <a:latin typeface="Patrick Hand"/>
+                          <a:latin typeface="Inter"/>
                         </a:rPr>
                         <a:t>8 × H100</a:t>
                       </a:r>
@@ -5379,9 +5446,9 @@
                       <a:r>
                         <a:rPr sz="1100" b="0">
                           <a:solidFill>
-                            <a:srgbClr val="0C343D"/>
+                            <a:srgbClr val="1C3B2E"/>
                           </a:solidFill>
-                          <a:latin typeface="Patrick Hand"/>
+                          <a:latin typeface="Inter"/>
                         </a:rPr>
                         <a:t>85</a:t>
                       </a:r>
@@ -5401,9 +5468,9 @@
                       <a:r>
                         <a:rPr sz="1100" b="0">
                           <a:solidFill>
-                            <a:srgbClr val="0C343D"/>
+                            <a:srgbClr val="1C3B2E"/>
                           </a:solidFill>
-                          <a:latin typeface="Patrick Hand"/>
+                          <a:latin typeface="Inter"/>
                         </a:rPr>
                         <a:t>$285</a:t>
                       </a:r>
@@ -5423,9 +5490,9 @@
                       <a:r>
                         <a:rPr sz="1100" b="0">
                           <a:solidFill>
-                            <a:srgbClr val="0C343D"/>
+                            <a:srgbClr val="1C3B2E"/>
                           </a:solidFill>
-                          <a:latin typeface="Patrick Hand"/>
+                          <a:latin typeface="Inter"/>
                         </a:rPr>
                         <a:t>documented</a:t>
                       </a:r>
@@ -5445,9 +5512,9 @@
                       <a:r>
                         <a:rPr sz="1100" b="0">
                           <a:solidFill>
-                            <a:srgbClr val="0C343D"/>
+                            <a:srgbClr val="1C3B2E"/>
                           </a:solidFill>
-                          <a:latin typeface="Patrick Hand"/>
+                          <a:latin typeface="Inter"/>
                         </a:rPr>
                         <a:t>No usable artefact; the pod/volume/heartbeat pipeline was proven</a:t>
                       </a:r>
@@ -5469,9 +5536,9 @@
                       <a:r>
                         <a:rPr sz="1100" b="0">
                           <a:solidFill>
-                            <a:srgbClr val="0C343D"/>
+                            <a:srgbClr val="1C3B2E"/>
                           </a:solidFill>
-                          <a:latin typeface="Patrick Hand"/>
+                          <a:latin typeface="Inter"/>
                         </a:rPr>
                         <a:t>Full CPT attempt 1 (aborted)</a:t>
                       </a:r>
@@ -5491,9 +5558,9 @@
                       <a:r>
                         <a:rPr sz="1100" b="0">
                           <a:solidFill>
-                            <a:srgbClr val="0C343D"/>
+                            <a:srgbClr val="1C3B2E"/>
                           </a:solidFill>
-                          <a:latin typeface="Patrick Hand"/>
+                          <a:latin typeface="Inter"/>
                         </a:rPr>
                         <a:t>8 × H100</a:t>
                       </a:r>
@@ -5513,9 +5580,9 @@
                       <a:r>
                         <a:rPr sz="1100" b="0">
                           <a:solidFill>
-                            <a:srgbClr val="0C343D"/>
+                            <a:srgbClr val="1C3B2E"/>
                           </a:solidFill>
-                          <a:latin typeface="Patrick Hand"/>
+                          <a:latin typeface="Inter"/>
                         </a:rPr>
                         <a:t>66</a:t>
                       </a:r>
@@ -5535,9 +5602,9 @@
                       <a:r>
                         <a:rPr sz="1100" b="0">
                           <a:solidFill>
-                            <a:srgbClr val="0C343D"/>
+                            <a:srgbClr val="1C3B2E"/>
                           </a:solidFill>
-                          <a:latin typeface="Patrick Hand"/>
+                          <a:latin typeface="Inter"/>
                         </a:rPr>
                         <a:t>$216</a:t>
                       </a:r>
@@ -5557,9 +5624,9 @@
                       <a:r>
                         <a:rPr sz="1100" b="0">
                           <a:solidFill>
-                            <a:srgbClr val="0C343D"/>
+                            <a:srgbClr val="1C3B2E"/>
                           </a:solidFill>
-                          <a:latin typeface="Patrick Hand"/>
+                          <a:latin typeface="Inter"/>
                         </a:rPr>
                         <a:t>estimate</a:t>
                       </a:r>
@@ -5579,9 +5646,9 @@
                       <a:r>
                         <a:rPr sz="1100" b="0">
                           <a:solidFill>
-                            <a:srgbClr val="0C343D"/>
+                            <a:srgbClr val="1C3B2E"/>
                           </a:solidFill>
-                          <a:latin typeface="Patrick Hand"/>
+                          <a:latin typeface="Inter"/>
                         </a:rPr>
                         <a:t>Pre-processing collapse (worker count vs cgroup quota); run held and restarted</a:t>
                       </a:r>
@@ -5603,9 +5670,9 @@
                       <a:r>
                         <a:rPr sz="1100" b="0">
                           <a:solidFill>
-                            <a:srgbClr val="0C343D"/>
+                            <a:srgbClr val="1C3B2E"/>
                           </a:solidFill>
-                          <a:latin typeface="Patrick Hand"/>
+                          <a:latin typeface="Inter"/>
                         </a:rPr>
                         <a:t>Prune + heal 2.4B experiment (Sailor2-3B)</a:t>
                       </a:r>
@@ -5625,9 +5692,9 @@
                       <a:r>
                         <a:rPr sz="1100" b="0">
                           <a:solidFill>
-                            <a:srgbClr val="0C343D"/>
+                            <a:srgbClr val="1C3B2E"/>
                           </a:solidFill>
-                          <a:latin typeface="Patrick Hand"/>
+                          <a:latin typeface="Inter"/>
                         </a:rPr>
                         <a:t>8 × A100</a:t>
                       </a:r>
@@ -5647,9 +5714,9 @@
                       <a:r>
                         <a:rPr sz="1100" b="0">
                           <a:solidFill>
-                            <a:srgbClr val="0C343D"/>
+                            <a:srgbClr val="1C3B2E"/>
                           </a:solidFill>
-                          <a:latin typeface="Patrick Hand"/>
+                          <a:latin typeface="Inter"/>
                         </a:rPr>
                         <a:t>56</a:t>
                       </a:r>
@@ -5669,9 +5736,9 @@
                       <a:r>
                         <a:rPr sz="1100" b="0">
                           <a:solidFill>
-                            <a:srgbClr val="0C343D"/>
+                            <a:srgbClr val="1C3B2E"/>
                           </a:solidFill>
-                          <a:latin typeface="Patrick Hand"/>
+                          <a:latin typeface="Inter"/>
                         </a:rPr>
                         <a:t>$86</a:t>
                       </a:r>
@@ -5691,9 +5758,9 @@
                       <a:r>
                         <a:rPr sz="1100" b="0">
                           <a:solidFill>
-                            <a:srgbClr val="0C343D"/>
+                            <a:srgbClr val="1C3B2E"/>
                           </a:solidFill>
-                          <a:latin typeface="Patrick Hand"/>
+                          <a:latin typeface="Inter"/>
                         </a:rPr>
                         <a:t>documented</a:t>
                       </a:r>
@@ -5713,9 +5780,9 @@
                       <a:r>
                         <a:rPr sz="1100" b="0">
                           <a:solidFill>
-                            <a:srgbClr val="0C343D"/>
+                            <a:srgbClr val="1C3B2E"/>
                           </a:solidFill>
-                          <a:latin typeface="Patrick Hand"/>
+                          <a:latin typeface="Inter"/>
                         </a:rPr>
                         <a:t>Heal recovered fluency (ppl tl 6.7 / ceb 9.9); conservative re-SFT under-fit — not shipped</a:t>
                       </a:r>
@@ -5737,9 +5804,9 @@
                       <a:r>
                         <a:rPr sz="1100" b="0">
                           <a:solidFill>
-                            <a:srgbClr val="0C343D"/>
+                            <a:srgbClr val="1C3B2E"/>
                           </a:solidFill>
-                          <a:latin typeface="Patrick Hand"/>
+                          <a:latin typeface="Inter"/>
                         </a:rPr>
                         <a:t>GRPO rounds 1–5 (1B/3B)</a:t>
                       </a:r>
@@ -5759,9 +5826,9 @@
                       <a:r>
                         <a:rPr sz="1100" b="0">
                           <a:solidFill>
-                            <a:srgbClr val="0C343D"/>
+                            <a:srgbClr val="1C3B2E"/>
                           </a:solidFill>
-                          <a:latin typeface="Patrick Hand"/>
+                          <a:latin typeface="Inter"/>
                         </a:rPr>
                         <a:t>1–4 × H100 / RTX 6000</a:t>
                       </a:r>
@@ -5781,9 +5848,9 @@
                       <a:r>
                         <a:rPr sz="1100" b="0">
                           <a:solidFill>
-                            <a:srgbClr val="0C343D"/>
+                            <a:srgbClr val="1C3B2E"/>
                           </a:solidFill>
-                          <a:latin typeface="Patrick Hand"/>
+                          <a:latin typeface="Inter"/>
                         </a:rPr>
                         <a:t>55</a:t>
                       </a:r>
@@ -5803,9 +5870,9 @@
                       <a:r>
                         <a:rPr sz="1100" b="0">
                           <a:solidFill>
-                            <a:srgbClr val="0C343D"/>
+                            <a:srgbClr val="1C3B2E"/>
                           </a:solidFill>
-                          <a:latin typeface="Patrick Hand"/>
+                          <a:latin typeface="Inter"/>
                         </a:rPr>
                         <a:t>$74</a:t>
                       </a:r>
@@ -5825,9 +5892,9 @@
                       <a:r>
                         <a:rPr sz="1100" b="0">
                           <a:solidFill>
-                            <a:srgbClr val="0C343D"/>
+                            <a:srgbClr val="1C3B2E"/>
                           </a:solidFill>
-                          <a:latin typeface="Patrick Hand"/>
+                          <a:latin typeface="Inter"/>
                         </a:rPr>
                         <a:t>mostly documented</a:t>
                       </a:r>
@@ -5847,9 +5914,9 @@
                       <a:r>
                         <a:rPr sz="1100" b="0">
                           <a:solidFill>
-                            <a:srgbClr val="0C343D"/>
+                            <a:srgbClr val="1C3B2E"/>
                           </a:solidFill>
-                          <a:latin typeface="Patrick Hand"/>
+                          <a:latin typeface="Inter"/>
                         </a:rPr>
                         <a:t>Not shippable: capability 3.30 → 2.98; English +1.4 but abstention and Bisaya regressed</a:t>
                       </a:r>
@@ -5871,9 +5938,9 @@
                       <a:r>
                         <a:rPr sz="1100" b="0">
                           <a:solidFill>
-                            <a:srgbClr val="0C343D"/>
+                            <a:srgbClr val="1C3B2E"/>
                           </a:solidFill>
-                          <a:latin typeface="Patrick Hand"/>
+                          <a:latin typeface="Inter"/>
                         </a:rPr>
                         <a:t>SFT v1 / v2 on the CPT base (Qwen3.5-2B)</a:t>
                       </a:r>
@@ -5893,9 +5960,9 @@
                       <a:r>
                         <a:rPr sz="1100" b="0">
                           <a:solidFill>
-                            <a:srgbClr val="0C343D"/>
+                            <a:srgbClr val="1C3B2E"/>
                           </a:solidFill>
-                          <a:latin typeface="Patrick Hand"/>
+                          <a:latin typeface="Inter"/>
                         </a:rPr>
                         <a:t>1 × A100 80GB</a:t>
                       </a:r>
@@ -5915,9 +5982,9 @@
                       <a:r>
                         <a:rPr sz="1100" b="0">
                           <a:solidFill>
-                            <a:srgbClr val="0C343D"/>
+                            <a:srgbClr val="1C3B2E"/>
                           </a:solidFill>
-                          <a:latin typeface="Patrick Hand"/>
+                          <a:latin typeface="Inter"/>
                         </a:rPr>
                         <a:t>3</a:t>
                       </a:r>
@@ -5937,9 +6004,9 @@
                       <a:r>
                         <a:rPr sz="1100" b="0">
                           <a:solidFill>
-                            <a:srgbClr val="0C343D"/>
+                            <a:srgbClr val="1C3B2E"/>
                           </a:solidFill>
-                          <a:latin typeface="Patrick Hand"/>
+                          <a:latin typeface="Inter"/>
                         </a:rPr>
                         <a:t>$6</a:t>
                       </a:r>
@@ -5959,9 +6026,9 @@
                       <a:r>
                         <a:rPr sz="1100" b="0">
                           <a:solidFill>
-                            <a:srgbClr val="0C343D"/>
+                            <a:srgbClr val="1C3B2E"/>
                           </a:solidFill>
-                          <a:latin typeface="Patrick Hand"/>
+                          <a:latin typeface="Inter"/>
                         </a:rPr>
                         <a:t>documented</a:t>
                       </a:r>
@@ -5981,9 +6048,9 @@
                       <a:r>
                         <a:rPr sz="1100" b="0">
                           <a:solidFill>
-                            <a:srgbClr val="0C343D"/>
+                            <a:srgbClr val="1C3B2E"/>
                           </a:solidFill>
-                          <a:latin typeface="Patrick Hand"/>
+                          <a:latin typeface="Inter"/>
                         </a:rPr>
                         <a:t>v1 is the ship candidate: reply-language accuracy tl 99% · ceb 99% · en 94%</a:t>
                       </a:r>
@@ -6005,9 +6072,9 @@
                       <a:r>
                         <a:rPr sz="1100" b="0">
                           <a:solidFill>
-                            <a:srgbClr val="0C343D"/>
+                            <a:srgbClr val="1C3B2E"/>
                           </a:solidFill>
-                          <a:latin typeface="Patrick Hand"/>
+                          <a:latin typeface="Inter"/>
                         </a:rPr>
                         <a:t>Adapter iterations on Sailor2-3B / 1B and tooling (36 entries, May–June)</a:t>
                       </a:r>
@@ -6027,9 +6094,9 @@
                       <a:r>
                         <a:rPr sz="1100" b="0">
                           <a:solidFill>
-                            <a:srgbClr val="0C343D"/>
+                            <a:srgbClr val="1C3B2E"/>
                           </a:solidFill>
-                          <a:latin typeface="Patrick Hand"/>
+                          <a:latin typeface="Inter"/>
                         </a:rPr>
                         <a:t>H100 / L40 / A100 / L4</a:t>
                       </a:r>
@@ -6049,9 +6116,9 @@
                       <a:r>
                         <a:rPr sz="1100" b="0">
                           <a:solidFill>
-                            <a:srgbClr val="0C343D"/>
+                            <a:srgbClr val="1C3B2E"/>
                           </a:solidFill>
-                          <a:latin typeface="Patrick Hand"/>
+                          <a:latin typeface="Inter"/>
                         </a:rPr>
                         <a:t>60</a:t>
                       </a:r>
@@ -6071,9 +6138,9 @@
                       <a:r>
                         <a:rPr sz="1100" b="0">
                           <a:solidFill>
-                            <a:srgbClr val="0C343D"/>
+                            <a:srgbClr val="1C3B2E"/>
                           </a:solidFill>
-                          <a:latin typeface="Patrick Hand"/>
+                          <a:latin typeface="Inter"/>
                         </a:rPr>
                         <a:t>$128</a:t>
                       </a:r>
@@ -6093,9 +6160,9 @@
                       <a:r>
                         <a:rPr sz="1100" b="0">
                           <a:solidFill>
-                            <a:srgbClr val="0C343D"/>
+                            <a:srgbClr val="1C3B2E"/>
                           </a:solidFill>
-                          <a:latin typeface="Patrick Hand"/>
+                          <a:latin typeface="Inter"/>
                         </a:rPr>
                         <a:t>mostly estimated</a:t>
                       </a:r>
@@ -6115,9 +6182,9 @@
                       <a:r>
                         <a:rPr sz="1100" b="0">
                           <a:solidFill>
-                            <a:srgbClr val="0C343D"/>
+                            <a:srgbClr val="1C3B2E"/>
                           </a:solidFill>
-                          <a:latin typeface="Patrick Hand"/>
+                          <a:latin typeface="Inter"/>
                         </a:rPr>
                         <a:t>Shipped adapters v3 → v11: grounding faithfulness, static-prompt TTFT, kitten/cat tiers; QVAC-native training path evaluated and dropped</a:t>
                       </a:r>
@@ -6139,9 +6206,9 @@
                       <a:r>
                         <a:rPr sz="1100" b="0">
                           <a:solidFill>
-                            <a:srgbClr val="0C343D"/>
+                            <a:srgbClr val="1C3B2E"/>
                           </a:solidFill>
-                          <a:latin typeface="Patrick Hand"/>
+                          <a:latin typeface="Inter"/>
                         </a:rPr>
                         <a:t>Checkpoint-sync, eval and debug pods</a:t>
                       </a:r>
@@ -6161,9 +6228,9 @@
                       <a:r>
                         <a:rPr sz="1100" b="0">
                           <a:solidFill>
-                            <a:srgbClr val="0C343D"/>
+                            <a:srgbClr val="1C3B2E"/>
                           </a:solidFill>
-                          <a:latin typeface="Patrick Hand"/>
+                          <a:latin typeface="Inter"/>
                         </a:rPr>
                         <a:t>various</a:t>
                       </a:r>
@@ -6183,9 +6250,9 @@
                       <a:r>
                         <a:rPr sz="1100" b="0">
                           <a:solidFill>
-                            <a:srgbClr val="0C343D"/>
+                            <a:srgbClr val="1C3B2E"/>
                           </a:solidFill>
-                          <a:latin typeface="Patrick Hand"/>
+                          <a:latin typeface="Inter"/>
                         </a:rPr>
                         <a:t>68</a:t>
                       </a:r>
@@ -6205,9 +6272,9 @@
                       <a:r>
                         <a:rPr sz="1100" b="0">
                           <a:solidFill>
-                            <a:srgbClr val="0C343D"/>
+                            <a:srgbClr val="1C3B2E"/>
                           </a:solidFill>
-                          <a:latin typeface="Patrick Hand"/>
+                          <a:latin typeface="Inter"/>
                         </a:rPr>
                         <a:t>$85</a:t>
                       </a:r>
@@ -6227,9 +6294,9 @@
                       <a:r>
                         <a:rPr sz="1100" b="0">
                           <a:solidFill>
-                            <a:srgbClr val="0C343D"/>
+                            <a:srgbClr val="1C3B2E"/>
                           </a:solidFill>
-                          <a:latin typeface="Patrick Hand"/>
+                          <a:latin typeface="Inter"/>
                         </a:rPr>
                         <a:t>mixed</a:t>
                       </a:r>
@@ -6249,9 +6316,9 @@
                       <a:r>
                         <a:rPr sz="1100" b="0">
                           <a:solidFill>
-                            <a:srgbClr val="0C343D"/>
+                            <a:srgbClr val="1C3B2E"/>
                           </a:solidFill>
-                          <a:latin typeface="Patrick Hand"/>
+                          <a:latin typeface="Inter"/>
                         </a:rPr>
                         <a:t>Evaluation on a device-equivalent GGUF; pre-flight debugging of run 2</a:t>
                       </a:r>
@@ -6292,11 +6359,11 @@
           <a:p>
             <a:pPr algn="l"/>
             <a:r>
-              <a:rPr sz="1400" b="0">
+              <a:rPr sz="1300" b="1">
                 <a:solidFill>
-                  <a:srgbClr val="165A6A"/>
+                  <a:srgbClr val="20342C"/>
                 </a:solidFill>
-                <a:latin typeface="Caveat Brush"/>
+                <a:latin typeface="Inter"/>
               </a:rPr>
               <a:t>≈853 GPU-hours and ≈$2,402 on RunPod since late May 2026 (rows sum to the totals); ≈$2,000 of that from figures recorded at the time, the rest estimated at list price — no billing export yet. About 80% of the compute went into continued pre-training of the Filipino base model.</a:t>
             </a:r>
@@ -6331,7 +6398,7 @@
       <p:grpSpPr/>
       <p:pic>
         <p:nvPicPr>
-          <p:cNvPr id="2" name="Picture 1" descr="logo.png"/>
+          <p:cNvPr id="2" name="Picture 1" descr="icon.png"/>
           <p:cNvPicPr>
             <a:picLocks noChangeAspect="1"/>
           </p:cNvPicPr>
@@ -6345,8 +6412,8 @@
         </p:blipFill>
         <p:spPr>
           <a:xfrm>
-            <a:off x="411480" y="292608"/>
-            <a:ext cx="502920" cy="502920"/>
+            <a:off x="411480" y="274320"/>
+            <a:ext cx="548640" cy="548640"/>
           </a:xfrm>
           <a:prstGeom prst="rect">
             <a:avLst/>
@@ -6361,7 +6428,7 @@
         </p:nvSpPr>
         <p:spPr>
           <a:xfrm>
-            <a:off x="1051560" y="256032"/>
+            <a:off x="1097280" y="274320"/>
             <a:ext cx="10607040" cy="640080"/>
           </a:xfrm>
           <a:prstGeom prst="rect">
@@ -6377,11 +6444,11 @@
           <a:p>
             <a:pPr algn="l"/>
             <a:r>
-              <a:rPr sz="3000" b="0">
+              <a:rPr sz="2600" b="0">
                 <a:solidFill>
-                  <a:srgbClr val="165A6A"/>
+                  <a:srgbClr val="20342C"/>
                 </a:solidFill>
-                <a:latin typeface="Mansalva"/>
+                <a:latin typeface="Alfa Slab One"/>
               </a:rPr>
               <a:t>A curriculum-aware feed</a:t>
             </a:r>
@@ -6396,7 +6463,7 @@
         </p:nvSpPr>
         <p:spPr>
           <a:xfrm>
-            <a:off x="457200" y="896112"/>
+            <a:off x="457200" y="914400"/>
             <a:ext cx="11247120" cy="640080"/>
           </a:xfrm>
           <a:prstGeom prst="rect">
@@ -6412,11 +6479,11 @@
           <a:p>
             <a:pPr algn="l"/>
             <a:r>
-              <a:rPr sz="2000" b="0">
+              <a:rPr sz="1600" b="1">
                 <a:solidFill>
-                  <a:srgbClr val="0C343D"/>
+                  <a:srgbClr val="1C3B2E"/>
                 </a:solidFill>
-                <a:latin typeface="Caveat Brush"/>
+                <a:latin typeface="Inter"/>
               </a:rPr>
               <a:t>Cards are weighted by the student's grade and the curriculum quarter inferred from the device date; the boost moves through the school year by itself.</a:t>
             </a:r>
@@ -6432,13 +6499,13 @@
         <p:spPr>
           <a:xfrm>
             <a:off x="457200" y="1554480"/>
-            <a:ext cx="11274552" cy="9000"/>
+            <a:ext cx="11274552" cy="18000"/>
           </a:xfrm>
           <a:prstGeom prst="rect">
             <a:avLst/>
           </a:prstGeom>
           <a:solidFill>
-            <a:srgbClr val="165A6A"/>
+            <a:srgbClr val="D8A03A"/>
           </a:solidFill>
           <a:ln>
             <a:noFill/>
@@ -6492,9 +6559,9 @@
             <a:r>
               <a:rPr sz="1100" b="0">
                 <a:solidFill>
-                  <a:srgbClr val="5F7A80"/>
+                  <a:srgbClr val="5B6B52"/>
                 </a:solidFill>
-                <a:latin typeface="Patrick Hand"/>
+                <a:latin typeface="Inter"/>
               </a:rPr>
               <a:t>Hiraia · progress update · early September 2026 · hiraia.org</a:t>
             </a:r>
@@ -6527,9 +6594,9 @@
             <a:r>
               <a:rPr sz="1100" b="0">
                 <a:solidFill>
-                  <a:srgbClr val="5F7A80"/>
+                  <a:srgbClr val="5B6B52"/>
                 </a:solidFill>
-                <a:latin typeface="Patrick Hand"/>
+                <a:latin typeface="Inter"/>
               </a:rPr>
               <a:t>3</a:t>
             </a:r>
@@ -6560,53 +6627,30 @@
           </a:prstGeom>
         </p:spPr>
       </p:pic>
-      <p:sp>
-        <p:nvSpPr>
-          <p:cNvPr id="9" name="Rounded Rectangle 8"/>
-          <p:cNvSpPr/>
+      <p:pic>
+        <p:nvPicPr>
+          <p:cNvPr id="9" name="Picture 8" descr="02-feed-card.png"/>
+          <p:cNvPicPr>
+            <a:picLocks noChangeAspect="1"/>
+          </p:cNvPicPr>
           <p:nvPr/>
-        </p:nvSpPr>
-        <p:spPr>
-          <a:xfrm>
-            <a:off x="7543800" y="1737360"/>
-            <a:ext cx="1351848" cy="2926080"/>
-          </a:xfrm>
-          <a:prstGeom prst="roundRect">
-            <a:avLst>
-              <a:gd name="adj" fmla="val 8000"/>
-            </a:avLst>
+        </p:nvPicPr>
+        <p:blipFill>
+          <a:blip r:embed="rId4"/>
+          <a:stretch>
+            <a:fillRect/>
+          </a:stretch>
+        </p:blipFill>
+        <p:spPr>
+          <a:xfrm>
+            <a:off x="7589520" y="1737360"/>
+            <a:ext cx="1384917" cy="2971800"/>
+          </a:xfrm>
+          <a:prstGeom prst="rect">
+            <a:avLst/>
           </a:prstGeom>
-          <a:solidFill>
-            <a:srgbClr val="DDE7E4"/>
-          </a:solidFill>
-          <a:ln w="12700">
-            <a:solidFill>
-              <a:srgbClr val="165A6A"/>
-            </a:solidFill>
-          </a:ln>
-        </p:spPr>
-        <p:style>
-          <a:lnRef idx="1">
-            <a:schemeClr val="accent1"/>
-          </a:lnRef>
-          <a:fillRef idx="3">
-            <a:schemeClr val="accent1"/>
-          </a:fillRef>
-          <a:effectRef idx="2">
-            <a:schemeClr val="accent1"/>
-          </a:effectRef>
-          <a:fontRef idx="minor">
-            <a:schemeClr val="lt1"/>
-          </a:fontRef>
-        </p:style>
-        <p:txBody>
-          <a:bodyPr rtlCol="0" anchor="ctr"/>
-          <a:lstStyle/>
-          <a:p>
-            <a:pPr algn="ctr"/>
-          </a:p>
-        </p:txBody>
-      </p:sp>
+        </p:spPr>
+      </p:pic>
       <p:sp>
         <p:nvSpPr>
           <p:cNvPr id="10" name="TextBox 9"/>
@@ -6615,8 +6659,8 @@
         </p:nvSpPr>
         <p:spPr>
           <a:xfrm>
-            <a:off x="7616952" y="2423160"/>
-            <a:ext cx="1205544" cy="1554480"/>
+            <a:off x="7315200" y="4764024"/>
+            <a:ext cx="1933498" cy="365760"/>
           </a:xfrm>
           <a:prstGeom prst="rect">
             <a:avLst/>
@@ -6631,27 +6675,51 @@
           <a:p>
             <a:pPr algn="ctr"/>
             <a:r>
-              <a:rPr sz="950" b="0">
+              <a:rPr sz="1050" b="0">
                 <a:solidFill>
-                  <a:srgbClr val="5F7A80"/>
+                  <a:srgbClr val="5B6B52"/>
                 </a:solidFill>
-                <a:latin typeface="Patrick Hand"/>
+                <a:latin typeface="Inter"/>
               </a:rPr>
-              <a:t>placeholder — screenshot of the unpublished question-cards build (commit 58d358495); not in the published v0.1 APK</a:t>
-            </a:r>
-          </a:p>
-        </p:txBody>
-      </p:sp>
-      <p:sp>
-        <p:nvSpPr>
-          <p:cNvPr id="11" name="TextBox 10"/>
+              <a:t>fact card</a:t>
+            </a:r>
+          </a:p>
+        </p:txBody>
+      </p:sp>
+      <p:pic>
+        <p:nvPicPr>
+          <p:cNvPr id="11" name="Picture 10" descr="04-quiz-card.png"/>
+          <p:cNvPicPr>
+            <a:picLocks noChangeAspect="1"/>
+          </p:cNvPicPr>
+          <p:nvPr/>
+        </p:nvPicPr>
+        <p:blipFill>
+          <a:blip r:embed="rId5"/>
+          <a:stretch>
+            <a:fillRect/>
+          </a:stretch>
+        </p:blipFill>
+        <p:spPr>
+          <a:xfrm>
+            <a:off x="9555480" y="1737360"/>
+            <a:ext cx="1384917" cy="2971800"/>
+          </a:xfrm>
+          <a:prstGeom prst="rect">
+            <a:avLst/>
+          </a:prstGeom>
+        </p:spPr>
+      </p:pic>
+      <p:sp>
+        <p:nvSpPr>
+          <p:cNvPr id="12" name="TextBox 11"/>
           <p:cNvSpPr txBox="1"/>
           <p:nvPr/>
         </p:nvSpPr>
         <p:spPr>
           <a:xfrm>
-            <a:off x="7269480" y="4709159"/>
-            <a:ext cx="1900488" cy="365760"/>
+            <a:off x="9281159" y="4764024"/>
+            <a:ext cx="1933498" cy="365760"/>
           </a:xfrm>
           <a:prstGeom prst="rect">
             <a:avLst/>
@@ -6666,128 +6734,11 @@
           <a:p>
             <a:pPr algn="ctr"/>
             <a:r>
-              <a:rPr sz="1100" b="0">
+              <a:rPr sz="1050" b="0">
                 <a:solidFill>
-                  <a:srgbClr val="5F7A80"/>
+                  <a:srgbClr val="5B6B52"/>
                 </a:solidFill>
-                <a:latin typeface="Patrick Hand"/>
-              </a:rPr>
-              <a:t>fact card</a:t>
-            </a:r>
-          </a:p>
-        </p:txBody>
-      </p:sp>
-      <p:sp>
-        <p:nvSpPr>
-          <p:cNvPr id="12" name="Rounded Rectangle 11"/>
-          <p:cNvSpPr/>
-          <p:nvPr/>
-        </p:nvSpPr>
-        <p:spPr>
-          <a:xfrm>
-            <a:off x="9464040" y="1737360"/>
-            <a:ext cx="1351848" cy="2926080"/>
-          </a:xfrm>
-          <a:prstGeom prst="roundRect">
-            <a:avLst>
-              <a:gd name="adj" fmla="val 8000"/>
-            </a:avLst>
-          </a:prstGeom>
-          <a:solidFill>
-            <a:srgbClr val="DDE7E4"/>
-          </a:solidFill>
-          <a:ln w="12700">
-            <a:solidFill>
-              <a:srgbClr val="165A6A"/>
-            </a:solidFill>
-          </a:ln>
-        </p:spPr>
-        <p:style>
-          <a:lnRef idx="1">
-            <a:schemeClr val="accent1"/>
-          </a:lnRef>
-          <a:fillRef idx="3">
-            <a:schemeClr val="accent1"/>
-          </a:fillRef>
-          <a:effectRef idx="2">
-            <a:schemeClr val="accent1"/>
-          </a:effectRef>
-          <a:fontRef idx="minor">
-            <a:schemeClr val="lt1"/>
-          </a:fontRef>
-        </p:style>
-        <p:txBody>
-          <a:bodyPr rtlCol="0" anchor="ctr"/>
-          <a:lstStyle/>
-          <a:p>
-            <a:pPr algn="ctr"/>
-          </a:p>
-        </p:txBody>
-      </p:sp>
-      <p:sp>
-        <p:nvSpPr>
-          <p:cNvPr id="13" name="TextBox 12"/>
-          <p:cNvSpPr txBox="1"/>
-          <p:nvPr/>
-        </p:nvSpPr>
-        <p:spPr>
-          <a:xfrm>
-            <a:off x="9537192" y="2423160"/>
-            <a:ext cx="1205544" cy="1554480"/>
-          </a:xfrm>
-          <a:prstGeom prst="rect">
-            <a:avLst/>
-          </a:prstGeom>
-          <a:noFill/>
-        </p:spPr>
-        <p:txBody>
-          <a:bodyPr wrap="square" anchor="t">
-            <a:spAutoFit/>
-          </a:bodyPr>
-          <a:lstStyle/>
-          <a:p>
-            <a:pPr algn="ctr"/>
-            <a:r>
-              <a:rPr sz="950" b="0">
-                <a:solidFill>
-                  <a:srgbClr val="5F7A80"/>
-                </a:solidFill>
-                <a:latin typeface="Patrick Hand"/>
-              </a:rPr>
-              <a:t>placeholder — screenshot of the unpublished question-cards build (commit 58d358495); not in the published v0.1 APK</a:t>
-            </a:r>
-          </a:p>
-        </p:txBody>
-      </p:sp>
-      <p:sp>
-        <p:nvSpPr>
-          <p:cNvPr id="14" name="TextBox 13"/>
-          <p:cNvSpPr txBox="1"/>
-          <p:nvPr/>
-        </p:nvSpPr>
-        <p:spPr>
-          <a:xfrm>
-            <a:off x="9189719" y="4709159"/>
-            <a:ext cx="1900488" cy="365760"/>
-          </a:xfrm>
-          <a:prstGeom prst="rect">
-            <a:avLst/>
-          </a:prstGeom>
-          <a:noFill/>
-        </p:spPr>
-        <p:txBody>
-          <a:bodyPr wrap="square" anchor="t">
-            <a:spAutoFit/>
-          </a:bodyPr>
-          <a:lstStyle/>
-          <a:p>
-            <a:pPr algn="ctr"/>
-            <a:r>
-              <a:rPr sz="1100" b="0">
-                <a:solidFill>
-                  <a:srgbClr val="5F7A80"/>
-                </a:solidFill>
-                <a:latin typeface="Patrick Hand"/>
+                <a:latin typeface="Inter"/>
               </a:rPr>
               <a:t>interject quiz card</a:t>
             </a:r>
@@ -6796,7 +6747,7 @@
       </p:sp>
       <p:graphicFrame>
         <p:nvGraphicFramePr>
-          <p:cNvPr id="15" name="Table 14"/>
+          <p:cNvPr id="13" name="Table 12"/>
           <p:cNvGraphicFramePr>
             <a:graphicFrameLocks noGrp="1"/>
           </p:cNvGraphicFramePr>
@@ -6828,9 +6779,9 @@
                       <a:r>
                         <a:rPr sz="1000" b="1">
                           <a:solidFill>
-                            <a:srgbClr val="0C343D"/>
+                            <a:srgbClr val="1C3B2E"/>
                           </a:solidFill>
-                          <a:latin typeface="Patrick Hand"/>
+                          <a:latin typeface="Inter"/>
                         </a:rPr>
                         <a:t>current quarter, same grade</a:t>
                       </a:r>
@@ -6838,7 +6789,7 @@
                   </a:txBody>
                   <a:tcPr marL="54864" marR="54864" marT="18288" marB="18288">
                     <a:solidFill>
-                      <a:srgbClr val="DDE7E4"/>
+                      <a:srgbClr val="F4EAD5"/>
                     </a:solidFill>
                   </a:tcPr>
                 </a:tc>
@@ -6850,9 +6801,9 @@
                       <a:r>
                         <a:rPr sz="1000" b="1">
                           <a:solidFill>
-                            <a:srgbClr val="0C343D"/>
+                            <a:srgbClr val="1C3B2E"/>
                           </a:solidFill>
-                          <a:latin typeface="Patrick Hand"/>
+                          <a:latin typeface="Inter"/>
                         </a:rPr>
                         <a:t>adjacent quarter</a:t>
                       </a:r>
@@ -6860,7 +6811,7 @@
                   </a:txBody>
                   <a:tcPr marL="54864" marR="54864" marT="18288" marB="18288">
                     <a:solidFill>
-                      <a:srgbClr val="DDE7E4"/>
+                      <a:srgbClr val="F4EAD5"/>
                     </a:solidFill>
                   </a:tcPr>
                 </a:tc>
@@ -6872,9 +6823,9 @@
                       <a:r>
                         <a:rPr sz="1000" b="1">
                           <a:solidFill>
-                            <a:srgbClr val="0C343D"/>
+                            <a:srgbClr val="1C3B2E"/>
                           </a:solidFill>
-                          <a:latin typeface="Patrick Hand"/>
+                          <a:latin typeface="Inter"/>
                         </a:rPr>
                         <a:t>other quarter, same grade</a:t>
                       </a:r>
@@ -6882,7 +6833,7 @@
                   </a:txBody>
                   <a:tcPr marL="54864" marR="54864" marT="18288" marB="18288">
                     <a:solidFill>
-                      <a:srgbClr val="DDE7E4"/>
+                      <a:srgbClr val="F4EAD5"/>
                     </a:solidFill>
                   </a:tcPr>
                 </a:tc>
@@ -6894,9 +6845,9 @@
                       <a:r>
                         <a:rPr sz="1000" b="1">
                           <a:solidFill>
-                            <a:srgbClr val="0C343D"/>
+                            <a:srgbClr val="1C3B2E"/>
                           </a:solidFill>
-                          <a:latin typeface="Patrick Hand"/>
+                          <a:latin typeface="Inter"/>
                         </a:rPr>
                         <a:t>adjacent grade, current</a:t>
                       </a:r>
@@ -6904,7 +6855,7 @@
                   </a:txBody>
                   <a:tcPr marL="54864" marR="54864" marT="18288" marB="18288">
                     <a:solidFill>
-                      <a:srgbClr val="DDE7E4"/>
+                      <a:srgbClr val="F4EAD5"/>
                     </a:solidFill>
                   </a:tcPr>
                 </a:tc>
@@ -6916,9 +6867,9 @@
                       <a:r>
                         <a:rPr sz="1000" b="1">
                           <a:solidFill>
-                            <a:srgbClr val="0C343D"/>
+                            <a:srgbClr val="1C3B2E"/>
                           </a:solidFill>
-                          <a:latin typeface="Patrick Hand"/>
+                          <a:latin typeface="Inter"/>
                         </a:rPr>
                         <a:t>off-curriculum</a:t>
                       </a:r>
@@ -6926,7 +6877,7 @@
                   </a:txBody>
                   <a:tcPr marL="54864" marR="54864" marT="18288" marB="18288">
                     <a:solidFill>
-                      <a:srgbClr val="DDE7E4"/>
+                      <a:srgbClr val="F4EAD5"/>
                     </a:solidFill>
                   </a:tcPr>
                 </a:tc>
@@ -6940,9 +6891,9 @@
                       <a:r>
                         <a:rPr sz="1000" b="0">
                           <a:solidFill>
-                            <a:srgbClr val="0C343D"/>
+                            <a:srgbClr val="1C3B2E"/>
                           </a:solidFill>
-                          <a:latin typeface="Patrick Hand"/>
+                          <a:latin typeface="Inter"/>
                         </a:rPr>
                         <a:t>×6</a:t>
                       </a:r>
@@ -6962,9 +6913,9 @@
                       <a:r>
                         <a:rPr sz="1000" b="0">
                           <a:solidFill>
-                            <a:srgbClr val="0C343D"/>
+                            <a:srgbClr val="1C3B2E"/>
                           </a:solidFill>
-                          <a:latin typeface="Patrick Hand"/>
+                          <a:latin typeface="Inter"/>
                         </a:rPr>
                         <a:t>×3</a:t>
                       </a:r>
@@ -6984,9 +6935,9 @@
                       <a:r>
                         <a:rPr sz="1000" b="0">
                           <a:solidFill>
-                            <a:srgbClr val="0C343D"/>
+                            <a:srgbClr val="1C3B2E"/>
                           </a:solidFill>
-                          <a:latin typeface="Patrick Hand"/>
+                          <a:latin typeface="Inter"/>
                         </a:rPr>
                         <a:t>×1.5</a:t>
                       </a:r>
@@ -7006,9 +6957,9 @@
                       <a:r>
                         <a:rPr sz="1000" b="0">
                           <a:solidFill>
-                            <a:srgbClr val="0C343D"/>
+                            <a:srgbClr val="1C3B2E"/>
                           </a:solidFill>
-                          <a:latin typeface="Patrick Hand"/>
+                          <a:latin typeface="Inter"/>
                         </a:rPr>
                         <a:t>×2</a:t>
                       </a:r>
@@ -7028,9 +6979,9 @@
                       <a:r>
                         <a:rPr sz="1000" b="0">
                           <a:solidFill>
-                            <a:srgbClr val="0C343D"/>
+                            <a:srgbClr val="1C3B2E"/>
                           </a:solidFill>
-                          <a:latin typeface="Patrick Hand"/>
+                          <a:latin typeface="Inter"/>
                         </a:rPr>
                         <a:t>×0.4</a:t>
                       </a:r>
@@ -7049,7 +7000,7 @@
       </p:graphicFrame>
       <p:sp>
         <p:nvSpPr>
-          <p:cNvPr id="16" name="TextBox 15"/>
+          <p:cNvPr id="14" name="TextBox 13"/>
           <p:cNvSpPr txBox="1"/>
           <p:nvPr/>
         </p:nvSpPr>
@@ -7077,9 +7028,9 @@
             <a:r>
               <a:rPr sz="1200">
                 <a:solidFill>
-                  <a:srgbClr val="0C343D"/>
+                  <a:srgbClr val="1C3B2E"/>
                 </a:solidFill>
-                <a:latin typeface="Patrick Hand"/>
+                <a:latin typeface="Inter"/>
               </a:rPr>
               <a:t>•  36,487 illustrated cards; 34,719 facts labelled to 324 competencies (LLM labels, 83% inter-model agreement; single-model cells down-weighted)</a:t>
             </a:r>
@@ -7093,9 +7044,9 @@
             <a:r>
               <a:rPr sz="1200">
                 <a:solidFill>
-                  <a:srgbClr val="0C343D"/>
+                  <a:srgbClr val="1C3B2E"/>
                 </a:solidFill>
-                <a:latin typeface="Patrick Hand"/>
+                <a:latin typeface="Inter"/>
               </a:rPr>
               <a:t>•  25,746 cards (70%) carry a verified quiz question</a:t>
             </a:r>
@@ -7109,9 +7060,9 @@
             <a:r>
               <a:rPr sz="1200">
                 <a:solidFill>
-                  <a:srgbClr val="0C343D"/>
+                  <a:srgbClr val="1C3B2E"/>
                 </a:solidFill>
-                <a:latin typeface="Patrick Hand"/>
+                <a:latin typeface="Inter"/>
               </a:rPr>
               <a:t>•  0 elementary competencies below floor; 38 junior-high competencies below floor in the card pool (16 once DepEd module cards are counted)</a:t>
             </a:r>
@@ -7146,7 +7097,7 @@
       <p:grpSpPr/>
       <p:pic>
         <p:nvPicPr>
-          <p:cNvPr id="2" name="Picture 1" descr="logo.png"/>
+          <p:cNvPr id="2" name="Picture 1" descr="icon.png"/>
           <p:cNvPicPr>
             <a:picLocks noChangeAspect="1"/>
           </p:cNvPicPr>
@@ -7160,8 +7111,8 @@
         </p:blipFill>
         <p:spPr>
           <a:xfrm>
-            <a:off x="411480" y="292608"/>
-            <a:ext cx="502920" cy="502920"/>
+            <a:off x="411480" y="274320"/>
+            <a:ext cx="548640" cy="548640"/>
           </a:xfrm>
           <a:prstGeom prst="rect">
             <a:avLst/>
@@ -7176,7 +7127,7 @@
         </p:nvSpPr>
         <p:spPr>
           <a:xfrm>
-            <a:off x="1051560" y="256032"/>
+            <a:off x="1097280" y="274320"/>
             <a:ext cx="10607040" cy="640080"/>
           </a:xfrm>
           <a:prstGeom prst="rect">
@@ -7192,11 +7143,11 @@
           <a:p>
             <a:pPr algn="l"/>
             <a:r>
-              <a:rPr sz="3000" b="0">
+              <a:rPr sz="2600" b="0">
                 <a:solidFill>
-                  <a:srgbClr val="165A6A"/>
+                  <a:srgbClr val="20342C"/>
                 </a:solidFill>
-                <a:latin typeface="Mansalva"/>
+                <a:latin typeface="Alfa Slab One"/>
               </a:rPr>
               <a:t>Model progress: fluency and pedagogy</a:t>
             </a:r>
@@ -7211,7 +7162,7 @@
         </p:nvSpPr>
         <p:spPr>
           <a:xfrm>
-            <a:off x="457200" y="896112"/>
+            <a:off x="457200" y="914400"/>
             <a:ext cx="11247120" cy="640080"/>
           </a:xfrm>
           <a:prstGeom prst="rect">
@@ -7227,11 +7178,11 @@
           <a:p>
             <a:pPr algn="l"/>
             <a:r>
-              <a:rPr sz="2000" b="0">
+              <a:rPr sz="1600" b="1">
                 <a:solidFill>
-                  <a:srgbClr val="0C343D"/>
+                  <a:srgbClr val="1C3B2E"/>
                 </a:solidFill>
-                <a:latin typeface="Caveat Brush"/>
+                <a:latin typeface="Inter"/>
               </a:rPr>
               <a:t>From a fluent-but-cautious 3B adapter line to a continued-pretrained 2B base that reads and writes Tagalog and Cebuano: fluency is measured on held-out text, pedagogy on scripted tutoring probes.</a:t>
             </a:r>
@@ -7247,13 +7198,13 @@
         <p:spPr>
           <a:xfrm>
             <a:off x="457200" y="1554480"/>
-            <a:ext cx="11274552" cy="9000"/>
+            <a:ext cx="11274552" cy="18000"/>
           </a:xfrm>
           <a:prstGeom prst="rect">
             <a:avLst/>
           </a:prstGeom>
           <a:solidFill>
-            <a:srgbClr val="165A6A"/>
+            <a:srgbClr val="D8A03A"/>
           </a:solidFill>
           <a:ln>
             <a:noFill/>
@@ -7307,9 +7258,9 @@
             <a:r>
               <a:rPr sz="1100" b="0">
                 <a:solidFill>
-                  <a:srgbClr val="5F7A80"/>
+                  <a:srgbClr val="5B6B52"/>
                 </a:solidFill>
-                <a:latin typeface="Patrick Hand"/>
+                <a:latin typeface="Inter"/>
               </a:rPr>
               <a:t>Hiraia · progress update · early September 2026 · hiraia.org</a:t>
             </a:r>
@@ -7342,9 +7293,9 @@
             <a:r>
               <a:rPr sz="1100" b="0">
                 <a:solidFill>
-                  <a:srgbClr val="5F7A80"/>
+                  <a:srgbClr val="5B6B52"/>
                 </a:solidFill>
-                <a:latin typeface="Patrick Hand"/>
+                <a:latin typeface="Inter"/>
               </a:rPr>
               <a:t>4</a:t>
             </a:r>
@@ -7383,8 +7334,8 @@
         </p:nvSpPr>
         <p:spPr>
           <a:xfrm>
-            <a:off x="457200" y="4800600"/>
-            <a:ext cx="5212080" cy="274320"/>
+            <a:off x="457200" y="4892040"/>
+            <a:ext cx="5303520" cy="274320"/>
           </a:xfrm>
           <a:prstGeom prst="rect">
             <a:avLst/>
@@ -7401,9 +7352,9 @@
             <a:r>
               <a:rPr sz="950" b="0">
                 <a:solidFill>
-                  <a:srgbClr val="5F7A80"/>
+                  <a:srgbClr val="5B6B52"/>
                 </a:solidFill>
-                <a:latin typeface="Patrick Hand"/>
+                <a:latin typeface="Inter"/>
               </a:rPr>
               <a:t>Tiles: pedagogy figures are from the June 3B line; language accuracy and hedging from the August 2B (SFT v1). The 2B capability run is pending.</a:t>
             </a:r>
@@ -7418,19 +7369,21 @@
         </p:nvSpPr>
         <p:spPr>
           <a:xfrm>
-            <a:off x="457200" y="5120640"/>
-            <a:ext cx="1645920" cy="1207008"/>
+            <a:off x="457200" y="5230368"/>
+            <a:ext cx="1645920" cy="1188720"/>
           </a:xfrm>
           <a:prstGeom prst="roundRect">
             <a:avLst>
-              <a:gd name="adj" fmla="val 12000"/>
+              <a:gd name="adj" fmla="val 6000"/>
             </a:avLst>
           </a:prstGeom>
           <a:solidFill>
-            <a:srgbClr val="DDE7E4"/>
+            <a:srgbClr val="F4EAD5"/>
           </a:solidFill>
-          <a:ln>
-            <a:noFill/>
+          <a:ln w="12700">
+            <a:solidFill>
+              <a:srgbClr val="1C3B2E"/>
+            </a:solidFill>
           </a:ln>
         </p:spPr>
         <p:style>
@@ -7463,8 +7416,8 @@
         </p:nvSpPr>
         <p:spPr>
           <a:xfrm>
-            <a:off x="457200" y="5148072"/>
-            <a:ext cx="1645920" cy="457200"/>
+            <a:off x="457200" y="5266944"/>
+            <a:ext cx="1645920" cy="411480"/>
           </a:xfrm>
           <a:prstGeom prst="rect">
             <a:avLst/>
@@ -7479,11 +7432,11 @@
           <a:p>
             <a:pPr algn="ctr"/>
             <a:r>
-              <a:rPr sz="2000" b="0">
+              <a:rPr sz="1500" b="0">
                 <a:solidFill>
-                  <a:srgbClr val="165A6A"/>
+                  <a:srgbClr val="1C3B2E"/>
                 </a:solidFill>
-                <a:latin typeface="Caveat Brush"/>
+                <a:latin typeface="Alfa Slab One"/>
               </a:rPr>
               <a:t>3.49 → 3.72</a:t>
             </a:r>
@@ -7498,8 +7451,8 @@
         </p:nvSpPr>
         <p:spPr>
           <a:xfrm>
-            <a:off x="502920" y="5577840"/>
-            <a:ext cx="1554480" cy="731520"/>
+            <a:off x="512064" y="5650992"/>
+            <a:ext cx="1536192" cy="731520"/>
           </a:xfrm>
           <a:prstGeom prst="rect">
             <a:avLst/>
@@ -7514,13 +7467,13 @@
           <a:p>
             <a:pPr algn="ctr"/>
             <a:r>
-              <a:rPr sz="900" b="0">
+              <a:rPr sz="850" b="0">
                 <a:solidFill>
-                  <a:srgbClr val="0C343D"/>
+                  <a:srgbClr val="1C3B2E"/>
                 </a:solidFill>
-                <a:latin typeface="Patrick Hand"/>
+                <a:latin typeface="Inter"/>
               </a:rPr>
-              <a:t>capability score (0–5), 102 tutoring probes — June 3B line; data rebalance alone, hybrid retrieval</a:t>
+              <a:t>capability score (0–5), 102 probes — June 3B line, rebalance only</a:t>
             </a:r>
           </a:p>
         </p:txBody>
@@ -7533,19 +7486,21 @@
         </p:nvSpPr>
         <p:spPr>
           <a:xfrm>
-            <a:off x="2212848" y="5120640"/>
-            <a:ext cx="1645920" cy="1207008"/>
+            <a:off x="2212848" y="5230368"/>
+            <a:ext cx="1645920" cy="1188720"/>
           </a:xfrm>
           <a:prstGeom prst="roundRect">
             <a:avLst>
-              <a:gd name="adj" fmla="val 12000"/>
+              <a:gd name="adj" fmla="val 6000"/>
             </a:avLst>
           </a:prstGeom>
           <a:solidFill>
-            <a:srgbClr val="DDE7E4"/>
+            <a:srgbClr val="F4EAD5"/>
           </a:solidFill>
-          <a:ln>
-            <a:noFill/>
+          <a:ln w="12700">
+            <a:solidFill>
+              <a:srgbClr val="1C3B2E"/>
+            </a:solidFill>
           </a:ln>
         </p:spPr>
         <p:style>
@@ -7578,8 +7533,8 @@
         </p:nvSpPr>
         <p:spPr>
           <a:xfrm>
-            <a:off x="2212848" y="5148072"/>
-            <a:ext cx="1645920" cy="457200"/>
+            <a:off x="2212848" y="5266944"/>
+            <a:ext cx="1645920" cy="411480"/>
           </a:xfrm>
           <a:prstGeom prst="rect">
             <a:avLst/>
@@ -7594,11 +7549,11 @@
           <a:p>
             <a:pPr algn="ctr"/>
             <a:r>
-              <a:rPr sz="2000" b="0">
+              <a:rPr sz="1500" b="0">
                 <a:solidFill>
-                  <a:srgbClr val="165A6A"/>
+                  <a:srgbClr val="1C3B2E"/>
                 </a:solidFill>
-                <a:latin typeface="Caveat Brush"/>
+                <a:latin typeface="Alfa Slab One"/>
               </a:rPr>
               <a:t>99 · 96 · 94%</a:t>
             </a:r>
@@ -7613,8 +7568,8 @@
         </p:nvSpPr>
         <p:spPr>
           <a:xfrm>
-            <a:off x="2258568" y="5577840"/>
-            <a:ext cx="1554480" cy="731520"/>
+            <a:off x="2267712" y="5650992"/>
+            <a:ext cx="1536192" cy="731520"/>
           </a:xfrm>
           <a:prstGeom prst="rect">
             <a:avLst/>
@@ -7629,13 +7584,13 @@
           <a:p>
             <a:pPr algn="ctr"/>
             <a:r>
-              <a:rPr sz="900" b="0">
+              <a:rPr sz="850" b="0">
                 <a:solidFill>
-                  <a:srgbClr val="0C343D"/>
+                  <a:srgbClr val="1C3B2E"/>
                 </a:solidFill>
-                <a:latin typeface="Patrick Hand"/>
+                <a:latin typeface="Inter"/>
               </a:rPr>
-              <a:t>reply-language accuracy, SFT v1 2B (Tagalog · Cebuano · English); Cebuano 99% after correcting fastText tl/ceb mislabels</a:t>
+              <a:t>reply-language accuracy, SFT v1 2B (tl · ceb · en); Cebuano 99% corrected</a:t>
             </a:r>
           </a:p>
         </p:txBody>
@@ -7648,19 +7603,21 @@
         </p:nvSpPr>
         <p:spPr>
           <a:xfrm>
-            <a:off x="3968496" y="5120640"/>
-            <a:ext cx="1645920" cy="1207008"/>
+            <a:off x="3968496" y="5230368"/>
+            <a:ext cx="1645920" cy="1188720"/>
           </a:xfrm>
           <a:prstGeom prst="roundRect">
             <a:avLst>
-              <a:gd name="adj" fmla="val 12000"/>
+              <a:gd name="adj" fmla="val 6000"/>
             </a:avLst>
           </a:prstGeom>
           <a:solidFill>
-            <a:srgbClr val="DDE7E4"/>
+            <a:srgbClr val="F4EAD5"/>
           </a:solidFill>
-          <a:ln>
-            <a:noFill/>
+          <a:ln w="12700">
+            <a:solidFill>
+              <a:srgbClr val="1C3B2E"/>
+            </a:solidFill>
           </a:ln>
         </p:spPr>
         <p:style>
@@ -7693,8 +7650,8 @@
         </p:nvSpPr>
         <p:spPr>
           <a:xfrm>
-            <a:off x="3968496" y="5148072"/>
-            <a:ext cx="1645920" cy="457200"/>
+            <a:off x="3968496" y="5266944"/>
+            <a:ext cx="1645920" cy="411480"/>
           </a:xfrm>
           <a:prstGeom prst="rect">
             <a:avLst/>
@@ -7709,11 +7666,11 @@
           <a:p>
             <a:pPr algn="ctr"/>
             <a:r>
-              <a:rPr sz="2000" b="0">
+              <a:rPr sz="1500" b="0">
                 <a:solidFill>
-                  <a:srgbClr val="165A6A"/>
+                  <a:srgbClr val="1C3B2E"/>
                 </a:solidFill>
-                <a:latin typeface="Caveat Brush"/>
+                <a:latin typeface="Alfa Slab One"/>
               </a:rPr>
               <a:t>64%</a:t>
             </a:r>
@@ -7728,8 +7685,8 @@
         </p:nvSpPr>
         <p:spPr>
           <a:xfrm>
-            <a:off x="4014215" y="5577840"/>
-            <a:ext cx="1554480" cy="731520"/>
+            <a:off x="4023359" y="5650992"/>
+            <a:ext cx="1536192" cy="731520"/>
           </a:xfrm>
           <a:prstGeom prst="rect">
             <a:avLst/>
@@ -7744,13 +7701,13 @@
           <a:p>
             <a:pPr algn="ctr"/>
             <a:r>
-              <a:rPr sz="900" b="0">
+              <a:rPr sz="850" b="0">
                 <a:solidFill>
-                  <a:srgbClr val="0C343D"/>
+                  <a:srgbClr val="1C3B2E"/>
                 </a:solidFill>
-                <a:latin typeface="Patrick Hand"/>
+                <a:latin typeface="Inter"/>
               </a:rPr>
-              <a:t>of Tagalog replies open with an 'I'm not sure' hedge (SFT v1 2B); about two-thirds go on to explain the term anyway</a:t>
+              <a:t>of Tagalog replies open with a hedge; two-thirds still explain the term</a:t>
             </a:r>
           </a:p>
         </p:txBody>
@@ -7764,7 +7721,7 @@
         <p:spPr>
           <a:xfrm>
             <a:off x="5852160" y="1737360"/>
-            <a:ext cx="4572000" cy="365760"/>
+            <a:ext cx="5852160" cy="365760"/>
           </a:xfrm>
           <a:prstGeom prst="rect">
             <a:avLst/>
@@ -7779,11 +7736,11 @@
           <a:p>
             <a:pPr algn="l"/>
             <a:r>
-              <a:rPr sz="1500" b="0">
+              <a:rPr sz="1300" b="0">
                 <a:solidFill>
-                  <a:srgbClr val="165A6A"/>
+                  <a:srgbClr val="20342C"/>
                 </a:solidFill>
-                <a:latin typeface="Caveat Brush"/>
+                <a:latin typeface="Alfa Slab One"/>
               </a:rPr>
               <a:t>Pedagogy (measured on scripted probes)</a:t>
             </a:r>
@@ -7799,7 +7756,7 @@
         <p:spPr>
           <a:xfrm>
             <a:off x="5852160" y="2103120"/>
-            <a:ext cx="4572000" cy="1737360"/>
+            <a:ext cx="5852160" cy="1737360"/>
           </a:xfrm>
           <a:prstGeom prst="rect">
             <a:avLst/>
@@ -7816,9 +7773,9 @@
             <a:r>
               <a:rPr sz="1250" b="0">
                 <a:solidFill>
-                  <a:srgbClr val="0C343D"/>
+                  <a:srgbClr val="1C3B2E"/>
                 </a:solidFill>
-                <a:latin typeface="Patrick Hand"/>
+                <a:latin typeface="Inter"/>
               </a:rPr>
               <a:t>Scripted probes (102 in June, 143 now; 11 tiers, LLM-judged 0–5) showed the June model fluent but over-cautious: 19 of 91 answerable questions were refused. A retrieval fix plus a small data rebalance (+82 rows) lifted the score 3.32 → 3.72 (rebalance alone +0.22), and grounding faithfulness was fixed — the tutor defers to retrieved verified facts and abstains when none apply. The 2B line inherits the same harness; its capability run is the next measurement.</a:t>
             </a:r>
@@ -7834,7 +7791,7 @@
         <p:spPr>
           <a:xfrm>
             <a:off x="5852160" y="3886200"/>
-            <a:ext cx="4572000" cy="365760"/>
+            <a:ext cx="5852160" cy="365760"/>
           </a:xfrm>
           <a:prstGeom prst="rect">
             <a:avLst/>
@@ -7849,11 +7806,11 @@
           <a:p>
             <a:pPr algn="l"/>
             <a:r>
-              <a:rPr sz="1500" b="0">
+              <a:rPr sz="1300" b="0">
                 <a:solidFill>
-                  <a:srgbClr val="165A6A"/>
+                  <a:srgbClr val="20342C"/>
                 </a:solidFill>
-                <a:latin typeface="Caveat Brush"/>
+                <a:latin typeface="Alfa Slab One"/>
               </a:rPr>
               <a:t>Known weaknesses (measured)</a:t>
             </a:r>
@@ -7869,7 +7826,7 @@
         <p:spPr>
           <a:xfrm>
             <a:off x="5852160" y="4251960"/>
-            <a:ext cx="4572000" cy="2011680"/>
+            <a:ext cx="5852160" cy="2011680"/>
           </a:xfrm>
           <a:prstGeom prst="rect">
             <a:avLst/>
@@ -7890,9 +7847,9 @@
             <a:r>
               <a:rPr sz="1150">
                 <a:solidFill>
-                  <a:srgbClr val="0C343D"/>
+                  <a:srgbClr val="1C3B2E"/>
                 </a:solidFill>
-                <a:latin typeface="Patrick Hand"/>
+                <a:latin typeface="Inter"/>
               </a:rPr>
               <a:t>•  Hedging: the SFT v1 2B prefixes 64% of Tagalog replies with a 'not sure' clause on grade-5 terms; about two-thirds of those then explain the term — a template-wording effect, not a knowledge gap</a:t>
             </a:r>
@@ -7906,9 +7863,9 @@
             <a:r>
               <a:rPr sz="1150">
                 <a:solidFill>
-                  <a:srgbClr val="0C343D"/>
+                  <a:srgbClr val="1C3B2E"/>
                 </a:solidFill>
-                <a:latin typeface="Patrick Hand"/>
+                <a:latin typeface="Inter"/>
               </a:rPr>
               <a:t>•  English mode-lock is the 2B's fragile edge (94% vs 99% in Tagalog and Cebuano); misroutes fall to Tagalog</a:t>
             </a:r>
@@ -7922,128 +7879,11 @@
             <a:r>
               <a:rPr sz="1150">
                 <a:solidFill>
-                  <a:srgbClr val="0C343D"/>
+                  <a:srgbClr val="1C3B2E"/>
                 </a:solidFill>
-                <a:latin typeface="Patrick Hand"/>
+                <a:latin typeface="Inter"/>
               </a:rPr>
               <a:t>•  The 1B budget tier cannot learn safety negation (DPO tested and rejected); junior-high content is thinner than elementary</a:t>
-            </a:r>
-          </a:p>
-        </p:txBody>
-      </p:sp>
-      <p:sp>
-        <p:nvSpPr>
-          <p:cNvPr id="23" name="Rounded Rectangle 22"/>
-          <p:cNvSpPr/>
-          <p:nvPr/>
-        </p:nvSpPr>
-        <p:spPr>
-          <a:xfrm>
-            <a:off x="10652760" y="1737360"/>
-            <a:ext cx="1267358" cy="2743200"/>
-          </a:xfrm>
-          <a:prstGeom prst="roundRect">
-            <a:avLst>
-              <a:gd name="adj" fmla="val 8000"/>
-            </a:avLst>
-          </a:prstGeom>
-          <a:solidFill>
-            <a:srgbClr val="DDE7E4"/>
-          </a:solidFill>
-          <a:ln w="12700">
-            <a:solidFill>
-              <a:srgbClr val="165A6A"/>
-            </a:solidFill>
-          </a:ln>
-        </p:spPr>
-        <p:style>
-          <a:lnRef idx="1">
-            <a:schemeClr val="accent1"/>
-          </a:lnRef>
-          <a:fillRef idx="3">
-            <a:schemeClr val="accent1"/>
-          </a:fillRef>
-          <a:effectRef idx="2">
-            <a:schemeClr val="accent1"/>
-          </a:effectRef>
-          <a:fontRef idx="minor">
-            <a:schemeClr val="lt1"/>
-          </a:fontRef>
-        </p:style>
-        <p:txBody>
-          <a:bodyPr rtlCol="0" anchor="ctr"/>
-          <a:lstStyle/>
-          <a:p>
-            <a:pPr algn="ctr"/>
-          </a:p>
-        </p:txBody>
-      </p:sp>
-      <p:sp>
-        <p:nvSpPr>
-          <p:cNvPr id="24" name="TextBox 23"/>
-          <p:cNvSpPr txBox="1"/>
-          <p:nvPr/>
-        </p:nvSpPr>
-        <p:spPr>
-          <a:xfrm>
-            <a:off x="10725912" y="2331720"/>
-            <a:ext cx="1121054" cy="1554480"/>
-          </a:xfrm>
-          <a:prstGeom prst="rect">
-            <a:avLst/>
-          </a:prstGeom>
-          <a:noFill/>
-        </p:spPr>
-        <p:txBody>
-          <a:bodyPr wrap="square" anchor="t">
-            <a:spAutoFit/>
-          </a:bodyPr>
-          <a:lstStyle/>
-          <a:p>
-            <a:pPr algn="ctr"/>
-            <a:r>
-              <a:rPr sz="950" b="0">
-                <a:solidFill>
-                  <a:srgbClr val="5F7A80"/>
-                </a:solidFill>
-                <a:latin typeface="Patrick Hand"/>
-              </a:rPr>
-              <a:t>placeholder — screenshot of the unpublished question-cards build (commit 58d358495); not in the published v0.1 APK</a:t>
-            </a:r>
-          </a:p>
-        </p:txBody>
-      </p:sp>
-      <p:sp>
-        <p:nvSpPr>
-          <p:cNvPr id="25" name="TextBox 24"/>
-          <p:cNvSpPr txBox="1"/>
-          <p:nvPr/>
-        </p:nvSpPr>
-        <p:spPr>
-          <a:xfrm>
-            <a:off x="10378440" y="4526280"/>
-            <a:ext cx="1815998" cy="365760"/>
-          </a:xfrm>
-          <a:prstGeom prst="rect">
-            <a:avLst/>
-          </a:prstGeom>
-          <a:noFill/>
-        </p:spPr>
-        <p:txBody>
-          <a:bodyPr wrap="square" anchor="t">
-            <a:spAutoFit/>
-          </a:bodyPr>
-          <a:lstStyle/>
-          <a:p>
-            <a:pPr algn="ctr"/>
-            <a:r>
-              <a:rPr sz="1100" b="0">
-                <a:solidFill>
-                  <a:srgbClr val="5F7A80"/>
-                </a:solidFill>
-                <a:latin typeface="Patrick Hand"/>
-              </a:rPr>
-              <a:t>grade + language settings</a:t>
             </a:r>
           </a:p>
         </p:txBody>
@@ -8076,7 +7916,7 @@
       <p:grpSpPr/>
       <p:pic>
         <p:nvPicPr>
-          <p:cNvPr id="2" name="Picture 1" descr="logo.png"/>
+          <p:cNvPr id="2" name="Picture 1" descr="icon.png"/>
           <p:cNvPicPr>
             <a:picLocks noChangeAspect="1"/>
           </p:cNvPicPr>
@@ -8090,8 +7930,8 @@
         </p:blipFill>
         <p:spPr>
           <a:xfrm>
-            <a:off x="411480" y="292608"/>
-            <a:ext cx="502920" cy="502920"/>
+            <a:off x="411480" y="274320"/>
+            <a:ext cx="548640" cy="548640"/>
           </a:xfrm>
           <a:prstGeom prst="rect">
             <a:avLst/>
@@ -8106,7 +7946,7 @@
         </p:nvSpPr>
         <p:spPr>
           <a:xfrm>
-            <a:off x="1051560" y="256032"/>
+            <a:off x="1097280" y="274320"/>
             <a:ext cx="10607040" cy="640080"/>
           </a:xfrm>
           <a:prstGeom prst="rect">
@@ -8122,11 +7962,11 @@
           <a:p>
             <a:pPr algn="l"/>
             <a:r>
-              <a:rPr sz="3000" b="0">
+              <a:rPr sz="2600" b="0">
                 <a:solidFill>
-                  <a:srgbClr val="165A6A"/>
+                  <a:srgbClr val="20342C"/>
                 </a:solidFill>
-                <a:latin typeface="Mansalva"/>
+                <a:latin typeface="Alfa Slab One"/>
               </a:rPr>
               <a:t>Next 2–3 weeks</a:t>
             </a:r>
@@ -8141,7 +7981,7 @@
         </p:nvSpPr>
         <p:spPr>
           <a:xfrm>
-            <a:off x="457200" y="896112"/>
+            <a:off x="457200" y="914400"/>
             <a:ext cx="11247120" cy="640080"/>
           </a:xfrm>
           <a:prstGeom prst="rect">
@@ -8157,11 +7997,11 @@
           <a:p>
             <a:pPr algn="l"/>
             <a:r>
-              <a:rPr sz="2000" b="0">
+              <a:rPr sz="1600" b="1">
                 <a:solidFill>
-                  <a:srgbClr val="0C343D"/>
+                  <a:srgbClr val="1C3B2E"/>
                 </a:solidFill>
-                <a:latin typeface="Caveat Brush"/>
+                <a:latin typeface="Inter"/>
               </a:rPr>
               <a:t>Consolidate the model, then prove it on the device.</a:t>
             </a:r>
@@ -8177,13 +8017,13 @@
         <p:spPr>
           <a:xfrm>
             <a:off x="457200" y="1554480"/>
-            <a:ext cx="11274552" cy="9000"/>
+            <a:ext cx="11274552" cy="18000"/>
           </a:xfrm>
           <a:prstGeom prst="rect">
             <a:avLst/>
           </a:prstGeom>
           <a:solidFill>
-            <a:srgbClr val="165A6A"/>
+            <a:srgbClr val="D8A03A"/>
           </a:solidFill>
           <a:ln>
             <a:noFill/>
@@ -8237,9 +8077,9 @@
             <a:r>
               <a:rPr sz="1100" b="0">
                 <a:solidFill>
-                  <a:srgbClr val="5F7A80"/>
+                  <a:srgbClr val="5B6B52"/>
                 </a:solidFill>
-                <a:latin typeface="Patrick Hand"/>
+                <a:latin typeface="Inter"/>
               </a:rPr>
               <a:t>Hiraia · progress update · early September 2026 · hiraia.org</a:t>
             </a:r>
@@ -8272,9 +8112,9 @@
             <a:r>
               <a:rPr sz="1100" b="0">
                 <a:solidFill>
-                  <a:srgbClr val="5F7A80"/>
+                  <a:srgbClr val="5B6B52"/>
                 </a:solidFill>
-                <a:latin typeface="Patrick Hand"/>
+                <a:latin typeface="Inter"/>
               </a:rPr>
               <a:t>5</a:t>
             </a:r>
@@ -8309,11 +8149,11 @@
               </a:spcAft>
             </a:pPr>
             <a:r>
-              <a:rPr sz="1600">
+              <a:rPr sz="1400">
                 <a:solidFill>
-                  <a:srgbClr val="0C343D"/>
+                  <a:srgbClr val="1C3B2E"/>
                 </a:solidFill>
-                <a:latin typeface="Patrick Hand"/>
+                <a:latin typeface="Inter"/>
               </a:rPr>
               <a:t>•  More SFT and knowledge distillation on the CPT base (mode-locked buckets, teacher-generated tutoring turns)</a:t>
             </a:r>
@@ -8325,11 +8165,11 @@
               </a:spcAft>
             </a:pPr>
             <a:r>
-              <a:rPr sz="1600">
+              <a:rPr sz="1400">
                 <a:solidFill>
-                  <a:srgbClr val="0C343D"/>
+                  <a:srgbClr val="1C3B2E"/>
                 </a:solidFill>
-                <a:latin typeface="Patrick Hand"/>
+                <a:latin typeface="Inter"/>
               </a:rPr>
               <a:t>•  Extensive synthetic testing on-device: scripted student sessions on the Redmi, TTFT and per-page latency budgets</a:t>
             </a:r>
@@ -8341,11 +8181,11 @@
               </a:spcAft>
             </a:pPr>
             <a:r>
-              <a:rPr sz="1600">
+              <a:rPr sz="1400">
                 <a:solidFill>
-                  <a:srgbClr val="0C343D"/>
+                  <a:srgbClr val="1C3B2E"/>
                 </a:solidFill>
-                <a:latin typeface="Patrick Hand"/>
+                <a:latin typeface="Inter"/>
               </a:rPr>
               <a:t>•  Model-as-judge quality control on every generated fact, quiz and translation (decorrelated judge, AUP-safe routing)</a:t>
             </a:r>
@@ -8357,11 +8197,11 @@
               </a:spcAft>
             </a:pPr>
             <a:r>
-              <a:rPr sz="1600">
+              <a:rPr sz="1400">
                 <a:solidFill>
-                  <a:srgbClr val="0C343D"/>
+                  <a:srgbClr val="1C3B2E"/>
                 </a:solidFill>
-                <a:latin typeface="Patrick Hand"/>
+                <a:latin typeface="Inter"/>
               </a:rPr>
               <a:t>•  APK-level optimisations: bundle size (engravings subset, indexed PNG), cold start, SQLite migrations, edge-walk cost</a:t>
             </a:r>
@@ -8396,11 +8236,11 @@
               </a:spcAft>
             </a:pPr>
             <a:r>
-              <a:rPr sz="1600">
+              <a:rPr sz="1400">
                 <a:solidFill>
-                  <a:srgbClr val="0C343D"/>
+                  <a:srgbClr val="1C3B2E"/>
                 </a:solidFill>
-                <a:latin typeface="Patrick Hand"/>
+                <a:latin typeface="Inter"/>
               </a:rPr>
               <a:t>•  Native-speaker review of the Tagalog and Cebuano copy (onboarding, settings, hedging clause)</a:t>
             </a:r>
@@ -8412,11 +8252,11 @@
               </a:spcAft>
             </a:pPr>
             <a:r>
-              <a:rPr sz="1600">
+              <a:rPr sz="1400">
                 <a:solidFill>
-                  <a:srgbClr val="0C343D"/>
+                  <a:srgbClr val="1C3B2E"/>
                 </a:solidFill>
-                <a:latin typeface="Patrick Hand"/>
+                <a:latin typeface="Inter"/>
               </a:rPr>
               <a:t>•  Junior-high gap fill: Lane B facts for the 16 remaining thin competencies; module-card supply</a:t>
             </a:r>
@@ -8428,11 +8268,11 @@
               </a:spcAft>
             </a:pPr>
             <a:r>
-              <a:rPr sz="1600">
+              <a:rPr sz="1400">
                 <a:solidFill>
-                  <a:srgbClr val="0C343D"/>
+                  <a:srgbClr val="1C3B2E"/>
                 </a:solidFill>
-                <a:latin typeface="Patrick Hand"/>
+                <a:latin typeface="Inter"/>
               </a:rPr>
               <a:t>•  Finish the quiz lane (10.7k pool cards still without a question) and per-competency Miss-Card labels</a:t>
             </a:r>
@@ -8444,11 +8284,11 @@
               </a:spcAft>
             </a:pPr>
             <a:r>
-              <a:rPr sz="1600">
+              <a:rPr sz="1400">
                 <a:solidFill>
-                  <a:srgbClr val="0C343D"/>
+                  <a:srgbClr val="1C3B2E"/>
                 </a:solidFill>
-                <a:latin typeface="Patrick Hand"/>
+                <a:latin typeface="Inter"/>
               </a:rPr>
               <a:t>•  Over-the-air fact-bank updates so content ships without an APK</a:t>
             </a:r>
@@ -8460,11 +8300,11 @@
               </a:spcAft>
             </a:pPr>
             <a:r>
-              <a:rPr sz="1600">
+              <a:rPr sz="1400">
                 <a:solidFill>
-                  <a:srgbClr val="0C343D"/>
+                  <a:srgbClr val="1C3B2E"/>
                 </a:solidFill>
-                <a:latin typeface="Patrick Hand"/>
+                <a:latin typeface="Inter"/>
               </a:rPr>
               <a:t>•  Retrieval-QA cases per new competency before each gate run</a:t>
             </a:r>
@@ -8476,11 +8316,11 @@
               </a:spcAft>
             </a:pPr>
             <a:r>
-              <a:rPr sz="1600">
+              <a:rPr sz="1400">
                 <a:solidFill>
-                  <a:srgbClr val="0C343D"/>
+                  <a:srgbClr val="1C3B2E"/>
                 </a:solidFill>
-                <a:latin typeface="Patrick Hand"/>
+                <a:latin typeface="Inter"/>
               </a:rPr>
               <a:t>•  Draft a classroom-pilot protocol (consent, offline logging, pre/post measures) to propose to DepEd schools</a:t>
             </a:r>
@@ -8511,11 +8351,11 @@
           <a:p>
             <a:pPr algn="l"/>
             <a:r>
-              <a:rPr sz="1400" b="0">
+              <a:rPr sz="1300" b="1">
                 <a:solidFill>
-                  <a:srgbClr val="165A6A"/>
+                  <a:srgbClr val="20342C"/>
                 </a:solidFill>
-                <a:latin typeface="Caveat Brush"/>
+                <a:latin typeface="Inter"/>
               </a:rPr>
               <a:t>To report next time: the 2B capability run on the same 143 probes; on-device TTFT and per-page latency on the Redmi; quiz coverage after the lane completes; bundle size after optimisation.</a:t>
             </a:r>
@@ -8550,7 +8390,7 @@
       <p:grpSpPr/>
       <p:pic>
         <p:nvPicPr>
-          <p:cNvPr id="2" name="Picture 1" descr="logo.png"/>
+          <p:cNvPr id="2" name="Picture 1" descr="icon.png"/>
           <p:cNvPicPr>
             <a:picLocks noChangeAspect="1"/>
           </p:cNvPicPr>
@@ -8564,8 +8404,8 @@
         </p:blipFill>
         <p:spPr>
           <a:xfrm>
-            <a:off x="411480" y="292608"/>
-            <a:ext cx="502920" cy="502920"/>
+            <a:off x="411480" y="274320"/>
+            <a:ext cx="548640" cy="548640"/>
           </a:xfrm>
           <a:prstGeom prst="rect">
             <a:avLst/>
@@ -8580,7 +8420,7 @@
         </p:nvSpPr>
         <p:spPr>
           <a:xfrm>
-            <a:off x="1051560" y="256032"/>
+            <a:off x="1097280" y="274320"/>
             <a:ext cx="10607040" cy="640080"/>
           </a:xfrm>
           <a:prstGeom prst="rect">
@@ -8596,11 +8436,11 @@
           <a:p>
             <a:pPr algn="l"/>
             <a:r>
-              <a:rPr sz="3000" b="0">
+              <a:rPr sz="2600" b="0">
                 <a:solidFill>
-                  <a:srgbClr val="165A6A"/>
+                  <a:srgbClr val="20342C"/>
                 </a:solidFill>
-                <a:latin typeface="Mansalva"/>
+                <a:latin typeface="Alfa Slab One"/>
               </a:rPr>
               <a:t>Links</a:t>
             </a:r>
@@ -8615,7 +8455,7 @@
         </p:nvSpPr>
         <p:spPr>
           <a:xfrm>
-            <a:off x="457200" y="896112"/>
+            <a:off x="457200" y="914400"/>
             <a:ext cx="11247120" cy="640080"/>
           </a:xfrm>
           <a:prstGeom prst="rect">
@@ -8631,11 +8471,11 @@
           <a:p>
             <a:pPr algn="l"/>
             <a:r>
-              <a:rPr sz="2000" b="0">
+              <a:rPr sz="1600" b="1">
                 <a:solidFill>
-                  <a:srgbClr val="0C343D"/>
+                  <a:srgbClr val="1C3B2E"/>
                 </a:solidFill>
-                <a:latin typeface="Caveat Brush"/>
+                <a:latin typeface="Inter"/>
               </a:rPr>
               <a:t>Code, build and evaluation records are public; model weights follow once the release checklist is done.</a:t>
             </a:r>
@@ -8651,13 +8491,13 @@
         <p:spPr>
           <a:xfrm>
             <a:off x="457200" y="1554480"/>
-            <a:ext cx="11274552" cy="9000"/>
+            <a:ext cx="11274552" cy="18000"/>
           </a:xfrm>
           <a:prstGeom prst="rect">
             <a:avLst/>
           </a:prstGeom>
           <a:solidFill>
-            <a:srgbClr val="165A6A"/>
+            <a:srgbClr val="D8A03A"/>
           </a:solidFill>
           <a:ln>
             <a:noFill/>
@@ -8711,9 +8551,9 @@
             <a:r>
               <a:rPr sz="1100" b="0">
                 <a:solidFill>
-                  <a:srgbClr val="5F7A80"/>
+                  <a:srgbClr val="5B6B52"/>
                 </a:solidFill>
-                <a:latin typeface="Patrick Hand"/>
+                <a:latin typeface="Inter"/>
               </a:rPr>
               <a:t>Hiraia · progress update · early September 2026 · hiraia.org</a:t>
             </a:r>
@@ -8746,9 +8586,9 @@
             <a:r>
               <a:rPr sz="1100" b="0">
                 <a:solidFill>
-                  <a:srgbClr val="5F7A80"/>
+                  <a:srgbClr val="5B6B52"/>
                 </a:solidFill>
-                <a:latin typeface="Patrick Hand"/>
+                <a:latin typeface="Inter"/>
               </a:rPr>
               <a:t>6</a:t>
             </a:r>
@@ -8764,7 +8604,7 @@
         <p:spPr>
           <a:xfrm>
             <a:off x="731520" y="1828800"/>
-            <a:ext cx="2926080" cy="548640"/>
+            <a:ext cx="3566160" cy="548640"/>
           </a:xfrm>
           <a:prstGeom prst="rect">
             <a:avLst/>
@@ -8779,11 +8619,11 @@
           <a:p>
             <a:pPr algn="l"/>
             <a:r>
-              <a:rPr sz="2200" b="0">
+              <a:rPr sz="1700" b="0">
                 <a:solidFill>
-                  <a:srgbClr val="165A6A"/>
+                  <a:srgbClr val="20342C"/>
                 </a:solidFill>
-                <a:latin typeface="Caveat Brush"/>
+                <a:latin typeface="Alfa Slab One"/>
               </a:rPr>
               <a:t>Website</a:t>
             </a:r>
@@ -8798,8 +8638,8 @@
         </p:nvSpPr>
         <p:spPr>
           <a:xfrm>
-            <a:off x="3657600" y="1874519"/>
-            <a:ext cx="7863840" cy="548640"/>
+            <a:off x="4160520" y="1856231"/>
+            <a:ext cx="7406640" cy="548640"/>
           </a:xfrm>
           <a:prstGeom prst="rect">
             <a:avLst/>
@@ -8814,11 +8654,11 @@
           <a:p>
             <a:pPr algn="l"/>
             <a:r>
-              <a:rPr sz="2000" b="0">
+              <a:rPr sz="1900" b="0">
                 <a:solidFill>
-                  <a:srgbClr val="0F4A56"/>
+                  <a:srgbClr val="2B4C7E"/>
                 </a:solidFill>
-                <a:latin typeface="Patrick Hand"/>
+                <a:latin typeface="Inter"/>
                 <a:hlinkClick r:id="rId3"/>
               </a:rPr>
               <a:t>https://hiraia.org</a:t>
@@ -8835,7 +8675,7 @@
         <p:spPr>
           <a:xfrm>
             <a:off x="731520" y="2880360"/>
-            <a:ext cx="2926080" cy="548640"/>
+            <a:ext cx="3566160" cy="548640"/>
           </a:xfrm>
           <a:prstGeom prst="rect">
             <a:avLst/>
@@ -8850,11 +8690,11 @@
           <a:p>
             <a:pPr algn="l"/>
             <a:r>
-              <a:rPr sz="2200" b="0">
+              <a:rPr sz="1700" b="0">
                 <a:solidFill>
-                  <a:srgbClr val="165A6A"/>
+                  <a:srgbClr val="20342C"/>
                 </a:solidFill>
-                <a:latin typeface="Caveat Brush"/>
+                <a:latin typeface="Alfa Slab One"/>
               </a:rPr>
               <a:t>APK (direct download)</a:t>
             </a:r>
@@ -8869,8 +8709,8 @@
         </p:nvSpPr>
         <p:spPr>
           <a:xfrm>
-            <a:off x="3657600" y="2926079"/>
-            <a:ext cx="7863840" cy="548640"/>
+            <a:off x="4160520" y="2907791"/>
+            <a:ext cx="7406640" cy="548640"/>
           </a:xfrm>
           <a:prstGeom prst="rect">
             <a:avLst/>
@@ -8885,11 +8725,11 @@
           <a:p>
             <a:pPr algn="l"/>
             <a:r>
-              <a:rPr sz="2000" b="0">
+              <a:rPr sz="1900" b="0">
                 <a:solidFill>
-                  <a:srgbClr val="0F4A56"/>
+                  <a:srgbClr val="2B4C7E"/>
                 </a:solidFill>
-                <a:latin typeface="Patrick Hand"/>
+                <a:latin typeface="Inter"/>
                 <a:hlinkClick r:id="rId4"/>
               </a:rPr>
               <a:t>https://hiraia.org/models/hiraia.apk</a:t>
@@ -8905,8 +8745,8 @@
         </p:nvSpPr>
         <p:spPr>
           <a:xfrm>
-            <a:off x="3657600" y="3337560"/>
-            <a:ext cx="7863840" cy="365760"/>
+            <a:off x="4160520" y="3300984"/>
+            <a:ext cx="7406640" cy="365760"/>
           </a:xfrm>
           <a:prstGeom prst="rect">
             <a:avLst/>
@@ -8921,11 +8761,11 @@
           <a:p>
             <a:pPr algn="l"/>
             <a:r>
-              <a:rPr sz="1200" b="0">
+              <a:rPr sz="1150" b="0">
                 <a:solidFill>
-                  <a:srgbClr val="5F7A80"/>
+                  <a:srgbClr val="5B6B52"/>
                 </a:solidFill>
-                <a:latin typeface="Patrick Hand"/>
+                <a:latin typeface="Inter"/>
               </a:rPr>
               <a:t>v0.1.0, 325 MB, sha256 708ea605…, Android 12+, 6 GB+ RAM; mirror: github.com/helloluis/hiraia/releases/tag/v0.1.0</a:t>
             </a:r>
@@ -8941,7 +8781,7 @@
         <p:spPr>
           <a:xfrm>
             <a:off x="731520" y="3931920"/>
-            <a:ext cx="2926080" cy="548640"/>
+            <a:ext cx="3566160" cy="548640"/>
           </a:xfrm>
           <a:prstGeom prst="rect">
             <a:avLst/>
@@ -8956,11 +8796,11 @@
           <a:p>
             <a:pPr algn="l"/>
             <a:r>
-              <a:rPr sz="2200" b="0">
+              <a:rPr sz="1700" b="0">
                 <a:solidFill>
-                  <a:srgbClr val="165A6A"/>
+                  <a:srgbClr val="20342C"/>
                 </a:solidFill>
-                <a:latin typeface="Caveat Brush"/>
+                <a:latin typeface="Alfa Slab One"/>
               </a:rPr>
               <a:t>GitHub</a:t>
             </a:r>
@@ -8975,8 +8815,8 @@
         </p:nvSpPr>
         <p:spPr>
           <a:xfrm>
-            <a:off x="3657600" y="3977639"/>
-            <a:ext cx="7863840" cy="548640"/>
+            <a:off x="4160520" y="3959352"/>
+            <a:ext cx="7406640" cy="548640"/>
           </a:xfrm>
           <a:prstGeom prst="rect">
             <a:avLst/>
@@ -8991,11 +8831,11 @@
           <a:p>
             <a:pPr algn="l"/>
             <a:r>
-              <a:rPr sz="2000" b="0">
+              <a:rPr sz="1900" b="0">
                 <a:solidFill>
-                  <a:srgbClr val="0F4A56"/>
+                  <a:srgbClr val="2B4C7E"/>
                 </a:solidFill>
-                <a:latin typeface="Patrick Hand"/>
+                <a:latin typeface="Inter"/>
                 <a:hlinkClick r:id="rId5"/>
               </a:rPr>
               <a:t>https://github.com/helloluis/hiraia</a:t>
@@ -9011,8 +8851,8 @@
         </p:nvSpPr>
         <p:spPr>
           <a:xfrm>
-            <a:off x="3657600" y="4389120"/>
-            <a:ext cx="7863840" cy="365760"/>
+            <a:off x="4160520" y="4352544"/>
+            <a:ext cx="7406640" cy="365760"/>
           </a:xfrm>
           <a:prstGeom prst="rect">
             <a:avLst/>
@@ -9027,11 +8867,11 @@
           <a:p>
             <a:pPr algn="l"/>
             <a:r>
-              <a:rPr sz="1200" b="0">
+              <a:rPr sz="1150" b="0">
                 <a:solidFill>
-                  <a:srgbClr val="5F7A80"/>
+                  <a:srgbClr val="5B6B52"/>
                 </a:solidFill>
-                <a:latin typeface="Patrick Hand"/>
+                <a:latin typeface="Inter"/>
               </a:rPr>
               <a:t>source, pipelines and evaluation harness (public)</a:t>
             </a:r>
@@ -9047,7 +8887,7 @@
         <p:spPr>
           <a:xfrm>
             <a:off x="731520" y="4983479"/>
-            <a:ext cx="2926080" cy="548640"/>
+            <a:ext cx="3566160" cy="548640"/>
           </a:xfrm>
           <a:prstGeom prst="rect">
             <a:avLst/>
@@ -9062,11 +8902,11 @@
           <a:p>
             <a:pPr algn="l"/>
             <a:r>
-              <a:rPr sz="2200" b="0">
+              <a:rPr sz="1700" b="0">
                 <a:solidFill>
-                  <a:srgbClr val="165A6A"/>
+                  <a:srgbClr val="20342C"/>
                 </a:solidFill>
-                <a:latin typeface="Caveat Brush"/>
+                <a:latin typeface="Alfa Slab One"/>
               </a:rPr>
               <a:t>Hugging Face</a:t>
             </a:r>
@@ -9081,8 +8921,8 @@
         </p:nvSpPr>
         <p:spPr>
           <a:xfrm>
-            <a:off x="3657600" y="5029200"/>
-            <a:ext cx="7863840" cy="548640"/>
+            <a:off x="4160520" y="5010912"/>
+            <a:ext cx="7406640" cy="548640"/>
           </a:xfrm>
           <a:prstGeom prst="rect">
             <a:avLst/>
@@ -9097,11 +8937,11 @@
           <a:p>
             <a:pPr algn="l"/>
             <a:r>
-              <a:rPr sz="2000" b="0">
+              <a:rPr sz="1900" b="0">
                 <a:solidFill>
-                  <a:srgbClr val="5F7A80"/>
+                  <a:srgbClr val="5B6B52"/>
                 </a:solidFill>
-                <a:latin typeface="Patrick Hand"/>
+                <a:latin typeface="Inter"/>
               </a:rPr>
               <a:t>to be published</a:t>
             </a:r>
@@ -9116,8 +8956,8 @@
         </p:nvSpPr>
         <p:spPr>
           <a:xfrm>
-            <a:off x="3657600" y="5440679"/>
-            <a:ext cx="7863840" cy="365760"/>
+            <a:off x="4160520" y="5404104"/>
+            <a:ext cx="7406640" cy="365760"/>
           </a:xfrm>
           <a:prstGeom prst="rect">
             <a:avLst/>
@@ -9132,11 +8972,11 @@
           <a:p>
             <a:pPr algn="l"/>
             <a:r>
-              <a:rPr sz="1200" b="0">
+              <a:rPr sz="1150" b="0">
                 <a:solidFill>
-                  <a:srgbClr val="5F7A80"/>
+                  <a:srgbClr val="5B6B52"/>
                 </a:solidFill>
-                <a:latin typeface="Patrick Hand"/>
+                <a:latin typeface="Inter"/>
               </a:rPr>
               <a:t>model weights + evaluation kit: release pending; corpus provenance will be documented, DepEd-derived text is not redistributed</a:t>
             </a:r>

--- a/docs/deck/Hiraia-progress-update-2026-09.pptx
+++ b/docs/deck/Hiraia-progress-update-2026-09.pptx
@@ -11,6 +11,7 @@
     <p:sldId id="259" r:id="rId11"/>
     <p:sldId id="260" r:id="rId12"/>
     <p:sldId id="261" r:id="rId13"/>
+    <p:sldId id="262" r:id="rId14"/>
   </p:sldIdLst>
   <p:sldSz cx="12191695" cy="6858000" type="screen4x3"/>
   <p:notesSz cx="6858000" cy="9144000"/>
@@ -577,7 +578,7 @@
           <a:lstStyle/>
           <a:p>
             <a:r>
-              <a:t>Per-run sources and hour/cost bases: docs/deck/data/evidence.json (runs, 49 entries; per-entry source = repo file:line or git commit). Grouping rule over the 49 raw entries in evidence.json→runs: 'full cpt run' without 'attempt' = row 1; 'probe cpt run 2/1' (not helper) = rows 2–3; 'attempt' = row 4; prune+heal = row 5; any 'GRPO' = row 6; SFT v1/v2 on the CPT/flagship base = row 7; 'helper pod' or 'pre-flight' = row 9; everything else (adapter LoRAs, QVAC CUDA attempts, DPO, bake-off) = row 8. (1) No RunPod billing export exists in the repo; Costs marked DOCUMENTED are the project's own contemporaneous figures ('~$972', '~$550', '~$285', '~$86', '≈$55', '~$24', '~$6'), not invoices. (2) Every June LoRA run except the 1B v3 ($0.38), Track-A ($0.60), v5 (~$2), GRPO pods ($10/$24/$5) and prune+heal ($86) has NO recorded duration or cost; those GPU-hours/costs are estimates from the recipe (~15-40 min train + setup) and the rates above. The kitten v3-v7 / cat v10 group (8 runs) is the least certain (±$10). (3) GPU-hours = pod wall-clock x GPU count. For probe run 2 and the run-2 pre-flight, wall-clock is unknown, so GPU-h was derived as cost ÷ $26.32/hr x 8 (167 and 16.7 GPU-h); run 2's ~$550 includes an unknown number of hours of runaway idle billing after the ~11 h of training. (4) The full-run GPU-hours use the VPS guard-log pod age (36.8 h); train_runtime alone was 35.66 h (fullrun-logging.jsonl). (5) The two probe helper pods (36h/48h TTL) have no recorded GPU type; costed at the $0.59/hr MIG rate the launcher tries first — if either was an H100 ($3.29/hr) add up to ~$75 each. 8womicsvtj3gt0/y8ys0evywikvcv/xb7pnw9ngyu8r4 MIG ≈$0.5; expansion-xfer pods MIG minutes) — together roughly $50-60 more. Also excluded: network-volume storage (5uwc7qp731 50GB US-KS-2 ~$5/mo; 1atl7503ky, 6er6skgoyb, ump7ia07oh, 0kt4j6h85v 300GB at ~$0.07/GB/mo), the hiraiabench Qwen3.5-27B pod build that failed (cost unrecorded, small), the Vultr VPS, Fireworks/Ox synth-ceb API spend, and Claude-subscription judging. (7) The June Cebuano corpus generation (8xA100, ~$42) is generation, not training, but is inside the documented $86 prune+heal figure and is reported there rather than split out. (8) The B200 smoke ($6.79/hr scaffold) never ran; the sm90 stack smoke on H100 is inferred from deploy_probe_cpt.sh comments and costed as an estimate. (9) The VPS mission-control run log/heartbeats only begin 2026-08-23T23:52Z (deployed after the run-2 loss), so earlier pod lifetimes come from docs/logs, not telemetry; the 9 run-2 heartbeats in heartbeats.jsonl were backfilled for the loss curve. (10) RunPod's quoted rate is not the billed rate (EUR-IS-3 quoted $21.52/hr, billed $26.32/hr — commit b58357e30); all 8xH100 figures use the billed $26.32. (11) SSH to the VPS (host alias 'kamai' → 45.76.180.229, ~/.ssh/config) worked read-only; notes.jsonl matches RUN-LOG.md plus 6 later entries (HOLD, GREENLIGHT, AUTOGRAB, synth-ceb closed, SFT v2 auto-eval).</a:t>
+              <a:t>Screenshots captured from the current UI build (card-ui branch, 26 Aug 2026) running on an Android 34 emulator at 720x1600. The deck is drawn from 36,487 illustrated cards; 25,746 of them have a verified multiple-choice question. Search is a local lexical/semantic match over the bundled card pool — a confident hit navigates to that card with the “ang tanong mo” banner shown here; when nothing matches, the on-device model answers from retrieved facts or says it does not know.</a:t>
             </a:r>
           </a:p>
         </p:txBody>
@@ -647,7 +648,7 @@
           <a:lstStyle/>
           <a:p>
             <a:r>
-              <a:t>Screenshots are from the current UI build (card-ui branch, 26 Aug 2026, installed on an Android 34 emulator); the curriculum weighting charted here is implemented on the question-cards branch at commit 58d358495 and the two branches are not yet merged, so the screenshots show the interface, not the weighting. Weighting: rag/pipeline/FEED-WEIGHTING.md; simulation from packages/shared/src/curriculum/feedWeighting.ts on the bundled tags (docs/deck/data/draw-share-by-month.json; the chart attributes a multi-cell card to the Grade-5 cell that won, so its Aug figure (26.1%) is not the same statistic as feed-calibration.mts's 'draws carrying a G5-Q2 cell' (25.5%) — both come from the same module and pool). Quarter weighting applies to all 324 competencies (elementary and junior high). Coverage: rag/bank/COVERAGE-ROUNDUP.md (below floor now = 38, all junior high; laggards after module cards = 16). Quiz: packages/mobile/src/data/cards-questions.json (25,746 of 36,487).</a:t>
+              <a:t>Per-run sources and hour/cost bases: docs/deck/data/evidence.json (runs, 49 entries; per-entry source = repo file:line or git commit). Grouping rule over the 49 raw entries in evidence.json→runs: 'full cpt run' without 'attempt' = row 1; 'probe cpt run 2/1' (not helper) = rows 2–3; 'attempt' = row 4; prune+heal = row 5; any 'GRPO' = row 6; SFT v1/v2 on the CPT/flagship base = row 7; 'helper pod' or 'pre-flight' = row 9; everything else (adapter LoRAs, QVAC CUDA attempts, DPO, bake-off) = row 8. (1) No RunPod billing export exists in the repo; Costs marked DOCUMENTED are the project's own contemporaneous figures ('~$972', '~$550', '~$285', '~$86', '≈$55', '~$24', '~$6'), not invoices. (2) Every June LoRA run except the 1B v3 ($0.38), Track-A ($0.60), v5 (~$2), GRPO pods ($10/$24/$5) and prune+heal ($86) has NO recorded duration or cost; those GPU-hours/costs are estimates from the recipe (~15-40 min train + setup) and the rates above. The kitten v3-v7 / cat v10 group (8 runs) is the least certain (±$10). (3) GPU-hours = pod wall-clock x GPU count. For probe run 2 and the run-2 pre-flight, wall-clock is unknown, so GPU-h was derived as cost ÷ $26.32/hr x 8 (167 and 16.7 GPU-h); run 2's ~$550 includes an unknown number of hours of runaway idle billing after the ~11 h of training. (4) The full-run GPU-hours use the VPS guard-log pod age (36.8 h); train_runtime alone was 35.66 h (fullrun-logging.jsonl). (5) The two probe helper pods (36h/48h TTL) have no recorded GPU type; costed at the $0.59/hr MIG rate the launcher tries first — if either was an H100 ($3.29/hr) add up to ~$75 each. 8womicsvtj3gt0/y8ys0evywikvcv/xb7pnw9ngyu8r4 MIG ≈$0.5; expansion-xfer pods MIG minutes) — together roughly $50-60 more. Also excluded: network-volume storage (5uwc7qp731 50GB US-KS-2 ~$5/mo; 1atl7503ky, 6er6skgoyb, ump7ia07oh, 0kt4j6h85v 300GB at ~$0.07/GB/mo), the hiraiabench Qwen3.5-27B pod build that failed (cost unrecorded, small), the Vultr VPS, Fireworks/Ox synth-ceb API spend, and Claude-subscription judging. (7) The June Cebuano corpus generation (8xA100, ~$42) is generation, not training, but is inside the documented $86 prune+heal figure and is reported there rather than split out. (8) The B200 smoke ($6.79/hr scaffold) never ran; the sm90 stack smoke on H100 is inferred from deploy_probe_cpt.sh comments and costed as an estimate. (9) The VPS mission-control run log/heartbeats only begin 2026-08-23T23:52Z (deployed after the run-2 loss), so earlier pod lifetimes come from docs/logs, not telemetry; the 9 run-2 heartbeats in heartbeats.jsonl were backfilled for the loss curve. (10) RunPod's quoted rate is not the billed rate (EUR-IS-3 quoted $21.52/hr, billed $26.32/hr — commit b58357e30); all 8xH100 figures use the billed $26.32. (11) SSH to the VPS (host alias 'kamai' → 45.76.180.229, ~/.ssh/config) worked read-only; notes.jsonl matches RUN-LOG.md plus 6 later entries (HOLD, GREENLIGHT, AUTOGRAB, synth-ceb closed, SFT v2 auto-eval).</a:t>
             </a:r>
           </a:p>
         </p:txBody>
@@ -717,177 +718,7 @@
           <a:lstStyle/>
           <a:p>
             <a:r>
-              <a:t>Sources: finetuning/cpt/FULLRUN-RESULTS.md (perplexity, 400 docs × 1,024 tokens); finetuning/eval/capability/ (capability score, rubric); finetuning/eval/routing/routing-sft-v1.json (reply-language accuracy, hedge rate); finetuning/cpt/SFT-V1-RESULTS.md; finetuning/eval/capability/FINDINGS.md (2×2: blob fix +0.17 for the shipping model, rebalance +0.22 faithful vs +0.41 lexical; together 3.32 → 3.72)</a:t>
-            </a:r>
-          </a:p>
-          <a:p>
-            <a:r>
-              <a:t>Held-out perplexity, Tagalog (400 docs x 1024 tok): 22.639 (Qwen3.5-2B-Base); probe base 21.299 (different carve-out) → 4.570 after full CPT (-79.8%); 7.835 at probe ckpt-125 / 525M tokens (-63.2%) — finetuning/cpt/FULLRUN-RESULTS.md:34 and finetuning/cpt/FULLRUN-EVAL-RESULT.json (base.tl.ppl=22.639, cpt.tl.ppl=4.57); probe: finetuning/cpt/PROBE-RUN-STATUS.md:101; caveat FULLRUN-RESULTS.md:64-67</a:t>
-            </a:r>
-          </a:p>
-          <a:p>
-            <a:r>
-              <a:t>Held-out perplexity, Cebuano (400 docs x 1024 tok): 25.416 (base); probe base 25.020 → 4.448 after full CPT (-82.5%); 9.249 at ckpt-125 (-63.0%) — finetuning/cpt/FULLRUN-RESULTS.md:35; FULLRUN-EVAL-RESULT.json cpt.ceb.ppl=4.448; PROBE-RUN-STATUS.md:102; mix shares finetuning/cpt/FULL-MIX-README.md table</a:t>
-            </a:r>
-          </a:p>
-          <a:p>
-            <a:r>
-              <a:t>Held-out perplexity, English (reserved FineWeb shard, never trained on): 15.568 (base); probe base 15.567 → 14.968 after full CPT (-3.9%, improved); 15.796 at ckpt-125 (+1.5%) — finetuning/cpt/FULLRUN-RESULTS.md:36,38; FULLRUN-EVAL-RESULT.json; PROBE-RUN-STATUS.md:103</a:t>
-            </a:r>
-          </a:p>
-          <a:p>
-            <a:r>
-              <a:t>Greedy generation quality, base vs CPT (45 new tokens, same prompts): Base: 'Ang araw ay ... mga puno, mga puno, mga puno' (degenerate); photosynthesis -&gt; '___ at ___' filler; Cebuano 'Ang adlaw mao ang' answered in Tagalog and loops → CPT: 'Ang photosynthesis ay isang proseso na nangyayari sa mga halaman, algae, at ilang mga bakterya' (fluent, correct); 'Ang adlaw mao ang sentro sa atong solar nga sistema... usa ka bituon' (correct Cebuano, fixes ckpt-125's adlaw=day error) — finetuning/cpt/FULLRUN-EVAL-RESULT.json base.gen / cpt.gen; FULLRUN-RESULTS.md:42-49,53-56</a:t>
-            </a:r>
-          </a:p>
-          <a:p>
-            <a:r>
-              <a:t>Template-routing language accuracy, SFT v1 (n=1,188, T=0.7, fastText lid.176, app-composed user-turn template): No prior instrument. Raw-prompt greedy test on the same model: 0/4 Cebuano-mode language-neutral prompts answered in Cebuano (doc says do not cite 4/8, 5/8 figures: SFT-V1-ROUTING-FINDING.md:185) → Tagalog 441/446 = 99%; Cebuano 427/446 = 96% raw, 99.3% after correcting 16 lid tl/ceb confusions; English 279/296 = 94%. Wrong-language EXPLANATIONS only 14/1,188 = 1.2% (27 of 41 misroutes are hedges) — finetuning/eval/routing/README.md:34-46; reproduced with `python3 finetuning/eval/routing/score_routing.py routing-sft-v1.json` (this session): 441/446, 427/446, 279/296; misrouted 41, hedges 27, explanations 14; low-confidence lid 37/1188</a:t>
-            </a:r>
-          </a:p>
-          <a:p>
-            <a:r>
-              <a:t>SFT v1 hedge rate ('not sure' opener) by mode on grade-5 core terms: n/a (new finding on SFT v1; capability probes show the model explains these terms fluently) → Tagalog 284/446 = 64%; Cebuano 156/446 = 35%; English 64/296 = 22%; 179 of the 284 Tagalog hedges then explain anyway — finetuning/eval/routing/README.md:48-66; reproduced this session: 284/446 = 63.7% (regex HEDGE in score_routing.py); the '179 explain anyway' figure is README:58 only (not reproduced)</a:t>
-            </a:r>
-          </a:p>
-          <a:p>
-            <a:r>
-              <a:t>hiraiabench Tagalog Fluency (naturalness on tl probes, n=46; no RAG, shared neutral prompt, blind judge): Sailor2-3B untrained base: 2.39 → Hiraia-v7 (Sailor2-3B + cat v7 LoRA): 3.91. References: Qwen3.5-9B 3.17, Qwen3.5-27B 4.5, Qwen3-1.7B 0.15, Claude Opus 4.8 5.0 — finetuning/eval/hiraiabench/bench-results.json (hiraia-v7.'Tagalog Fluency'=3.91, sailor2-3b=2.39, qwen3.5-9b=3.17, qwen3.5-27b=4.5); model = finetuning/adapters/distill-sailor-3b-v7/adapter-tagalog-v7-f16.gguf per run-all-local.sh; methodology packages/web/src/components/hiraiabench-data.ts:44-49; commit 9eb1d3510 2026-06-16</a:t>
-            </a:r>
-          </a:p>
-          <a:p>
-            <a:r>
-              <a:t>hiraiabench English Fluency (n=7) / Bisaya (mean naturalness+accuracy, n=6): Sailor2-3B base: English 2.0, Bisaya 2.5 → Hiraia-v7: English 3.57, Bisaya 3.0 (Qwen3.5-9B: 5.0 / 1.75; 27B: 5.0 / 3.92) — finetuning/eval/hiraiabench/bench-results.json; footnote hiraiabench-data.ts:49</a:t>
-            </a:r>
-          </a:p>
-          <a:p>
-            <a:r>
-              <a:t>Capability benchmark naturalness dimension (Claude-judged, device-faithful, Tagalog adapter, temp 0.7, worst-of-3): 4.51 (2026-06-09 shipping ttft adapter, lexical retrieval, 102 probes) → 4.61 (Track-A rebalanced adapter); 4.60 (rebal-v2 hybrid, 88 tl probes); tl-language mean naturalness 4.58 -&gt; 4.69 (candidate-hybrid) — finetuning/eval/capability/FINDINGS.md:24,153; recomputed this session from baselines/current-2026-06-09.json (4.51), baselines/candidate-rebal-2026-06-09.json (4.61), scores.v2-hybrid.tagalog.json (4.60), scores.candidate-hybrid.tagalog.json (4.69)</a:t>
-            </a:r>
-          </a:p>
-          <a:p>
-            <a:r>
-              <a:t>English path A/B on the 18-probe english tier (Claude-judged): Sailor2-3B BASE, no LoRA (the original on-device English path): tier 1.78, naturalness 1.00, helpfulness-on-answerable 2.87 → Same base + Tagalog adapter: tier 3.75, accuracy 4.11, h0 refusals 0/15; shipping 2026-06-13 (v2a, English routed through Tagalog adapter): english tier 3.64, naturalness 4.11 — finetuning/rl/README.md:22 ('3.75 vs 1.78'); recomputed from finetuning/eval/capability/ab/capability-scores.english-tladapter.json (3.75, n=18) and baselines/capability-baseline.2026-06-11-shipping.json english tier (1.78); baselines/capability-baseline.2026-06-13-shipping-newbank.json english 3.64</a:t>
-            </a:r>
-          </a:p>
-          <a:p>
-            <a:r>
-              <a:t>June adapter smoke: replies in target language (25 prompts, GGUF adapters on Sailor2-3B f16): tagalog-full-v2 (Qwen3-1.7B era): 24/25 lang_ok, 1 english_heavy, avg 187 words, ends_question 4/25 → sailor v5 GGUF: tagalog 25/25, cebuano 25/25, english_heavy 0, avg 111/89 words; image tags 9/25 (tl) 18/25 (ceb), malformed 0 — finetuning/eval/results-tagalog.json summary; finetuning/eval/eval-v5-gguf-tagalog.json summary; finetuning/eval/eval-v5-gguf-bisaya.json summary</a:t>
-            </a:r>
-          </a:p>
-          <a:p>
-            <a:r>
-              <a:t>Prune+heal 2.4B per-language perplexity (Sailor2-3B pruned 9352-&gt;4608 FFN, healed on 800M tokens): Tagalog 10.26 pre-prune -&gt; 12.50 pruned; Cebuano 19.96 pruned; English 52.64 pruned → Healed: Tagalog 6.74, Cebuano 9.91, English 21.51 — finetuning/distill/ceb-heal/PRUNE-HEAL-RETROSPECTIVE.md:29-31</a:t>
-            </a:r>
-          </a:p>
-          <a:p>
-            <a:r>
-              <a:t>SFT v1 (Qwen3.5-2B) deterministic reply-language by capability tier (no LLM judge; regex language heuristic): n/a (first eval of the CPT line) → v1: all Tagalog tiers 100% Tagalog (e.g. helpfulness-floor 24/24, reasoning 14/14), bisaya tier 13/14 Cebuano, english tier 13/18 English. v2: english 6/18 (all 12 failures switched to Tagalog), bisaya 13/14 — reproduced this session with `python3 finetuning/eval/pod-eval/score_answers.py finetuning/cpt/sft-v1-eval-answers.json finetuning/cpt/sft-v2-eval-answers.json`; finetuning/cpt/SFT-V1-ROUTING-FINDING.md:120-136</a:t>
-            </a:r>
-          </a:p>
-          <a:p>
-            <a:r>
-              <a:t>Capability Score (tier-weighted 0-5, 143-probe instrument, Claude-judged, device-faithful, temp 0.7, worst-of-3), Sailor2-3B cat line: 3.32 (2026-06-09 shipping ttft adapter, lexical retrieval, 102 probes); 3.49 same adapter under true hybrid retrieval → 3.73 Track-A rebalanced adapter (+0.41 lexical / +0.22 under hybrid: 3.49-&gt;3.72); 3.95 rebal-v2 hybrid (88 tl probes, the pick); 3.81 v3 (regressed, not shipped) — finetuning/eval/capability/FINDINGS.md:17,83-90,145,68; recomputed this session with the run-capability.mts aggregation: baselines/current-2026-06-09.json 3.32, baselines/baseline-hybrid-2026-06-09.json 3.49, baselines/candidate-rebal-2026-06-09.json 3.73, baselines/candidate-hybrid-2026-06-09.json 3.72, scores.v2-hybrid.tagalog.json 3.95, scores.v3-hybrid.tagalog.json 3.81</a:t>
-            </a:r>
-          </a:p>
-          <a:p>
-            <a:r>
-              <a:t>Helpfulness on answerable probes (the over-abstention metric) and outright refusals: 2.54; 19 of 91 answerable probes refused/deflected (helpfulness 0) → 3.19 after rebalance (13 of the 19 now answer, 6 remain - all retrieval-empty hard tail); 3.37 on rebal-v2 with 1/78 refusals — FINDINGS.md:17,32,145,155,161-163,69; recomputed: current-2026-06-09.json help-answerable 2.54 (h0=19/91), candidate-rebal 3.19 (h0=9... note FINDINGS says 6/19 of the ORIGINAL 19 still refuse), scores.v2-hybrid.tagalog.json 3.37 (h0=1/78)</a:t>
-            </a:r>
-          </a:p>
-          <a:p>
-            <a:r>
-              <a:t>Abstain-correct tier (honesty on unknowables; guards against over-correcting into confabulation): 3.96 (2026-06-09 shipping) → 4.76 rebalanced (+0.80); 4.84 candidate-hybrid; 4.63-4.69 on the 2026-06-11/13 shipping snapshots — FINDINGS.md:151,99; recomputed from baselines files (4.76, 4.84, 4.63, 4.64)</a:t>
-            </a:r>
-          </a:p>
-          <a:p>
-            <a:r>
-              <a:t>Safety-myth tier (debunk myths, safe answers): 2.31 (weakest tier, 2026-06-09) → 2.61 rebalanced; 3.07 rebal-v2; 2.66-2.77 on 2026-06-11/13 shipping snapshots (still the weakest scored tier) — FINDINGS.md:21,152,68-69,74; recomputed: v2 3.07, 0613 2.66, 0611 2.70</a:t>
-            </a:r>
-          </a:p>
-          <a:p>
-            <a:r>
-              <a:t>Full-tier shipping snapshots incl. multi-turn + english (134/116 probes): 2026-06-11 'shipping' snapshot: 3.24 (help-answerable 2.77; tiers helpfulness-floor 3.79, multi-turn 2.74, english 1.78, bisaya 3.01, safety-myth 2.70, abstain-correct 4.63, pedagogy 2.93); same-judge overlay 3.30 → 2026-06-13 shipping-newbank (v2a intent adapter, tl+en only, 116 probes): 3.59 (help-answerable 3.14, h0 5/103; english 3.64, multi-turn 2.99, pedagogy 3.52, abstain-correct 4.64, safety-myth 2.66) — recomputed this session from finetuning/eval/capability/baselines/capability-baseline.2026-06-11-shipping.json (3.24, n=134), .samejudge.json (3.30), capability-baseline.2026-06-13-shipping-newbank.json (3.59, n=116); commit c4fbce1b2 2026-06-13; CPT-FLAGSHIP-PLAN.md:21,147,198</a:t>
-            </a:r>
-          </a:p>
-          <a:p>
-            <a:r>
-              <a:t>Multi-turn tier (scripted 3-turn dialogues; repetition/re-asking hard caps): mt-baseline: Tagalog 2.77 (n=10), Bisaya 1.79 (n=4) → 2.74 (2026-06-11, n=14) -&gt; 2.99 (2026-06-13, n=10 tl) — finetuning/eval/capability/scores.mt-baseline.tagalog.json / .bisaya.json (recomputed 2.77 / 1.79); baselines 0611 (2.74) and 0613 (2.99) recomputed</a:t>
-            </a:r>
-          </a:p>
-          <a:p>
-            <a:r>
-              <a:t>Pedagogy dimension (teaches vs dumps: analogy, check-for-understanding): 3.11 (2026-06-09 shipping) → 3.59 rebalanced (+0.48); 3.75 rebal-v2; 3.66 candidate-hybrid; hiraiabench Pedagogy (n=6, no RAG): Sailor2-3B 2.0 -&gt; Hiraia-v7 2.67 (Qwen3.5-9B 3.67, 27B 4.33) — FINDINGS.md:152; recomputed scores.v2-hybrid.tagalog.json pedagogy 3.75; finetuning/eval/hiraiabench/bench-results.json Pedagogy</a:t>
-            </a:r>
-          </a:p>
-          <a:p>
-            <a:r>
-              <a:t>hiraiabench Science Accuracy (n=20) / Safety &amp; Honesty (n=12) / Code-switching (n=8), no RAG: Sailor2-3B base: 2.25 / 1.5 / 2.88 → Hiraia-v7: 3.05 / 3.13 / 3.25 (Qwen3.5-9B: 3.25 / 3.38 / 3.44; Qwen3.5-27B: 4.9 / 5.0 / 4.63; Qwen3-1.7B: 0 / 0.42 / 0.06) — finetuning/eval/hiraiabench/bench-results.json; category definitions finetuning/eval/hiraiabench/aggregate.mjs:12-18; 59 judged of 67 probes (8 AUP-dropped), bench-set.json meta</a:t>
-            </a:r>
-          </a:p>
-          <a:p>
-            <a:r>
-              <a:t>Regression gate (finetuning/eval/harness/run-harness.sh), device-faithful hybrid, temp 0: Pre-hybrid gate broke on the +5040 fact expansion; re-calibrated 2026-06-09 → GREEN 39/39 with the v2 adapter (2026-06-09). cases.json today: 42 cases = 30 gated + 12 pending (known-unfixed, non-blocking); modes grounded 35 / chitchat 6 / abstain 1; langs tagalog 38 / cebuano 3 / english 1; grades 4-6 only. Also gates retrieval-stress + hybrid-stress 16/16. — FINDINGS.md:49 (39/39); commit 79712b2af 2026-06-09; counts computed this session from finetuning/eval/harness/cases.json (last commit 674fa6562 2026-06-19); PROBING-FINDINGS.md:172 (16/16); finetuning/eval/harness/.server.log (2026-08-27)</a:t>
-            </a:r>
-          </a:p>
-          <a:p>
-            <a:r>
-              <a:t>Natural kid-phrasing probe (chat-tutor.mts, 3B + grounded LoRA, hybrid retrieval, temp 0.8, ~40 probes, 2026-06-07): 10 good / 7 minor / 15 major / 8 critical = ~57% major-or-critical (denied Earth is round, called math subjective, affirmed reading-in-dark myth, moon=planet) → After R1 (normalizeQuery + SEMANTIC_FLOOR 0.58-&gt;0.55) and R2 (buildContextualQuery follow-up folding): 5/5 previously-deflecting topics answer, '5 planets?' now corrects to 8, hybrid-stress gate 13/13 -&gt; 16/16; Tier-2 prompt hardening fixed reading-dark/10%-brain/math/moon (gated in cases.json). Residuals: flat-earth, smoking, scared-lindol remain retrieval-gated (pending cases) — finetuning/eval/harness/PROBING-FINDINGS.md:21,58,82-83,153-175,190-203</a:t>
-            </a:r>
-          </a:p>
-          <a:p>
-            <a:r>
-              <a:t>Role-play edge QA (102 scripted 3-4 turn dialogues, 50 tl / 52 en, device temp 0.5, 2026-06-19): KITTEN 1B v7: fails turn 1 on TL safety/myth (affirms flat-earth/10%-brain/full-moon, says eclipse/raw chicken 'safe'), multi-turn collapse; temp-independent - greedy re-run went 8 -&gt; 11 criticals → CAT 3B v10: single-turn mostly solid (correct safety polarity, settled science), but caves on myths by turn 2+ (flat-earth 'totoo na patag ang Earth!'), 2 English safety failures (outlet, eclipse), EN-&gt;TL leak ~5/52 EN convos (~10%) — finetuning/eval/harness/ROLEPLAY-QA-FINDINGS.md:1-9,16-17,23-37,47-56</a:t>
-            </a:r>
-          </a:p>
-          <a:p>
-            <a:r>
-              <a:t>Kitten 1B DPO safety/myth polarity (32 probes, 8 per bucket, temp 0.5; 'fail' = wrong polarity): v7 base: safety_hazardous 6/8 fail, safety_safe 6/8, myth_false 4/8, myth_true 5/8 → v8dpo2: safety_hazardous 0/8, safety_safe 1/8, myth_true 0/8 BUT myth_false 7/8 fail (affirms false myths); dpoB: 2/8, 1/8, 8/8, 1/8 — finetuning/eval/harness/dpo-eval-v7base.json .stats; dpo-eval-v8dpo2.json .stats; dpo-eval-dpoB.json .stats; semantics finetuning/eval/harness/dpo-eval.mts:1-3</a:t>
-            </a:r>
-          </a:p>
-          <a:p>
-            <a:r>
-              <a:t>GRPO rounds on the 3B (programmatic rewards, June): Same-judge shipping baseline 3.30 (2026-06-11); newbank baseline 3.59 (2026-06-13) → GRPO r2: 2.98 (bisaya 2.05 vs 3.11, abstain-correct 3.24 vs 4.69; english 3.21 vs 1.85 = only win); GRPO r4: 3.41 vs 3.59. Variant sweep (Qwen3.5-9B screening judge): baseline 3.84, all four variants 3.30-3.37 — recomputed this session from baselines/capability-grpo-r2.2026-06-12.json, capability-grpo-r4.2026-06-13.json, capability-baseline.2026-06-11-shipping.samejudge.json; finetuning/eval/capability/baselines/capability-grpo-sweep.2026-06-13.txt</a:t>
-            </a:r>
-          </a:p>
-          <a:p>
-            <a:r>
-              <a:t>Prune+heal 2.4B capability (Sailor2-3B -&gt; 2.414B, healed, re-SFT x3; 126 probes, Claude-judged): '1B baseline' 3.24 (abstain-correct ~4.6) → 2.06 / 5 (-1.18); help-answerable 1.99; abstain-correct 1.29, bisaya 1.17, english 0.41, helpfulness-floor 2.75, safety-myth 2.74; biggest movers all confabulation on unknowables (serious illness -4.71, election winner -4.57, tomorrow's weather -4.29) — finetuning/distill/ceb-heal/PRUNE-HEAL-RETROSPECTIVE.md:12,48-52,62-63; reproduced this session from the working-tree finetuning/eval/capability/capability-scores.{tagalog,english,bisaya}.json (combined 2.06, abstain-correct 1.29, help-answerable 1.99, h0 24/113) - these files were collected against finetuning/distill/ceb-heal/gguf/sailor2-2b4-healed.Q4_K_M.gguf per capability/.server.log:11</a:t>
-            </a:r>
-          </a:p>
-          <a:p>
-            <a:r>
-              <a:t>SFT v1 (Qwen3.5-2B) deterministic behavioural gate + abstention (no LLM judge): n/a (first eval of the CPT line); v2 for comparison → v1: chitchat 5/6, abstain 1/1, grounded forbidden-term violations 0/34; abstain-correct tier refusal/deflect 8/10, safety-myth refusal 1/10, all other tiers 0 refusals; median answer ~470 chars. v2: abstain 0/1 (confabulated 'the largest star is the Supernova'), abstain-correct refusals 7/10, median +20% longer — reproduced this session: `python3 finetuning/eval/pod-eval/score_answers.py finetuning/cpt/sft-v1-eval-answers.json finetuning/cpt/sft-v2-eval-answers.json`; finetuning/cpt/SFT-V1-ROUTING-FINDING.md:118-129,141-144</a:t>
-            </a:r>
-          </a:p>
-          <a:p>
-            <a:r>
-              <a:t>Miss-card direction generation, SFT v1 (216 probes = 72 terms x 3 modes, T=0.7; bar: &gt;=90% of cards with all 3 directions retrievable at cosine &gt;=0.63): Pre-registered bar &gt;=90% → v1 prose template 57/216 (26%); v2 'exactly three lines' 60/216 (28%); v3 JSON-schema constrained decoding 55/216 (25%). Mode-language compliance 211/216, 198/216, 180/216. Retrieval-only alternative: 7/27 true-miss triples sensible — finetuning/eval/misscard/README.md:25-29,51-63; finetuning/eval/retrieval/README.md:17-20</a:t>
-            </a:r>
-          </a:p>
-          <a:p>
-            <a:r>
-              <a:t>Objective presentation metrics (finetuning/eval/presentation.mts: image-tag emission/well-formed/no-repeat, emoji present/spam &gt;4, bold, English persona-leak): 2026-06-11 english tier on the BASE model (no LoRA): emojiPresent 13/18, emojiSpam 6/18, bold 18/18, persona-leak 0/18; tagalog adapter answers: emoji 0/88, bold 0/88 → 2026-06-13 (v2a) tagalog: emojiPresent 14/88, spam 0, bold 0; bisaya bold 14/14; english persona-leak 0/18. 2.4B run (Jun 22, raw captured): image tags 4/93 all well-formed, 0 repeated images across 11 multi-turn dialogues, emoji spam 0 — computed via tsx script importing finetuning/eval/presentation.mts over baselines/answers-2026-06-11-shipping/*.json, HEAD:finetuning/eval/capability/capability-answers.*.json (commit c4fbce1b2), and working-tree capability-answers.*.json; raw-capture caveat in finetuning/eval/capability/run-capability.mts report() comment</a:t>
-            </a:r>
-          </a:p>
-          <a:p>
-            <a:r>
-              <a:t>On-device speed, Redmi (SD685/Adreno 610, CPU-only, ARMv8.0, llama-bench 4 threads, Q4_K_M): Sailor2-1B: prefill 20.13 / decode 12.73 t/s (bench; earlier 19.3/11.8); in-app 1B TTFT ~24 s, 4.4 tok/s. Sailor2-3B: ~2.6 t/s decode (unusable on this device) → Qwen3.5-2B: prefill 10.94 / decode 5.93 t/s (1.8x / 2.1x slower than the 1B; in line with a same-size transformer; hybrid SSM kernels run correctly at armv8.0) — CPT-FLAGSHIP-PLAN.md:102-105; PRUNE-HEAL-RETROSPECTIVE.md:20 (1B 11.8, 3B 2.6 t/s)</a:t>
-            </a:r>
-          </a:p>
-          <a:p>
-            <a:r>
-              <a:t>Device-equivalent latency, cat tier on M1 Pro Metal (llama-server, Sailor2-3B Q4_K_M + adapter-tagalog.gguf, temp 0.5): cold call TTFT 539 ms → warm calls ~163 ms TTFT (static system prompt KV cache reuse); avg decode 37.5 tok/s; model load 1,056 ms — AUDIT_LOG.md 'Run summary' + per-call table; generator finetuning/eval/audit/run-audit-demo.mjs</a:t>
-            </a:r>
-          </a:p>
-          <a:p>
-            <a:r>
-              <a:t>GGUF ship path for the CPT'd Qwen3.5-2B (Gate 4): Untested; open upstream hybrid-arch conversion bug ggml-org#24737 → PASS: convert_hf_to_gguf.py --no-mtp on llama.cpp b10603, qwen35.block_count=24, Q4_K_M 1,560,460,800 B (1.45 GiB, +23% vs base 1.27 GB due to 248,320 vocab), generations match safetensors; x86 16-core CPU: prefill 97.1 / decode 44.5 tok/s — finetuning/cpt/GATE4-GGUF-BRIEF.md:92-104; finetuning/cpt/FULLRUN-RESULTS.md:70-101; RUN-LOG.md 2026-08-24 02:30 UTC entry</a:t>
-            </a:r>
-          </a:p>
-          <a:p>
-            <a:r>
-              <a:t>Training run facts (for the cost/scale slide): June adapters: LoRA on Sailor2-3B, e.g. Track-A rebalance ~$0.60 on an A100 (FINDINGS.md:142-143); prune+heal total ~$86 (retrospective 'Costs') → Full CPT: 3,273 steps, ~13.7B tokens trained (mix 24.78B pool, 2.63 epochs of tl), loss 4.144 -&gt; 1.756, 8xH100 ~35.5h, ~$972 (budget $1,000). SFT v1: 6,687 rows, 3 ep, 1,254 steps, loss 1.651 -&gt; 0.996, 1xA100 ~47 min ~$1.40 (~$6 incl. 3 failed attempts). Probe run 2 lost 9/10 checkpoints to a cross-DC sync failure (~$278 run + drained account) — finetuning/cpt/FULLRUN-RESULTS.md:12-18; finetuning/cpt/SFT-V1-RESULTS.md:3-14; finetuning/cpt/PROBE-RUN-STATUS.md 'RUN 2 OUTCOME'</a:t>
+              <a:t>Screenshots are from the current UI build (card-ui branch, 26 Aug 2026, installed on an Android 34 emulator); the curriculum weighting charted here is implemented on the question-cards branch at commit 58d358495 and the two branches are not yet merged, so the screenshots show the interface, not the weighting. Weighting: rag/pipeline/FEED-WEIGHTING.md; simulation from packages/shared/src/curriculum/feedWeighting.ts on the bundled tags (docs/deck/data/draw-share-by-month.json; the chart attributes a multi-cell card to the Grade-5 cell that won, so its Aug figure (26.1%) is not the same statistic as feed-calibration.mts's 'draws carrying a G5-Q2 cell' (25.5%) — both come from the same module and pool). Quarter weighting applies to all 324 competencies (elementary and junior high). Coverage: rag/bank/COVERAGE-ROUNDUP.md (below floor now = 38, all junior high; laggards after module cards = 16). Quiz: packages/mobile/src/data/cards-questions.json (25,746 of 36,487).</a:t>
             </a:r>
           </a:p>
         </p:txBody>
@@ -957,7 +788,177 @@
           <a:lstStyle/>
           <a:p>
             <a:r>
-              <a:t>Plan items trace to: rag/pipeline/FACT-SWARM-SPEC.md (Lane B, quiz lane, module cards), rag/pipeline/FEED-WEIGHTING.md (Miss-Card labels, edge-walk cost), finetuning/eval/routing/README.md (hedge-clause wording sweep), finetuning/cpt/*.md (SFT/KD on the CPT base), memory of on-device measurements on the Redmi SD685 (kitten tier ~4.4 tok/s, TTFT ~24 s).</a:t>
+              <a:t>Sources: finetuning/cpt/FULLRUN-RESULTS.md (perplexity, 400 docs × 1,024 tokens); finetuning/eval/capability/ (capability score, rubric); finetuning/eval/routing/routing-sft-v1.json (reply-language accuracy, hedge rate); finetuning/cpt/SFT-V1-RESULTS.md; finetuning/eval/capability/FINDINGS.md (2×2: blob fix +0.17 for the shipping model, rebalance +0.22 faithful vs +0.41 lexical; together 3.32 → 3.72)</a:t>
+            </a:r>
+          </a:p>
+          <a:p>
+            <a:r>
+              <a:t>Held-out perplexity, Tagalog (400 docs x 1024 tok): 22.639 (Qwen3.5-2B-Base); probe base 21.299 (different carve-out) → 4.570 after full CPT (-79.8%); 7.835 at probe ckpt-125 / 525M tokens (-63.2%) — finetuning/cpt/FULLRUN-RESULTS.md:34 and finetuning/cpt/FULLRUN-EVAL-RESULT.json (base.tl.ppl=22.639, cpt.tl.ppl=4.57); probe: finetuning/cpt/PROBE-RUN-STATUS.md:101; caveat FULLRUN-RESULTS.md:64-67</a:t>
+            </a:r>
+          </a:p>
+          <a:p>
+            <a:r>
+              <a:t>Held-out perplexity, Cebuano (400 docs x 1024 tok): 25.416 (base); probe base 25.020 → 4.448 after full CPT (-82.5%); 9.249 at ckpt-125 (-63.0%) — finetuning/cpt/FULLRUN-RESULTS.md:35; FULLRUN-EVAL-RESULT.json cpt.ceb.ppl=4.448; PROBE-RUN-STATUS.md:102; mix shares finetuning/cpt/FULL-MIX-README.md table</a:t>
+            </a:r>
+          </a:p>
+          <a:p>
+            <a:r>
+              <a:t>Held-out perplexity, English (reserved FineWeb shard, never trained on): 15.568 (base); probe base 15.567 → 14.968 after full CPT (-3.9%, improved); 15.796 at ckpt-125 (+1.5%) — finetuning/cpt/FULLRUN-RESULTS.md:36,38; FULLRUN-EVAL-RESULT.json; PROBE-RUN-STATUS.md:103</a:t>
+            </a:r>
+          </a:p>
+          <a:p>
+            <a:r>
+              <a:t>Greedy generation quality, base vs CPT (45 new tokens, same prompts): Base: 'Ang araw ay ... mga puno, mga puno, mga puno' (degenerate); photosynthesis -&gt; '___ at ___' filler; Cebuano 'Ang adlaw mao ang' answered in Tagalog and loops → CPT: 'Ang photosynthesis ay isang proseso na nangyayari sa mga halaman, algae, at ilang mga bakterya' (fluent, correct); 'Ang adlaw mao ang sentro sa atong solar nga sistema... usa ka bituon' (correct Cebuano, fixes ckpt-125's adlaw=day error) — finetuning/cpt/FULLRUN-EVAL-RESULT.json base.gen / cpt.gen; FULLRUN-RESULTS.md:42-49,53-56</a:t>
+            </a:r>
+          </a:p>
+          <a:p>
+            <a:r>
+              <a:t>Template-routing language accuracy, SFT v1 (n=1,188, T=0.7, fastText lid.176, app-composed user-turn template): No prior instrument. Raw-prompt greedy test on the same model: 0/4 Cebuano-mode language-neutral prompts answered in Cebuano (doc says do not cite 4/8, 5/8 figures: SFT-V1-ROUTING-FINDING.md:185) → Tagalog 441/446 = 99%; Cebuano 427/446 = 96% raw, 99.3% after correcting 16 lid tl/ceb confusions; English 279/296 = 94%. Wrong-language EXPLANATIONS only 14/1,188 = 1.2% (27 of 41 misroutes are hedges) — finetuning/eval/routing/README.md:34-46; reproduced with `python3 finetuning/eval/routing/score_routing.py routing-sft-v1.json` (this session): 441/446, 427/446, 279/296; misrouted 41, hedges 27, explanations 14; low-confidence lid 37/1188</a:t>
+            </a:r>
+          </a:p>
+          <a:p>
+            <a:r>
+              <a:t>SFT v1 hedge rate ('not sure' opener) by mode on grade-5 core terms: n/a (new finding on SFT v1; capability probes show the model explains these terms fluently) → Tagalog 284/446 = 64%; Cebuano 156/446 = 35%; English 64/296 = 22%; 179 of the 284 Tagalog hedges then explain anyway — finetuning/eval/routing/README.md:48-66; reproduced this session: 284/446 = 63.7% (regex HEDGE in score_routing.py); the '179 explain anyway' figure is README:58 only (not reproduced)</a:t>
+            </a:r>
+          </a:p>
+          <a:p>
+            <a:r>
+              <a:t>hiraiabench Tagalog Fluency (naturalness on tl probes, n=46; no RAG, shared neutral prompt, blind judge): Sailor2-3B untrained base: 2.39 → Hiraia-v7 (Sailor2-3B + cat v7 LoRA): 3.91. References: Qwen3.5-9B 3.17, Qwen3.5-27B 4.5, Qwen3-1.7B 0.15, Claude Opus 4.8 5.0 — finetuning/eval/hiraiabench/bench-results.json (hiraia-v7.'Tagalog Fluency'=3.91, sailor2-3b=2.39, qwen3.5-9b=3.17, qwen3.5-27b=4.5); model = finetuning/adapters/distill-sailor-3b-v7/adapter-tagalog-v7-f16.gguf per run-all-local.sh; methodology packages/web/src/components/hiraiabench-data.ts:44-49; commit 9eb1d3510 2026-06-16</a:t>
+            </a:r>
+          </a:p>
+          <a:p>
+            <a:r>
+              <a:t>hiraiabench English Fluency (n=7) / Bisaya (mean naturalness+accuracy, n=6): Sailor2-3B base: English 2.0, Bisaya 2.5 → Hiraia-v7: English 3.57, Bisaya 3.0 (Qwen3.5-9B: 5.0 / 1.75; 27B: 5.0 / 3.92) — finetuning/eval/hiraiabench/bench-results.json; footnote hiraiabench-data.ts:49</a:t>
+            </a:r>
+          </a:p>
+          <a:p>
+            <a:r>
+              <a:t>Capability benchmark naturalness dimension (Claude-judged, device-faithful, Tagalog adapter, temp 0.7, worst-of-3): 4.51 (2026-06-09 shipping ttft adapter, lexical retrieval, 102 probes) → 4.61 (Track-A rebalanced adapter); 4.60 (rebal-v2 hybrid, 88 tl probes); tl-language mean naturalness 4.58 -&gt; 4.69 (candidate-hybrid) — finetuning/eval/capability/FINDINGS.md:24,153; recomputed this session from baselines/current-2026-06-09.json (4.51), baselines/candidate-rebal-2026-06-09.json (4.61), scores.v2-hybrid.tagalog.json (4.60), scores.candidate-hybrid.tagalog.json (4.69)</a:t>
+            </a:r>
+          </a:p>
+          <a:p>
+            <a:r>
+              <a:t>English path A/B on the 18-probe english tier (Claude-judged): Sailor2-3B BASE, no LoRA (the original on-device English path): tier 1.78, naturalness 1.00, helpfulness-on-answerable 2.87 → Same base + Tagalog adapter: tier 3.75, accuracy 4.11, h0 refusals 0/15; shipping 2026-06-13 (v2a, English routed through Tagalog adapter): english tier 3.64, naturalness 4.11 — finetuning/rl/README.md:22 ('3.75 vs 1.78'); recomputed from finetuning/eval/capability/ab/capability-scores.english-tladapter.json (3.75, n=18) and baselines/capability-baseline.2026-06-11-shipping.json english tier (1.78); baselines/capability-baseline.2026-06-13-shipping-newbank.json english 3.64</a:t>
+            </a:r>
+          </a:p>
+          <a:p>
+            <a:r>
+              <a:t>June adapter smoke: replies in target language (25 prompts, GGUF adapters on Sailor2-3B f16): tagalog-full-v2 (Qwen3-1.7B era): 24/25 lang_ok, 1 english_heavy, avg 187 words, ends_question 4/25 → sailor v5 GGUF: tagalog 25/25, cebuano 25/25, english_heavy 0, avg 111/89 words; image tags 9/25 (tl) 18/25 (ceb), malformed 0 — finetuning/eval/results-tagalog.json summary; finetuning/eval/eval-v5-gguf-tagalog.json summary; finetuning/eval/eval-v5-gguf-bisaya.json summary</a:t>
+            </a:r>
+          </a:p>
+          <a:p>
+            <a:r>
+              <a:t>Prune+heal 2.4B per-language perplexity (Sailor2-3B pruned 9352-&gt;4608 FFN, healed on 800M tokens): Tagalog 10.26 pre-prune -&gt; 12.50 pruned; Cebuano 19.96 pruned; English 52.64 pruned → Healed: Tagalog 6.74, Cebuano 9.91, English 21.51 — finetuning/distill/ceb-heal/PRUNE-HEAL-RETROSPECTIVE.md:29-31</a:t>
+            </a:r>
+          </a:p>
+          <a:p>
+            <a:r>
+              <a:t>SFT v1 (Qwen3.5-2B) deterministic reply-language by capability tier (no LLM judge; regex language heuristic): n/a (first eval of the CPT line) → v1: all Tagalog tiers 100% Tagalog (e.g. helpfulness-floor 24/24, reasoning 14/14), bisaya tier 13/14 Cebuano, english tier 13/18 English. v2: english 6/18 (all 12 failures switched to Tagalog), bisaya 13/14 — reproduced this session with `python3 finetuning/eval/pod-eval/score_answers.py finetuning/cpt/sft-v1-eval-answers.json finetuning/cpt/sft-v2-eval-answers.json`; finetuning/cpt/SFT-V1-ROUTING-FINDING.md:120-136</a:t>
+            </a:r>
+          </a:p>
+          <a:p>
+            <a:r>
+              <a:t>Capability Score (tier-weighted 0-5, 143-probe instrument, Claude-judged, device-faithful, temp 0.7, worst-of-3), Sailor2-3B cat line: 3.32 (2026-06-09 shipping ttft adapter, lexical retrieval, 102 probes); 3.49 same adapter under true hybrid retrieval → 3.73 Track-A rebalanced adapter (+0.41 lexical / +0.22 under hybrid: 3.49-&gt;3.72); 3.95 rebal-v2 hybrid (88 tl probes, the pick); 3.81 v3 (regressed, not shipped) — finetuning/eval/capability/FINDINGS.md:17,83-90,145,68; recomputed this session with the run-capability.mts aggregation: baselines/current-2026-06-09.json 3.32, baselines/baseline-hybrid-2026-06-09.json 3.49, baselines/candidate-rebal-2026-06-09.json 3.73, baselines/candidate-hybrid-2026-06-09.json 3.72, scores.v2-hybrid.tagalog.json 3.95, scores.v3-hybrid.tagalog.json 3.81</a:t>
+            </a:r>
+          </a:p>
+          <a:p>
+            <a:r>
+              <a:t>Helpfulness on answerable probes (the over-abstention metric) and outright refusals: 2.54; 19 of 91 answerable probes refused/deflected (helpfulness 0) → 3.19 after rebalance (13 of the 19 now answer, 6 remain - all retrieval-empty hard tail); 3.37 on rebal-v2 with 1/78 refusals — FINDINGS.md:17,32,145,155,161-163,69; recomputed: current-2026-06-09.json help-answerable 2.54 (h0=19/91), candidate-rebal 3.19 (h0=9... note FINDINGS says 6/19 of the ORIGINAL 19 still refuse), scores.v2-hybrid.tagalog.json 3.37 (h0=1/78)</a:t>
+            </a:r>
+          </a:p>
+          <a:p>
+            <a:r>
+              <a:t>Abstain-correct tier (honesty on unknowables; guards against over-correcting into confabulation): 3.96 (2026-06-09 shipping) → 4.76 rebalanced (+0.80); 4.84 candidate-hybrid; 4.63-4.69 on the 2026-06-11/13 shipping snapshots — FINDINGS.md:151,99; recomputed from baselines files (4.76, 4.84, 4.63, 4.64)</a:t>
+            </a:r>
+          </a:p>
+          <a:p>
+            <a:r>
+              <a:t>Safety-myth tier (debunk myths, safe answers): 2.31 (weakest tier, 2026-06-09) → 2.61 rebalanced; 3.07 rebal-v2; 2.66-2.77 on 2026-06-11/13 shipping snapshots (still the weakest scored tier) — FINDINGS.md:21,152,68-69,74; recomputed: v2 3.07, 0613 2.66, 0611 2.70</a:t>
+            </a:r>
+          </a:p>
+          <a:p>
+            <a:r>
+              <a:t>Full-tier shipping snapshots incl. multi-turn + english (134/116 probes): 2026-06-11 'shipping' snapshot: 3.24 (help-answerable 2.77; tiers helpfulness-floor 3.79, multi-turn 2.74, english 1.78, bisaya 3.01, safety-myth 2.70, abstain-correct 4.63, pedagogy 2.93); same-judge overlay 3.30 → 2026-06-13 shipping-newbank (v2a intent adapter, tl+en only, 116 probes): 3.59 (help-answerable 3.14, h0 5/103; english 3.64, multi-turn 2.99, pedagogy 3.52, abstain-correct 4.64, safety-myth 2.66) — recomputed this session from finetuning/eval/capability/baselines/capability-baseline.2026-06-11-shipping.json (3.24, n=134), .samejudge.json (3.30), capability-baseline.2026-06-13-shipping-newbank.json (3.59, n=116); commit c4fbce1b2 2026-06-13; CPT-FLAGSHIP-PLAN.md:21,147,198</a:t>
+            </a:r>
+          </a:p>
+          <a:p>
+            <a:r>
+              <a:t>Multi-turn tier (scripted 3-turn dialogues; repetition/re-asking hard caps): mt-baseline: Tagalog 2.77 (n=10), Bisaya 1.79 (n=4) → 2.74 (2026-06-11, n=14) -&gt; 2.99 (2026-06-13, n=10 tl) — finetuning/eval/capability/scores.mt-baseline.tagalog.json / .bisaya.json (recomputed 2.77 / 1.79); baselines 0611 (2.74) and 0613 (2.99) recomputed</a:t>
+            </a:r>
+          </a:p>
+          <a:p>
+            <a:r>
+              <a:t>Pedagogy dimension (teaches vs dumps: analogy, check-for-understanding): 3.11 (2026-06-09 shipping) → 3.59 rebalanced (+0.48); 3.75 rebal-v2; 3.66 candidate-hybrid; hiraiabench Pedagogy (n=6, no RAG): Sailor2-3B 2.0 -&gt; Hiraia-v7 2.67 (Qwen3.5-9B 3.67, 27B 4.33) — FINDINGS.md:152; recomputed scores.v2-hybrid.tagalog.json pedagogy 3.75; finetuning/eval/hiraiabench/bench-results.json Pedagogy</a:t>
+            </a:r>
+          </a:p>
+          <a:p>
+            <a:r>
+              <a:t>hiraiabench Science Accuracy (n=20) / Safety &amp; Honesty (n=12) / Code-switching (n=8), no RAG: Sailor2-3B base: 2.25 / 1.5 / 2.88 → Hiraia-v7: 3.05 / 3.13 / 3.25 (Qwen3.5-9B: 3.25 / 3.38 / 3.44; Qwen3.5-27B: 4.9 / 5.0 / 4.63; Qwen3-1.7B: 0 / 0.42 / 0.06) — finetuning/eval/hiraiabench/bench-results.json; category definitions finetuning/eval/hiraiabench/aggregate.mjs:12-18; 59 judged of 67 probes (8 AUP-dropped), bench-set.json meta</a:t>
+            </a:r>
+          </a:p>
+          <a:p>
+            <a:r>
+              <a:t>Regression gate (finetuning/eval/harness/run-harness.sh), device-faithful hybrid, temp 0: Pre-hybrid gate broke on the +5040 fact expansion; re-calibrated 2026-06-09 → GREEN 39/39 with the v2 adapter (2026-06-09). cases.json today: 42 cases = 30 gated + 12 pending (known-unfixed, non-blocking); modes grounded 35 / chitchat 6 / abstain 1; langs tagalog 38 / cebuano 3 / english 1; grades 4-6 only. Also gates retrieval-stress + hybrid-stress 16/16. — FINDINGS.md:49 (39/39); commit 79712b2af 2026-06-09; counts computed this session from finetuning/eval/harness/cases.json (last commit 674fa6562 2026-06-19); PROBING-FINDINGS.md:172 (16/16); finetuning/eval/harness/.server.log (2026-08-27)</a:t>
+            </a:r>
+          </a:p>
+          <a:p>
+            <a:r>
+              <a:t>Natural kid-phrasing probe (chat-tutor.mts, 3B + grounded LoRA, hybrid retrieval, temp 0.8, ~40 probes, 2026-06-07): 10 good / 7 minor / 15 major / 8 critical = ~57% major-or-critical (denied Earth is round, called math subjective, affirmed reading-in-dark myth, moon=planet) → After R1 (normalizeQuery + SEMANTIC_FLOOR 0.58-&gt;0.55) and R2 (buildContextualQuery follow-up folding): 5/5 previously-deflecting topics answer, '5 planets?' now corrects to 8, hybrid-stress gate 13/13 -&gt; 16/16; Tier-2 prompt hardening fixed reading-dark/10%-brain/math/moon (gated in cases.json). Residuals: flat-earth, smoking, scared-lindol remain retrieval-gated (pending cases) — finetuning/eval/harness/PROBING-FINDINGS.md:21,58,82-83,153-175,190-203</a:t>
+            </a:r>
+          </a:p>
+          <a:p>
+            <a:r>
+              <a:t>Role-play edge QA (102 scripted 3-4 turn dialogues, 50 tl / 52 en, device temp 0.5, 2026-06-19): KITTEN 1B v7: fails turn 1 on TL safety/myth (affirms flat-earth/10%-brain/full-moon, says eclipse/raw chicken 'safe'), multi-turn collapse; temp-independent - greedy re-run went 8 -&gt; 11 criticals → CAT 3B v10: single-turn mostly solid (correct safety polarity, settled science), but caves on myths by turn 2+ (flat-earth 'totoo na patag ang Earth!'), 2 English safety failures (outlet, eclipse), EN-&gt;TL leak ~5/52 EN convos (~10%) — finetuning/eval/harness/ROLEPLAY-QA-FINDINGS.md:1-9,16-17,23-37,47-56</a:t>
+            </a:r>
+          </a:p>
+          <a:p>
+            <a:r>
+              <a:t>Kitten 1B DPO safety/myth polarity (32 probes, 8 per bucket, temp 0.5; 'fail' = wrong polarity): v7 base: safety_hazardous 6/8 fail, safety_safe 6/8, myth_false 4/8, myth_true 5/8 → v8dpo2: safety_hazardous 0/8, safety_safe 1/8, myth_true 0/8 BUT myth_false 7/8 fail (affirms false myths); dpoB: 2/8, 1/8, 8/8, 1/8 — finetuning/eval/harness/dpo-eval-v7base.json .stats; dpo-eval-v8dpo2.json .stats; dpo-eval-dpoB.json .stats; semantics finetuning/eval/harness/dpo-eval.mts:1-3</a:t>
+            </a:r>
+          </a:p>
+          <a:p>
+            <a:r>
+              <a:t>GRPO rounds on the 3B (programmatic rewards, June): Same-judge shipping baseline 3.30 (2026-06-11); newbank baseline 3.59 (2026-06-13) → GRPO r2: 2.98 (bisaya 2.05 vs 3.11, abstain-correct 3.24 vs 4.69; english 3.21 vs 1.85 = only win); GRPO r4: 3.41 vs 3.59. Variant sweep (Qwen3.5-9B screening judge): baseline 3.84, all four variants 3.30-3.37 — recomputed this session from baselines/capability-grpo-r2.2026-06-12.json, capability-grpo-r4.2026-06-13.json, capability-baseline.2026-06-11-shipping.samejudge.json; finetuning/eval/capability/baselines/capability-grpo-sweep.2026-06-13.txt</a:t>
+            </a:r>
+          </a:p>
+          <a:p>
+            <a:r>
+              <a:t>Prune+heal 2.4B capability (Sailor2-3B -&gt; 2.414B, healed, re-SFT x3; 126 probes, Claude-judged): '1B baseline' 3.24 (abstain-correct ~4.6) → 2.06 / 5 (-1.18); help-answerable 1.99; abstain-correct 1.29, bisaya 1.17, english 0.41, helpfulness-floor 2.75, safety-myth 2.74; biggest movers all confabulation on unknowables (serious illness -4.71, election winner -4.57, tomorrow's weather -4.29) — finetuning/distill/ceb-heal/PRUNE-HEAL-RETROSPECTIVE.md:12,48-52,62-63; reproduced this session from the working-tree finetuning/eval/capability/capability-scores.{tagalog,english,bisaya}.json (combined 2.06, abstain-correct 1.29, help-answerable 1.99, h0 24/113) - these files were collected against finetuning/distill/ceb-heal/gguf/sailor2-2b4-healed.Q4_K_M.gguf per capability/.server.log:11</a:t>
+            </a:r>
+          </a:p>
+          <a:p>
+            <a:r>
+              <a:t>SFT v1 (Qwen3.5-2B) deterministic behavioural gate + abstention (no LLM judge): n/a (first eval of the CPT line); v2 for comparison → v1: chitchat 5/6, abstain 1/1, grounded forbidden-term violations 0/34; abstain-correct tier refusal/deflect 8/10, safety-myth refusal 1/10, all other tiers 0 refusals; median answer ~470 chars. v2: abstain 0/1 (confabulated 'the largest star is the Supernova'), abstain-correct refusals 7/10, median +20% longer — reproduced this session: `python3 finetuning/eval/pod-eval/score_answers.py finetuning/cpt/sft-v1-eval-answers.json finetuning/cpt/sft-v2-eval-answers.json`; finetuning/cpt/SFT-V1-ROUTING-FINDING.md:118-129,141-144</a:t>
+            </a:r>
+          </a:p>
+          <a:p>
+            <a:r>
+              <a:t>Miss-card direction generation, SFT v1 (216 probes = 72 terms x 3 modes, T=0.7; bar: &gt;=90% of cards with all 3 directions retrievable at cosine &gt;=0.63): Pre-registered bar &gt;=90% → v1 prose template 57/216 (26%); v2 'exactly three lines' 60/216 (28%); v3 JSON-schema constrained decoding 55/216 (25%). Mode-language compliance 211/216, 198/216, 180/216. Retrieval-only alternative: 7/27 true-miss triples sensible — finetuning/eval/misscard/README.md:25-29,51-63; finetuning/eval/retrieval/README.md:17-20</a:t>
+            </a:r>
+          </a:p>
+          <a:p>
+            <a:r>
+              <a:t>Objective presentation metrics (finetuning/eval/presentation.mts: image-tag emission/well-formed/no-repeat, emoji present/spam &gt;4, bold, English persona-leak): 2026-06-11 english tier on the BASE model (no LoRA): emojiPresent 13/18, emojiSpam 6/18, bold 18/18, persona-leak 0/18; tagalog adapter answers: emoji 0/88, bold 0/88 → 2026-06-13 (v2a) tagalog: emojiPresent 14/88, spam 0, bold 0; bisaya bold 14/14; english persona-leak 0/18. 2.4B run (Jun 22, raw captured): image tags 4/93 all well-formed, 0 repeated images across 11 multi-turn dialogues, emoji spam 0 — computed via tsx script importing finetuning/eval/presentation.mts over baselines/answers-2026-06-11-shipping/*.json, HEAD:finetuning/eval/capability/capability-answers.*.json (commit c4fbce1b2), and working-tree capability-answers.*.json; raw-capture caveat in finetuning/eval/capability/run-capability.mts report() comment</a:t>
+            </a:r>
+          </a:p>
+          <a:p>
+            <a:r>
+              <a:t>On-device speed, Redmi (SD685/Adreno 610, CPU-only, ARMv8.0, llama-bench 4 threads, Q4_K_M): Sailor2-1B: prefill 20.13 / decode 12.73 t/s (bench; earlier 19.3/11.8); in-app 1B TTFT ~24 s, 4.4 tok/s. Sailor2-3B: ~2.6 t/s decode (unusable on this device) → Qwen3.5-2B: prefill 10.94 / decode 5.93 t/s (1.8x / 2.1x slower than the 1B; in line with a same-size transformer; hybrid SSM kernels run correctly at armv8.0) — CPT-FLAGSHIP-PLAN.md:102-105; PRUNE-HEAL-RETROSPECTIVE.md:20 (1B 11.8, 3B 2.6 t/s)</a:t>
+            </a:r>
+          </a:p>
+          <a:p>
+            <a:r>
+              <a:t>Device-equivalent latency, cat tier on M1 Pro Metal (llama-server, Sailor2-3B Q4_K_M + adapter-tagalog.gguf, temp 0.5): cold call TTFT 539 ms → warm calls ~163 ms TTFT (static system prompt KV cache reuse); avg decode 37.5 tok/s; model load 1,056 ms — AUDIT_LOG.md 'Run summary' + per-call table; generator finetuning/eval/audit/run-audit-demo.mjs</a:t>
+            </a:r>
+          </a:p>
+          <a:p>
+            <a:r>
+              <a:t>GGUF ship path for the CPT'd Qwen3.5-2B (Gate 4): Untested; open upstream hybrid-arch conversion bug ggml-org#24737 → PASS: convert_hf_to_gguf.py --no-mtp on llama.cpp b10603, qwen35.block_count=24, Q4_K_M 1,560,460,800 B (1.45 GiB, +23% vs base 1.27 GB due to 248,320 vocab), generations match safetensors; x86 16-core CPU: prefill 97.1 / decode 44.5 tok/s — finetuning/cpt/GATE4-GGUF-BRIEF.md:92-104; finetuning/cpt/FULLRUN-RESULTS.md:70-101; RUN-LOG.md 2026-08-24 02:30 UTC entry</a:t>
+            </a:r>
+          </a:p>
+          <a:p>
+            <a:r>
+              <a:t>Training run facts (for the cost/scale slide): June adapters: LoRA on Sailor2-3B, e.g. Track-A rebalance ~$0.60 on an A100 (FINDINGS.md:142-143); prune+heal total ~$86 (retrospective 'Costs') → Full CPT: 3,273 steps, ~13.7B tokens trained (mix 24.78B pool, 2.63 epochs of tl), loss 4.144 -&gt; 1.756, 8xH100 ~35.5h, ~$972 (budget $1,000). SFT v1: 6,687 rows, 3 ep, 1,254 steps, loss 1.651 -&gt; 0.996, 1xA100 ~47 min ~$1.40 (~$6 incl. 3 failed attempts). Probe run 2 lost 9/10 checkpoints to a cross-DC sync failure (~$278 run + drained account) — finetuning/cpt/FULLRUN-RESULTS.md:12-18; finetuning/cpt/SFT-V1-RESULTS.md:3-14; finetuning/cpt/PROBE-RUN-STATUS.md 'RUN 2 OUTCOME'</a:t>
             </a:r>
           </a:p>
         </p:txBody>
@@ -983,6 +984,76 @@
 </file>
 
 <file path=ppt/notesSlides/notesSlide6.xml><?xml version="1.0" encoding="utf-8"?>
+<p:notes xmlns:a="http://schemas.openxmlformats.org/drawingml/2006/main" xmlns:p="http://schemas.openxmlformats.org/presentationml/2006/main" xmlns:r="http://schemas.openxmlformats.org/officeDocument/2006/relationships">
+  <p:cSld>
+    <p:spTree>
+      <p:nvGrpSpPr>
+        <p:cNvPr id="1" name=""/>
+        <p:cNvGrpSpPr/>
+        <p:nvPr/>
+      </p:nvGrpSpPr>
+      <p:grpSpPr>
+        <a:xfrm>
+          <a:off x="0" y="0"/>
+          <a:ext cx="0" cy="0"/>
+          <a:chOff x="0" y="0"/>
+          <a:chExt cx="0" cy="0"/>
+        </a:xfrm>
+      </p:grpSpPr>
+      <p:sp>
+        <p:nvSpPr>
+          <p:cNvPr id="2" name="Slide Image Placeholder 1"/>
+          <p:cNvSpPr>
+            <a:spLocks noGrp="1"/>
+          </p:cNvSpPr>
+          <p:nvPr>
+            <p:ph type="sldImg" idx="2"/>
+          </p:nvPr>
+        </p:nvSpPr>
+        <p:spPr/>
+      </p:sp>
+      <p:sp>
+        <p:nvSpPr>
+          <p:cNvPr id="3" name="Notes Placeholder 2"/>
+          <p:cNvSpPr>
+            <a:spLocks noGrp="1"/>
+          </p:cNvSpPr>
+          <p:nvPr>
+            <p:ph type="body" idx="3" sz="quarter"/>
+          </p:nvPr>
+        </p:nvSpPr>
+        <p:spPr/>
+        <p:txBody>
+          <a:bodyPr/>
+          <a:lstStyle/>
+          <a:p>
+            <a:r>
+              <a:t>Plan items trace to: rag/pipeline/FACT-SWARM-SPEC.md (Lane B, quiz lane, module cards), rag/pipeline/FEED-WEIGHTING.md (Miss-Card labels, edge-walk cost), finetuning/eval/routing/README.md (hedge-clause wording sweep), finetuning/cpt/*.md (SFT/KD on the CPT base), memory of on-device measurements on the Redmi SD685 (kitten tier ~4.4 tok/s, TTFT ~24 s).</a:t>
+            </a:r>
+          </a:p>
+        </p:txBody>
+      </p:sp>
+      <p:sp>
+        <p:nvSpPr>
+          <p:cNvPr id="4" name="Slide Number Placeholder 3"/>
+          <p:cNvSpPr>
+            <a:spLocks noGrp="1"/>
+          </p:cNvSpPr>
+          <p:nvPr>
+            <p:ph type="sldNum" idx="5" sz="quarter"/>
+          </p:nvPr>
+        </p:nvSpPr>
+        <p:spPr/>
+      </p:sp>
+    </p:spTree>
+  </p:cSld>
+  <p:clrMapOvr>
+    <a:masterClrMapping/>
+  </p:clrMapOvr>
+</p:notes>
+</file>
+
+<file path=ppt/notesSlides/notesSlide7.xml><?xml version="1.0" encoding="utf-8"?>
 <p:notes xmlns:a="http://schemas.openxmlformats.org/drawingml/2006/main" xmlns:p="http://schemas.openxmlformats.org/presentationml/2006/main" xmlns:r="http://schemas.openxmlformats.org/officeDocument/2006/relationships">
   <p:cSld>
     <p:spTree>
@@ -4812,7 +4883,7 @@
                 </a:solidFill>
                 <a:latin typeface="Alfa Slab One"/>
               </a:rPr>
-              <a:t>Training runs on RunPod</a:t>
+              <a:t>User experience</a:t>
             </a:r>
           </a:p>
         </p:txBody>
@@ -4847,7 +4918,7 @@
                 </a:solidFill>
                 <a:latin typeface="Inter"/>
               </a:rPr>
-              <a:t>Most of the compute went into a continued-pretrained Filipino base model; the rest into tutoring fine-tunes, a pruning experiment, and evaluation.</a:t>
+              <a:t>The app teaches with a deck of flash cards drawn from the DepEd MATATAG curriculum: a child reads a card, is quizzed on what they just read, is told what they have covered, and can ask for a topic at any time.</a:t>
             </a:r>
           </a:p>
         </p:txBody>
@@ -4961,6 +5032,615 @@
                 <a:latin typeface="Inter"/>
               </a:rPr>
               <a:t>2</a:t>
+            </a:r>
+          </a:p>
+        </p:txBody>
+      </p:sp>
+      <p:pic>
+        <p:nvPicPr>
+          <p:cNvPr id="8" name="Picture 7" descr="02-feed-card.png"/>
+          <p:cNvPicPr>
+            <a:picLocks noChangeAspect="1"/>
+          </p:cNvPicPr>
+          <p:nvPr/>
+        </p:nvPicPr>
+        <p:blipFill>
+          <a:blip r:embed="rId3"/>
+          <a:stretch>
+            <a:fillRect/>
+          </a:stretch>
+        </p:blipFill>
+        <p:spPr>
+          <a:xfrm>
+            <a:off x="713232" y="1828800"/>
+            <a:ext cx="1640593" cy="3520440"/>
+          </a:xfrm>
+          <a:prstGeom prst="rect">
+            <a:avLst/>
+          </a:prstGeom>
+        </p:spPr>
+      </p:pic>
+      <p:sp>
+        <p:nvSpPr>
+          <p:cNvPr id="9" name="TextBox 8"/>
+          <p:cNvSpPr txBox="1"/>
+          <p:nvPr/>
+        </p:nvSpPr>
+        <p:spPr>
+          <a:xfrm>
+            <a:off x="438912" y="5404103"/>
+            <a:ext cx="2189165" cy="365760"/>
+          </a:xfrm>
+          <a:prstGeom prst="rect">
+            <a:avLst/>
+          </a:prstGeom>
+          <a:noFill/>
+        </p:spPr>
+        <p:txBody>
+          <a:bodyPr wrap="square" anchor="t">
+            <a:spAutoFit/>
+          </a:bodyPr>
+          <a:lstStyle/>
+          <a:p>
+            <a:pPr algn="ctr"/>
+            <a:r>
+              <a:rPr sz="1050" b="0">
+                <a:solidFill>
+                  <a:srgbClr val="5B6B52"/>
+                </a:solidFill>
+                <a:latin typeface="Inter"/>
+              </a:rPr>
+              <a:t/>
+            </a:r>
+          </a:p>
+        </p:txBody>
+      </p:sp>
+      <p:sp>
+        <p:nvSpPr>
+          <p:cNvPr id="10" name="TextBox 9"/>
+          <p:cNvSpPr txBox="1"/>
+          <p:nvPr/>
+        </p:nvSpPr>
+        <p:spPr>
+          <a:xfrm>
+            <a:off x="384048" y="5532120"/>
+            <a:ext cx="2487168" cy="777240"/>
+          </a:xfrm>
+          <a:prstGeom prst="rect">
+            <a:avLst/>
+          </a:prstGeom>
+          <a:noFill/>
+        </p:spPr>
+        <p:txBody>
+          <a:bodyPr wrap="square" anchor="t">
+            <a:spAutoFit/>
+          </a:bodyPr>
+          <a:lstStyle/>
+          <a:p>
+            <a:pPr algn="ctr"/>
+            <a:r>
+              <a:rPr sz="1150" b="0">
+                <a:solidFill>
+                  <a:srgbClr val="1C3B2E"/>
+                </a:solidFill>
+                <a:latin typeface="Inter"/>
+              </a:rPr>
+              <a:t>A card carries one fact, one illustration, and the topic that comes next.</a:t>
+            </a:r>
+          </a:p>
+        </p:txBody>
+      </p:sp>
+      <p:pic>
+        <p:nvPicPr>
+          <p:cNvPr id="11" name="Picture 10" descr="04-quiz-card.png"/>
+          <p:cNvPicPr>
+            <a:picLocks noChangeAspect="1"/>
+          </p:cNvPicPr>
+          <p:nvPr/>
+        </p:nvPicPr>
+        <p:blipFill>
+          <a:blip r:embed="rId4"/>
+          <a:stretch>
+            <a:fillRect/>
+          </a:stretch>
+        </p:blipFill>
+        <p:spPr>
+          <a:xfrm>
+            <a:off x="3511296" y="1828800"/>
+            <a:ext cx="1640593" cy="3520440"/>
+          </a:xfrm>
+          <a:prstGeom prst="rect">
+            <a:avLst/>
+          </a:prstGeom>
+        </p:spPr>
+      </p:pic>
+      <p:sp>
+        <p:nvSpPr>
+          <p:cNvPr id="12" name="TextBox 11"/>
+          <p:cNvSpPr txBox="1"/>
+          <p:nvPr/>
+        </p:nvSpPr>
+        <p:spPr>
+          <a:xfrm>
+            <a:off x="3236976" y="5404103"/>
+            <a:ext cx="2189165" cy="365760"/>
+          </a:xfrm>
+          <a:prstGeom prst="rect">
+            <a:avLst/>
+          </a:prstGeom>
+          <a:noFill/>
+        </p:spPr>
+        <p:txBody>
+          <a:bodyPr wrap="square" anchor="t">
+            <a:spAutoFit/>
+          </a:bodyPr>
+          <a:lstStyle/>
+          <a:p>
+            <a:pPr algn="ctr"/>
+            <a:r>
+              <a:rPr sz="1050" b="0">
+                <a:solidFill>
+                  <a:srgbClr val="5B6B52"/>
+                </a:solidFill>
+                <a:latin typeface="Inter"/>
+              </a:rPr>
+              <a:t/>
+            </a:r>
+          </a:p>
+        </p:txBody>
+      </p:sp>
+      <p:sp>
+        <p:nvSpPr>
+          <p:cNvPr id="13" name="TextBox 12"/>
+          <p:cNvSpPr txBox="1"/>
+          <p:nvPr/>
+        </p:nvSpPr>
+        <p:spPr>
+          <a:xfrm>
+            <a:off x="3182112" y="5532120"/>
+            <a:ext cx="2487168" cy="777240"/>
+          </a:xfrm>
+          <a:prstGeom prst="rect">
+            <a:avLst/>
+          </a:prstGeom>
+          <a:noFill/>
+        </p:spPr>
+        <p:txBody>
+          <a:bodyPr wrap="square" anchor="t">
+            <a:spAutoFit/>
+          </a:bodyPr>
+          <a:lstStyle/>
+          <a:p>
+            <a:pPr algn="ctr"/>
+            <a:r>
+              <a:rPr sz="1150" b="0">
+                <a:solidFill>
+                  <a:srgbClr val="1C3B2E"/>
+                </a:solidFill>
+                <a:latin typeface="Inter"/>
+              </a:rPr>
+              <a:t>Every few cards a question interrupts the deck, on a fact just read.</a:t>
+            </a:r>
+          </a:p>
+        </p:txBody>
+      </p:sp>
+      <p:pic>
+        <p:nvPicPr>
+          <p:cNvPr id="14" name="Picture 13" descr="05-reward-card.png"/>
+          <p:cNvPicPr>
+            <a:picLocks noChangeAspect="1"/>
+          </p:cNvPicPr>
+          <p:nvPr/>
+        </p:nvPicPr>
+        <p:blipFill>
+          <a:blip r:embed="rId5"/>
+          <a:stretch>
+            <a:fillRect/>
+          </a:stretch>
+        </p:blipFill>
+        <p:spPr>
+          <a:xfrm>
+            <a:off x="6309360" y="1828800"/>
+            <a:ext cx="1640593" cy="3520440"/>
+          </a:xfrm>
+          <a:prstGeom prst="rect">
+            <a:avLst/>
+          </a:prstGeom>
+        </p:spPr>
+      </p:pic>
+      <p:sp>
+        <p:nvSpPr>
+          <p:cNvPr id="15" name="TextBox 14"/>
+          <p:cNvSpPr txBox="1"/>
+          <p:nvPr/>
+        </p:nvSpPr>
+        <p:spPr>
+          <a:xfrm>
+            <a:off x="6035040" y="5404103"/>
+            <a:ext cx="2189165" cy="365760"/>
+          </a:xfrm>
+          <a:prstGeom prst="rect">
+            <a:avLst/>
+          </a:prstGeom>
+          <a:noFill/>
+        </p:spPr>
+        <p:txBody>
+          <a:bodyPr wrap="square" anchor="t">
+            <a:spAutoFit/>
+          </a:bodyPr>
+          <a:lstStyle/>
+          <a:p>
+            <a:pPr algn="ctr"/>
+            <a:r>
+              <a:rPr sz="1050" b="0">
+                <a:solidFill>
+                  <a:srgbClr val="5B6B52"/>
+                </a:solidFill>
+                <a:latin typeface="Inter"/>
+              </a:rPr>
+              <a:t/>
+            </a:r>
+          </a:p>
+        </p:txBody>
+      </p:sp>
+      <p:sp>
+        <p:nvSpPr>
+          <p:cNvPr id="16" name="TextBox 15"/>
+          <p:cNvSpPr txBox="1"/>
+          <p:nvPr/>
+        </p:nvSpPr>
+        <p:spPr>
+          <a:xfrm>
+            <a:off x="5980176" y="5532120"/>
+            <a:ext cx="2487168" cy="777240"/>
+          </a:xfrm>
+          <a:prstGeom prst="rect">
+            <a:avLst/>
+          </a:prstGeom>
+          <a:noFill/>
+        </p:spPr>
+        <p:txBody>
+          <a:bodyPr wrap="square" anchor="t">
+            <a:spAutoFit/>
+          </a:bodyPr>
+          <a:lstStyle/>
+          <a:p>
+            <a:pPr algn="ctr"/>
+            <a:r>
+              <a:rPr sz="1150" b="0">
+                <a:solidFill>
+                  <a:srgbClr val="1C3B2E"/>
+                </a:solidFill>
+                <a:latin typeface="Inter"/>
+              </a:rPr>
+              <a:t>A periodic recap names the topics the child actually covered.</a:t>
+            </a:r>
+          </a:p>
+        </p:txBody>
+      </p:sp>
+      <p:pic>
+        <p:nvPicPr>
+          <p:cNvPr id="17" name="Picture 16" descr="06-search-card.png"/>
+          <p:cNvPicPr>
+            <a:picLocks noChangeAspect="1"/>
+          </p:cNvPicPr>
+          <p:nvPr/>
+        </p:nvPicPr>
+        <p:blipFill>
+          <a:blip r:embed="rId6"/>
+          <a:stretch>
+            <a:fillRect/>
+          </a:stretch>
+        </p:blipFill>
+        <p:spPr>
+          <a:xfrm>
+            <a:off x="9107424" y="1828800"/>
+            <a:ext cx="1640593" cy="3520440"/>
+          </a:xfrm>
+          <a:prstGeom prst="rect">
+            <a:avLst/>
+          </a:prstGeom>
+        </p:spPr>
+      </p:pic>
+      <p:sp>
+        <p:nvSpPr>
+          <p:cNvPr id="18" name="TextBox 17"/>
+          <p:cNvSpPr txBox="1"/>
+          <p:nvPr/>
+        </p:nvSpPr>
+        <p:spPr>
+          <a:xfrm>
+            <a:off x="8833103" y="5404103"/>
+            <a:ext cx="2189165" cy="365760"/>
+          </a:xfrm>
+          <a:prstGeom prst="rect">
+            <a:avLst/>
+          </a:prstGeom>
+          <a:noFill/>
+        </p:spPr>
+        <p:txBody>
+          <a:bodyPr wrap="square" anchor="t">
+            <a:spAutoFit/>
+          </a:bodyPr>
+          <a:lstStyle/>
+          <a:p>
+            <a:pPr algn="ctr"/>
+            <a:r>
+              <a:rPr sz="1050" b="0">
+                <a:solidFill>
+                  <a:srgbClr val="5B6B52"/>
+                </a:solidFill>
+                <a:latin typeface="Inter"/>
+              </a:rPr>
+              <a:t/>
+            </a:r>
+          </a:p>
+        </p:txBody>
+      </p:sp>
+      <p:sp>
+        <p:nvSpPr>
+          <p:cNvPr id="19" name="TextBox 18"/>
+          <p:cNvSpPr txBox="1"/>
+          <p:nvPr/>
+        </p:nvSpPr>
+        <p:spPr>
+          <a:xfrm>
+            <a:off x="8778240" y="5532120"/>
+            <a:ext cx="2487168" cy="777240"/>
+          </a:xfrm>
+          <a:prstGeom prst="rect">
+            <a:avLst/>
+          </a:prstGeom>
+          <a:noFill/>
+        </p:spPr>
+        <p:txBody>
+          <a:bodyPr wrap="square" anchor="t">
+            <a:spAutoFit/>
+          </a:bodyPr>
+          <a:lstStyle/>
+          <a:p>
+            <a:pPr algn="ctr"/>
+            <a:r>
+              <a:rPr sz="1150" b="0">
+                <a:solidFill>
+                  <a:srgbClr val="1C3B2E"/>
+                </a:solidFill>
+                <a:latin typeface="Inter"/>
+              </a:rPr>
+              <a:t>Typing a word moves the deck to a matching card — here, “bulkan”.</a:t>
+            </a:r>
+          </a:p>
+        </p:txBody>
+      </p:sp>
+    </p:spTree>
+  </p:cSld>
+  <p:clrMapOvr>
+    <a:masterClrMapping/>
+  </p:clrMapOvr>
+</p:sld>
+</file>
+
+<file path=ppt/slides/slide3.xml><?xml version="1.0" encoding="utf-8"?>
+<p:sld xmlns:a="http://schemas.openxmlformats.org/drawingml/2006/main" xmlns:p="http://schemas.openxmlformats.org/presentationml/2006/main" xmlns:r="http://schemas.openxmlformats.org/officeDocument/2006/relationships">
+  <p:cSld>
+    <p:bg>
+      <p:bgPr>
+        <a:solidFill>
+          <a:srgbClr val="FDFDF6"/>
+        </a:solidFill>
+        <a:effectLst/>
+      </p:bgPr>
+    </p:bg>
+    <p:spTree>
+      <p:nvGrpSpPr>
+        <p:cNvPr id="1" name=""/>
+        <p:cNvGrpSpPr/>
+        <p:nvPr/>
+      </p:nvGrpSpPr>
+      <p:grpSpPr/>
+      <p:pic>
+        <p:nvPicPr>
+          <p:cNvPr id="2" name="Picture 1" descr="icon.png"/>
+          <p:cNvPicPr>
+            <a:picLocks noChangeAspect="1"/>
+          </p:cNvPicPr>
+          <p:nvPr/>
+        </p:nvPicPr>
+        <p:blipFill>
+          <a:blip r:embed="rId2"/>
+          <a:stretch>
+            <a:fillRect/>
+          </a:stretch>
+        </p:blipFill>
+        <p:spPr>
+          <a:xfrm>
+            <a:off x="411480" y="274320"/>
+            <a:ext cx="548640" cy="548640"/>
+          </a:xfrm>
+          <a:prstGeom prst="rect">
+            <a:avLst/>
+          </a:prstGeom>
+        </p:spPr>
+      </p:pic>
+      <p:sp>
+        <p:nvSpPr>
+          <p:cNvPr id="3" name="TextBox 2"/>
+          <p:cNvSpPr txBox="1"/>
+          <p:nvPr/>
+        </p:nvSpPr>
+        <p:spPr>
+          <a:xfrm>
+            <a:off x="1097280" y="274320"/>
+            <a:ext cx="10607040" cy="640080"/>
+          </a:xfrm>
+          <a:prstGeom prst="rect">
+            <a:avLst/>
+          </a:prstGeom>
+          <a:noFill/>
+        </p:spPr>
+        <p:txBody>
+          <a:bodyPr wrap="square" anchor="t">
+            <a:spAutoFit/>
+          </a:bodyPr>
+          <a:lstStyle/>
+          <a:p>
+            <a:pPr algn="l"/>
+            <a:r>
+              <a:rPr sz="2600" b="0">
+                <a:solidFill>
+                  <a:srgbClr val="20342C"/>
+                </a:solidFill>
+                <a:latin typeface="Alfa Slab One"/>
+              </a:rPr>
+              <a:t>Training runs on RunPod</a:t>
+            </a:r>
+          </a:p>
+        </p:txBody>
+      </p:sp>
+      <p:sp>
+        <p:nvSpPr>
+          <p:cNvPr id="4" name="TextBox 3"/>
+          <p:cNvSpPr txBox="1"/>
+          <p:nvPr/>
+        </p:nvSpPr>
+        <p:spPr>
+          <a:xfrm>
+            <a:off x="457200" y="914400"/>
+            <a:ext cx="11247120" cy="640080"/>
+          </a:xfrm>
+          <a:prstGeom prst="rect">
+            <a:avLst/>
+          </a:prstGeom>
+          <a:noFill/>
+        </p:spPr>
+        <p:txBody>
+          <a:bodyPr wrap="square" anchor="t">
+            <a:spAutoFit/>
+          </a:bodyPr>
+          <a:lstStyle/>
+          <a:p>
+            <a:pPr algn="l"/>
+            <a:r>
+              <a:rPr sz="1600" b="1">
+                <a:solidFill>
+                  <a:srgbClr val="1C3B2E"/>
+                </a:solidFill>
+                <a:latin typeface="Inter"/>
+              </a:rPr>
+              <a:t>Most of the compute went into a continued-pretrained Filipino base model; the rest into tutoring fine-tunes, a pruning experiment, and evaluation.</a:t>
+            </a:r>
+          </a:p>
+        </p:txBody>
+      </p:sp>
+      <p:sp>
+        <p:nvSpPr>
+          <p:cNvPr id="5" name="Rectangle 4"/>
+          <p:cNvSpPr/>
+          <p:nvPr/>
+        </p:nvSpPr>
+        <p:spPr>
+          <a:xfrm>
+            <a:off x="457200" y="1554480"/>
+            <a:ext cx="11274552" cy="18000"/>
+          </a:xfrm>
+          <a:prstGeom prst="rect">
+            <a:avLst/>
+          </a:prstGeom>
+          <a:solidFill>
+            <a:srgbClr val="D8A03A"/>
+          </a:solidFill>
+          <a:ln>
+            <a:noFill/>
+          </a:ln>
+        </p:spPr>
+        <p:style>
+          <a:lnRef idx="1">
+            <a:schemeClr val="accent1"/>
+          </a:lnRef>
+          <a:fillRef idx="3">
+            <a:schemeClr val="accent1"/>
+          </a:fillRef>
+          <a:effectRef idx="2">
+            <a:schemeClr val="accent1"/>
+          </a:effectRef>
+          <a:fontRef idx="minor">
+            <a:schemeClr val="lt1"/>
+          </a:fontRef>
+        </p:style>
+        <p:txBody>
+          <a:bodyPr rtlCol="0" anchor="ctr"/>
+          <a:lstStyle/>
+          <a:p>
+            <a:pPr algn="ctr"/>
+          </a:p>
+        </p:txBody>
+      </p:sp>
+      <p:sp>
+        <p:nvSpPr>
+          <p:cNvPr id="6" name="TextBox 5"/>
+          <p:cNvSpPr txBox="1"/>
+          <p:nvPr/>
+        </p:nvSpPr>
+        <p:spPr>
+          <a:xfrm>
+            <a:off x="457200" y="6446520"/>
+            <a:ext cx="8229600" cy="274320"/>
+          </a:xfrm>
+          <a:prstGeom prst="rect">
+            <a:avLst/>
+          </a:prstGeom>
+          <a:noFill/>
+        </p:spPr>
+        <p:txBody>
+          <a:bodyPr wrap="square" anchor="t">
+            <a:spAutoFit/>
+          </a:bodyPr>
+          <a:lstStyle/>
+          <a:p>
+            <a:pPr algn="l"/>
+            <a:r>
+              <a:rPr sz="1100" b="0">
+                <a:solidFill>
+                  <a:srgbClr val="5B6B52"/>
+                </a:solidFill>
+                <a:latin typeface="Inter"/>
+              </a:rPr>
+              <a:t>Hiraia · progress update · early September 2026 · hiraia.org</a:t>
+            </a:r>
+          </a:p>
+        </p:txBody>
+      </p:sp>
+      <p:sp>
+        <p:nvSpPr>
+          <p:cNvPr id="7" name="TextBox 6"/>
+          <p:cNvSpPr txBox="1"/>
+          <p:nvPr/>
+        </p:nvSpPr>
+        <p:spPr>
+          <a:xfrm>
+            <a:off x="11247120" y="6446520"/>
+            <a:ext cx="548640" cy="274320"/>
+          </a:xfrm>
+          <a:prstGeom prst="rect">
+            <a:avLst/>
+          </a:prstGeom>
+          <a:noFill/>
+        </p:spPr>
+        <p:txBody>
+          <a:bodyPr wrap="square" anchor="t">
+            <a:spAutoFit/>
+          </a:bodyPr>
+          <a:lstStyle/>
+          <a:p>
+            <a:pPr algn="r"/>
+            <a:r>
+              <a:rPr sz="1100" b="0">
+                <a:solidFill>
+                  <a:srgbClr val="5B6B52"/>
+                </a:solidFill>
+                <a:latin typeface="Inter"/>
+              </a:rPr>
+              <a:t>3</a:t>
             </a:r>
           </a:p>
         </p:txBody>
@@ -6378,7 +7058,7 @@
 </p:sld>
 </file>
 
-<file path=ppt/slides/slide3.xml><?xml version="1.0" encoding="utf-8"?>
+<file path=ppt/slides/slide4.xml><?xml version="1.0" encoding="utf-8"?>
 <p:sld xmlns:a="http://schemas.openxmlformats.org/drawingml/2006/main" xmlns:p="http://schemas.openxmlformats.org/presentationml/2006/main" xmlns:r="http://schemas.openxmlformats.org/officeDocument/2006/relationships">
   <p:cSld>
     <p:bg>
@@ -6598,7 +7278,7 @@
                 </a:solidFill>
                 <a:latin typeface="Inter"/>
               </a:rPr>
-              <a:t>3</a:t>
+              <a:t>4</a:t>
             </a:r>
           </a:p>
         </p:txBody>
@@ -7077,825 +7757,6 @@
 </p:sld>
 </file>
 
-<file path=ppt/slides/slide4.xml><?xml version="1.0" encoding="utf-8"?>
-<p:sld xmlns:a="http://schemas.openxmlformats.org/drawingml/2006/main" xmlns:p="http://schemas.openxmlformats.org/presentationml/2006/main" xmlns:r="http://schemas.openxmlformats.org/officeDocument/2006/relationships">
-  <p:cSld>
-    <p:bg>
-      <p:bgPr>
-        <a:solidFill>
-          <a:srgbClr val="FDFDF6"/>
-        </a:solidFill>
-        <a:effectLst/>
-      </p:bgPr>
-    </p:bg>
-    <p:spTree>
-      <p:nvGrpSpPr>
-        <p:cNvPr id="1" name=""/>
-        <p:cNvGrpSpPr/>
-        <p:nvPr/>
-      </p:nvGrpSpPr>
-      <p:grpSpPr/>
-      <p:pic>
-        <p:nvPicPr>
-          <p:cNvPr id="2" name="Picture 1" descr="icon.png"/>
-          <p:cNvPicPr>
-            <a:picLocks noChangeAspect="1"/>
-          </p:cNvPicPr>
-          <p:nvPr/>
-        </p:nvPicPr>
-        <p:blipFill>
-          <a:blip r:embed="rId2"/>
-          <a:stretch>
-            <a:fillRect/>
-          </a:stretch>
-        </p:blipFill>
-        <p:spPr>
-          <a:xfrm>
-            <a:off x="411480" y="274320"/>
-            <a:ext cx="548640" cy="548640"/>
-          </a:xfrm>
-          <a:prstGeom prst="rect">
-            <a:avLst/>
-          </a:prstGeom>
-        </p:spPr>
-      </p:pic>
-      <p:sp>
-        <p:nvSpPr>
-          <p:cNvPr id="3" name="TextBox 2"/>
-          <p:cNvSpPr txBox="1"/>
-          <p:nvPr/>
-        </p:nvSpPr>
-        <p:spPr>
-          <a:xfrm>
-            <a:off x="1097280" y="274320"/>
-            <a:ext cx="10607040" cy="640080"/>
-          </a:xfrm>
-          <a:prstGeom prst="rect">
-            <a:avLst/>
-          </a:prstGeom>
-          <a:noFill/>
-        </p:spPr>
-        <p:txBody>
-          <a:bodyPr wrap="square" anchor="t">
-            <a:spAutoFit/>
-          </a:bodyPr>
-          <a:lstStyle/>
-          <a:p>
-            <a:pPr algn="l"/>
-            <a:r>
-              <a:rPr sz="2600" b="0">
-                <a:solidFill>
-                  <a:srgbClr val="20342C"/>
-                </a:solidFill>
-                <a:latin typeface="Alfa Slab One"/>
-              </a:rPr>
-              <a:t>Model progress: fluency and pedagogy</a:t>
-            </a:r>
-          </a:p>
-        </p:txBody>
-      </p:sp>
-      <p:sp>
-        <p:nvSpPr>
-          <p:cNvPr id="4" name="TextBox 3"/>
-          <p:cNvSpPr txBox="1"/>
-          <p:nvPr/>
-        </p:nvSpPr>
-        <p:spPr>
-          <a:xfrm>
-            <a:off x="457200" y="914400"/>
-            <a:ext cx="11247120" cy="640080"/>
-          </a:xfrm>
-          <a:prstGeom prst="rect">
-            <a:avLst/>
-          </a:prstGeom>
-          <a:noFill/>
-        </p:spPr>
-        <p:txBody>
-          <a:bodyPr wrap="square" anchor="t">
-            <a:spAutoFit/>
-          </a:bodyPr>
-          <a:lstStyle/>
-          <a:p>
-            <a:pPr algn="l"/>
-            <a:r>
-              <a:rPr sz="1600" b="1">
-                <a:solidFill>
-                  <a:srgbClr val="1C3B2E"/>
-                </a:solidFill>
-                <a:latin typeface="Inter"/>
-              </a:rPr>
-              <a:t>From a fluent-but-cautious 3B adapter line to a continued-pretrained 2B base that reads and writes Tagalog and Cebuano: fluency is measured on held-out text, pedagogy on scripted tutoring probes.</a:t>
-            </a:r>
-          </a:p>
-        </p:txBody>
-      </p:sp>
-      <p:sp>
-        <p:nvSpPr>
-          <p:cNvPr id="5" name="Rectangle 4"/>
-          <p:cNvSpPr/>
-          <p:nvPr/>
-        </p:nvSpPr>
-        <p:spPr>
-          <a:xfrm>
-            <a:off x="457200" y="1554480"/>
-            <a:ext cx="11274552" cy="18000"/>
-          </a:xfrm>
-          <a:prstGeom prst="rect">
-            <a:avLst/>
-          </a:prstGeom>
-          <a:solidFill>
-            <a:srgbClr val="D8A03A"/>
-          </a:solidFill>
-          <a:ln>
-            <a:noFill/>
-          </a:ln>
-        </p:spPr>
-        <p:style>
-          <a:lnRef idx="1">
-            <a:schemeClr val="accent1"/>
-          </a:lnRef>
-          <a:fillRef idx="3">
-            <a:schemeClr val="accent1"/>
-          </a:fillRef>
-          <a:effectRef idx="2">
-            <a:schemeClr val="accent1"/>
-          </a:effectRef>
-          <a:fontRef idx="minor">
-            <a:schemeClr val="lt1"/>
-          </a:fontRef>
-        </p:style>
-        <p:txBody>
-          <a:bodyPr rtlCol="0" anchor="ctr"/>
-          <a:lstStyle/>
-          <a:p>
-            <a:pPr algn="ctr"/>
-          </a:p>
-        </p:txBody>
-      </p:sp>
-      <p:sp>
-        <p:nvSpPr>
-          <p:cNvPr id="6" name="TextBox 5"/>
-          <p:cNvSpPr txBox="1"/>
-          <p:nvPr/>
-        </p:nvSpPr>
-        <p:spPr>
-          <a:xfrm>
-            <a:off x="457200" y="6446520"/>
-            <a:ext cx="8229600" cy="274320"/>
-          </a:xfrm>
-          <a:prstGeom prst="rect">
-            <a:avLst/>
-          </a:prstGeom>
-          <a:noFill/>
-        </p:spPr>
-        <p:txBody>
-          <a:bodyPr wrap="square" anchor="t">
-            <a:spAutoFit/>
-          </a:bodyPr>
-          <a:lstStyle/>
-          <a:p>
-            <a:pPr algn="l"/>
-            <a:r>
-              <a:rPr sz="1100" b="0">
-                <a:solidFill>
-                  <a:srgbClr val="5B6B52"/>
-                </a:solidFill>
-                <a:latin typeface="Inter"/>
-              </a:rPr>
-              <a:t>Hiraia · progress update · early September 2026 · hiraia.org</a:t>
-            </a:r>
-          </a:p>
-        </p:txBody>
-      </p:sp>
-      <p:sp>
-        <p:nvSpPr>
-          <p:cNvPr id="7" name="TextBox 6"/>
-          <p:cNvSpPr txBox="1"/>
-          <p:nvPr/>
-        </p:nvSpPr>
-        <p:spPr>
-          <a:xfrm>
-            <a:off x="11247120" y="6446520"/>
-            <a:ext cx="548640" cy="274320"/>
-          </a:xfrm>
-          <a:prstGeom prst="rect">
-            <a:avLst/>
-          </a:prstGeom>
-          <a:noFill/>
-        </p:spPr>
-        <p:txBody>
-          <a:bodyPr wrap="square" anchor="t">
-            <a:spAutoFit/>
-          </a:bodyPr>
-          <a:lstStyle/>
-          <a:p>
-            <a:pPr algn="r"/>
-            <a:r>
-              <a:rPr sz="1100" b="0">
-                <a:solidFill>
-                  <a:srgbClr val="5B6B52"/>
-                </a:solidFill>
-                <a:latin typeface="Inter"/>
-              </a:rPr>
-              <a:t>4</a:t>
-            </a:r>
-          </a:p>
-        </p:txBody>
-      </p:sp>
-      <p:pic>
-        <p:nvPicPr>
-          <p:cNvPr id="8" name="Picture 7" descr="ppl.png"/>
-          <p:cNvPicPr>
-            <a:picLocks noChangeAspect="1"/>
-          </p:cNvPicPr>
-          <p:nvPr/>
-        </p:nvPicPr>
-        <p:blipFill>
-          <a:blip r:embed="rId3"/>
-          <a:stretch>
-            <a:fillRect/>
-          </a:stretch>
-        </p:blipFill>
-        <p:spPr>
-          <a:xfrm>
-            <a:off x="457200" y="1737360"/>
-            <a:ext cx="4846320" cy="3028950"/>
-          </a:xfrm>
-          <a:prstGeom prst="rect">
-            <a:avLst/>
-          </a:prstGeom>
-        </p:spPr>
-      </p:pic>
-      <p:sp>
-        <p:nvSpPr>
-          <p:cNvPr id="9" name="TextBox 8"/>
-          <p:cNvSpPr txBox="1"/>
-          <p:nvPr/>
-        </p:nvSpPr>
-        <p:spPr>
-          <a:xfrm>
-            <a:off x="457200" y="4892040"/>
-            <a:ext cx="5303520" cy="274320"/>
-          </a:xfrm>
-          <a:prstGeom prst="rect">
-            <a:avLst/>
-          </a:prstGeom>
-          <a:noFill/>
-        </p:spPr>
-        <p:txBody>
-          <a:bodyPr wrap="square" anchor="t">
-            <a:spAutoFit/>
-          </a:bodyPr>
-          <a:lstStyle/>
-          <a:p>
-            <a:pPr algn="l"/>
-            <a:r>
-              <a:rPr sz="950" b="0">
-                <a:solidFill>
-                  <a:srgbClr val="5B6B52"/>
-                </a:solidFill>
-                <a:latin typeface="Inter"/>
-              </a:rPr>
-              <a:t>Tiles: pedagogy figures are from the June 3B line; language accuracy and hedging from the August 2B (SFT v1). The 2B capability run is pending.</a:t>
-            </a:r>
-          </a:p>
-        </p:txBody>
-      </p:sp>
-      <p:sp>
-        <p:nvSpPr>
-          <p:cNvPr id="10" name="Rounded Rectangle 9"/>
-          <p:cNvSpPr/>
-          <p:nvPr/>
-        </p:nvSpPr>
-        <p:spPr>
-          <a:xfrm>
-            <a:off x="457200" y="5230368"/>
-            <a:ext cx="1645920" cy="1188720"/>
-          </a:xfrm>
-          <a:prstGeom prst="roundRect">
-            <a:avLst>
-              <a:gd name="adj" fmla="val 6000"/>
-            </a:avLst>
-          </a:prstGeom>
-          <a:solidFill>
-            <a:srgbClr val="F4EAD5"/>
-          </a:solidFill>
-          <a:ln w="12700">
-            <a:solidFill>
-              <a:srgbClr val="1C3B2E"/>
-            </a:solidFill>
-          </a:ln>
-        </p:spPr>
-        <p:style>
-          <a:lnRef idx="1">
-            <a:schemeClr val="accent1"/>
-          </a:lnRef>
-          <a:fillRef idx="3">
-            <a:schemeClr val="accent1"/>
-          </a:fillRef>
-          <a:effectRef idx="2">
-            <a:schemeClr val="accent1"/>
-          </a:effectRef>
-          <a:fontRef idx="minor">
-            <a:schemeClr val="lt1"/>
-          </a:fontRef>
-        </p:style>
-        <p:txBody>
-          <a:bodyPr rtlCol="0" anchor="ctr"/>
-          <a:lstStyle/>
-          <a:p>
-            <a:pPr algn="ctr"/>
-          </a:p>
-        </p:txBody>
-      </p:sp>
-      <p:sp>
-        <p:nvSpPr>
-          <p:cNvPr id="11" name="TextBox 10"/>
-          <p:cNvSpPr txBox="1"/>
-          <p:nvPr/>
-        </p:nvSpPr>
-        <p:spPr>
-          <a:xfrm>
-            <a:off x="457200" y="5266944"/>
-            <a:ext cx="1645920" cy="411480"/>
-          </a:xfrm>
-          <a:prstGeom prst="rect">
-            <a:avLst/>
-          </a:prstGeom>
-          <a:noFill/>
-        </p:spPr>
-        <p:txBody>
-          <a:bodyPr wrap="square" anchor="t">
-            <a:spAutoFit/>
-          </a:bodyPr>
-          <a:lstStyle/>
-          <a:p>
-            <a:pPr algn="ctr"/>
-            <a:r>
-              <a:rPr sz="1500" b="0">
-                <a:solidFill>
-                  <a:srgbClr val="1C3B2E"/>
-                </a:solidFill>
-                <a:latin typeface="Alfa Slab One"/>
-              </a:rPr>
-              <a:t>3.49 → 3.72</a:t>
-            </a:r>
-          </a:p>
-        </p:txBody>
-      </p:sp>
-      <p:sp>
-        <p:nvSpPr>
-          <p:cNvPr id="12" name="TextBox 11"/>
-          <p:cNvSpPr txBox="1"/>
-          <p:nvPr/>
-        </p:nvSpPr>
-        <p:spPr>
-          <a:xfrm>
-            <a:off x="512064" y="5650992"/>
-            <a:ext cx="1536192" cy="731520"/>
-          </a:xfrm>
-          <a:prstGeom prst="rect">
-            <a:avLst/>
-          </a:prstGeom>
-          <a:noFill/>
-        </p:spPr>
-        <p:txBody>
-          <a:bodyPr wrap="square" anchor="t">
-            <a:spAutoFit/>
-          </a:bodyPr>
-          <a:lstStyle/>
-          <a:p>
-            <a:pPr algn="ctr"/>
-            <a:r>
-              <a:rPr sz="850" b="0">
-                <a:solidFill>
-                  <a:srgbClr val="1C3B2E"/>
-                </a:solidFill>
-                <a:latin typeface="Inter"/>
-              </a:rPr>
-              <a:t>capability score (0–5), 102 probes — June 3B line, rebalance only</a:t>
-            </a:r>
-          </a:p>
-        </p:txBody>
-      </p:sp>
-      <p:sp>
-        <p:nvSpPr>
-          <p:cNvPr id="13" name="Rounded Rectangle 12"/>
-          <p:cNvSpPr/>
-          <p:nvPr/>
-        </p:nvSpPr>
-        <p:spPr>
-          <a:xfrm>
-            <a:off x="2212848" y="5230368"/>
-            <a:ext cx="1645920" cy="1188720"/>
-          </a:xfrm>
-          <a:prstGeom prst="roundRect">
-            <a:avLst>
-              <a:gd name="adj" fmla="val 6000"/>
-            </a:avLst>
-          </a:prstGeom>
-          <a:solidFill>
-            <a:srgbClr val="F4EAD5"/>
-          </a:solidFill>
-          <a:ln w="12700">
-            <a:solidFill>
-              <a:srgbClr val="1C3B2E"/>
-            </a:solidFill>
-          </a:ln>
-        </p:spPr>
-        <p:style>
-          <a:lnRef idx="1">
-            <a:schemeClr val="accent1"/>
-          </a:lnRef>
-          <a:fillRef idx="3">
-            <a:schemeClr val="accent1"/>
-          </a:fillRef>
-          <a:effectRef idx="2">
-            <a:schemeClr val="accent1"/>
-          </a:effectRef>
-          <a:fontRef idx="minor">
-            <a:schemeClr val="lt1"/>
-          </a:fontRef>
-        </p:style>
-        <p:txBody>
-          <a:bodyPr rtlCol="0" anchor="ctr"/>
-          <a:lstStyle/>
-          <a:p>
-            <a:pPr algn="ctr"/>
-          </a:p>
-        </p:txBody>
-      </p:sp>
-      <p:sp>
-        <p:nvSpPr>
-          <p:cNvPr id="14" name="TextBox 13"/>
-          <p:cNvSpPr txBox="1"/>
-          <p:nvPr/>
-        </p:nvSpPr>
-        <p:spPr>
-          <a:xfrm>
-            <a:off x="2212848" y="5266944"/>
-            <a:ext cx="1645920" cy="411480"/>
-          </a:xfrm>
-          <a:prstGeom prst="rect">
-            <a:avLst/>
-          </a:prstGeom>
-          <a:noFill/>
-        </p:spPr>
-        <p:txBody>
-          <a:bodyPr wrap="square" anchor="t">
-            <a:spAutoFit/>
-          </a:bodyPr>
-          <a:lstStyle/>
-          <a:p>
-            <a:pPr algn="ctr"/>
-            <a:r>
-              <a:rPr sz="1500" b="0">
-                <a:solidFill>
-                  <a:srgbClr val="1C3B2E"/>
-                </a:solidFill>
-                <a:latin typeface="Alfa Slab One"/>
-              </a:rPr>
-              <a:t>99 · 96 · 94%</a:t>
-            </a:r>
-          </a:p>
-        </p:txBody>
-      </p:sp>
-      <p:sp>
-        <p:nvSpPr>
-          <p:cNvPr id="15" name="TextBox 14"/>
-          <p:cNvSpPr txBox="1"/>
-          <p:nvPr/>
-        </p:nvSpPr>
-        <p:spPr>
-          <a:xfrm>
-            <a:off x="2267712" y="5650992"/>
-            <a:ext cx="1536192" cy="731520"/>
-          </a:xfrm>
-          <a:prstGeom prst="rect">
-            <a:avLst/>
-          </a:prstGeom>
-          <a:noFill/>
-        </p:spPr>
-        <p:txBody>
-          <a:bodyPr wrap="square" anchor="t">
-            <a:spAutoFit/>
-          </a:bodyPr>
-          <a:lstStyle/>
-          <a:p>
-            <a:pPr algn="ctr"/>
-            <a:r>
-              <a:rPr sz="850" b="0">
-                <a:solidFill>
-                  <a:srgbClr val="1C3B2E"/>
-                </a:solidFill>
-                <a:latin typeface="Inter"/>
-              </a:rPr>
-              <a:t>reply-language accuracy, SFT v1 2B (tl · ceb · en); Cebuano 99% corrected</a:t>
-            </a:r>
-          </a:p>
-        </p:txBody>
-      </p:sp>
-      <p:sp>
-        <p:nvSpPr>
-          <p:cNvPr id="16" name="Rounded Rectangle 15"/>
-          <p:cNvSpPr/>
-          <p:nvPr/>
-        </p:nvSpPr>
-        <p:spPr>
-          <a:xfrm>
-            <a:off x="3968496" y="5230368"/>
-            <a:ext cx="1645920" cy="1188720"/>
-          </a:xfrm>
-          <a:prstGeom prst="roundRect">
-            <a:avLst>
-              <a:gd name="adj" fmla="val 6000"/>
-            </a:avLst>
-          </a:prstGeom>
-          <a:solidFill>
-            <a:srgbClr val="F4EAD5"/>
-          </a:solidFill>
-          <a:ln w="12700">
-            <a:solidFill>
-              <a:srgbClr val="1C3B2E"/>
-            </a:solidFill>
-          </a:ln>
-        </p:spPr>
-        <p:style>
-          <a:lnRef idx="1">
-            <a:schemeClr val="accent1"/>
-          </a:lnRef>
-          <a:fillRef idx="3">
-            <a:schemeClr val="accent1"/>
-          </a:fillRef>
-          <a:effectRef idx="2">
-            <a:schemeClr val="accent1"/>
-          </a:effectRef>
-          <a:fontRef idx="minor">
-            <a:schemeClr val="lt1"/>
-          </a:fontRef>
-        </p:style>
-        <p:txBody>
-          <a:bodyPr rtlCol="0" anchor="ctr"/>
-          <a:lstStyle/>
-          <a:p>
-            <a:pPr algn="ctr"/>
-          </a:p>
-        </p:txBody>
-      </p:sp>
-      <p:sp>
-        <p:nvSpPr>
-          <p:cNvPr id="17" name="TextBox 16"/>
-          <p:cNvSpPr txBox="1"/>
-          <p:nvPr/>
-        </p:nvSpPr>
-        <p:spPr>
-          <a:xfrm>
-            <a:off x="3968496" y="5266944"/>
-            <a:ext cx="1645920" cy="411480"/>
-          </a:xfrm>
-          <a:prstGeom prst="rect">
-            <a:avLst/>
-          </a:prstGeom>
-          <a:noFill/>
-        </p:spPr>
-        <p:txBody>
-          <a:bodyPr wrap="square" anchor="t">
-            <a:spAutoFit/>
-          </a:bodyPr>
-          <a:lstStyle/>
-          <a:p>
-            <a:pPr algn="ctr"/>
-            <a:r>
-              <a:rPr sz="1500" b="0">
-                <a:solidFill>
-                  <a:srgbClr val="1C3B2E"/>
-                </a:solidFill>
-                <a:latin typeface="Alfa Slab One"/>
-              </a:rPr>
-              <a:t>64%</a:t>
-            </a:r>
-          </a:p>
-        </p:txBody>
-      </p:sp>
-      <p:sp>
-        <p:nvSpPr>
-          <p:cNvPr id="18" name="TextBox 17"/>
-          <p:cNvSpPr txBox="1"/>
-          <p:nvPr/>
-        </p:nvSpPr>
-        <p:spPr>
-          <a:xfrm>
-            <a:off x="4023359" y="5650992"/>
-            <a:ext cx="1536192" cy="731520"/>
-          </a:xfrm>
-          <a:prstGeom prst="rect">
-            <a:avLst/>
-          </a:prstGeom>
-          <a:noFill/>
-        </p:spPr>
-        <p:txBody>
-          <a:bodyPr wrap="square" anchor="t">
-            <a:spAutoFit/>
-          </a:bodyPr>
-          <a:lstStyle/>
-          <a:p>
-            <a:pPr algn="ctr"/>
-            <a:r>
-              <a:rPr sz="850" b="0">
-                <a:solidFill>
-                  <a:srgbClr val="1C3B2E"/>
-                </a:solidFill>
-                <a:latin typeface="Inter"/>
-              </a:rPr>
-              <a:t>of Tagalog replies open with a hedge; two-thirds still explain the term</a:t>
-            </a:r>
-          </a:p>
-        </p:txBody>
-      </p:sp>
-      <p:sp>
-        <p:nvSpPr>
-          <p:cNvPr id="19" name="TextBox 18"/>
-          <p:cNvSpPr txBox="1"/>
-          <p:nvPr/>
-        </p:nvSpPr>
-        <p:spPr>
-          <a:xfrm>
-            <a:off x="5852160" y="1737360"/>
-            <a:ext cx="5852160" cy="365760"/>
-          </a:xfrm>
-          <a:prstGeom prst="rect">
-            <a:avLst/>
-          </a:prstGeom>
-          <a:noFill/>
-        </p:spPr>
-        <p:txBody>
-          <a:bodyPr wrap="square" anchor="t">
-            <a:spAutoFit/>
-          </a:bodyPr>
-          <a:lstStyle/>
-          <a:p>
-            <a:pPr algn="l"/>
-            <a:r>
-              <a:rPr sz="1300" b="0">
-                <a:solidFill>
-                  <a:srgbClr val="20342C"/>
-                </a:solidFill>
-                <a:latin typeface="Alfa Slab One"/>
-              </a:rPr>
-              <a:t>Pedagogy (measured on scripted probes)</a:t>
-            </a:r>
-          </a:p>
-        </p:txBody>
-      </p:sp>
-      <p:sp>
-        <p:nvSpPr>
-          <p:cNvPr id="20" name="TextBox 19"/>
-          <p:cNvSpPr txBox="1"/>
-          <p:nvPr/>
-        </p:nvSpPr>
-        <p:spPr>
-          <a:xfrm>
-            <a:off x="5852160" y="2103120"/>
-            <a:ext cx="5852160" cy="1737360"/>
-          </a:xfrm>
-          <a:prstGeom prst="rect">
-            <a:avLst/>
-          </a:prstGeom>
-          <a:noFill/>
-        </p:spPr>
-        <p:txBody>
-          <a:bodyPr wrap="square" anchor="t">
-            <a:spAutoFit/>
-          </a:bodyPr>
-          <a:lstStyle/>
-          <a:p>
-            <a:pPr algn="l"/>
-            <a:r>
-              <a:rPr sz="1250" b="0">
-                <a:solidFill>
-                  <a:srgbClr val="1C3B2E"/>
-                </a:solidFill>
-                <a:latin typeface="Inter"/>
-              </a:rPr>
-              <a:t>Scripted probes (102 in June, 143 now; 11 tiers, LLM-judged 0–5) showed the June model fluent but over-cautious: 19 of 91 answerable questions were refused. A retrieval fix plus a small data rebalance (+82 rows) lifted the score 3.32 → 3.72 (rebalance alone +0.22), and grounding faithfulness was fixed — the tutor defers to retrieved verified facts and abstains when none apply. The 2B line inherits the same harness; its capability run is the next measurement.</a:t>
-            </a:r>
-          </a:p>
-        </p:txBody>
-      </p:sp>
-      <p:sp>
-        <p:nvSpPr>
-          <p:cNvPr id="21" name="TextBox 20"/>
-          <p:cNvSpPr txBox="1"/>
-          <p:nvPr/>
-        </p:nvSpPr>
-        <p:spPr>
-          <a:xfrm>
-            <a:off x="5852160" y="3886200"/>
-            <a:ext cx="5852160" cy="365760"/>
-          </a:xfrm>
-          <a:prstGeom prst="rect">
-            <a:avLst/>
-          </a:prstGeom>
-          <a:noFill/>
-        </p:spPr>
-        <p:txBody>
-          <a:bodyPr wrap="square" anchor="t">
-            <a:spAutoFit/>
-          </a:bodyPr>
-          <a:lstStyle/>
-          <a:p>
-            <a:pPr algn="l"/>
-            <a:r>
-              <a:rPr sz="1300" b="0">
-                <a:solidFill>
-                  <a:srgbClr val="20342C"/>
-                </a:solidFill>
-                <a:latin typeface="Alfa Slab One"/>
-              </a:rPr>
-              <a:t>Known weaknesses (measured)</a:t>
-            </a:r>
-          </a:p>
-        </p:txBody>
-      </p:sp>
-      <p:sp>
-        <p:nvSpPr>
-          <p:cNvPr id="22" name="TextBox 21"/>
-          <p:cNvSpPr txBox="1"/>
-          <p:nvPr/>
-        </p:nvSpPr>
-        <p:spPr>
-          <a:xfrm>
-            <a:off x="5852160" y="4251960"/>
-            <a:ext cx="5852160" cy="2011680"/>
-          </a:xfrm>
-          <a:prstGeom prst="rect">
-            <a:avLst/>
-          </a:prstGeom>
-          <a:noFill/>
-        </p:spPr>
-        <p:txBody>
-          <a:bodyPr wrap="square">
-            <a:spAutoFit/>
-          </a:bodyPr>
-          <a:lstStyle/>
-          <a:p>
-            <a:pPr>
-              <a:spcAft>
-                <a:spcPts val="500"/>
-              </a:spcAft>
-            </a:pPr>
-            <a:r>
-              <a:rPr sz="1150">
-                <a:solidFill>
-                  <a:srgbClr val="1C3B2E"/>
-                </a:solidFill>
-                <a:latin typeface="Inter"/>
-              </a:rPr>
-              <a:t>•  Hedging: the SFT v1 2B prefixes 64% of Tagalog replies with a 'not sure' clause on grade-5 terms; about two-thirds of those then explain the term — a template-wording effect, not a knowledge gap</a:t>
-            </a:r>
-          </a:p>
-          <a:p>
-            <a:pPr>
-              <a:spcAft>
-                <a:spcPts val="500"/>
-              </a:spcAft>
-            </a:pPr>
-            <a:r>
-              <a:rPr sz="1150">
-                <a:solidFill>
-                  <a:srgbClr val="1C3B2E"/>
-                </a:solidFill>
-                <a:latin typeface="Inter"/>
-              </a:rPr>
-              <a:t>•  English mode-lock is the 2B's fragile edge (94% vs 99% in Tagalog and Cebuano); misroutes fall to Tagalog</a:t>
-            </a:r>
-          </a:p>
-          <a:p>
-            <a:pPr>
-              <a:spcAft>
-                <a:spcPts val="500"/>
-              </a:spcAft>
-            </a:pPr>
-            <a:r>
-              <a:rPr sz="1150">
-                <a:solidFill>
-                  <a:srgbClr val="1C3B2E"/>
-                </a:solidFill>
-                <a:latin typeface="Inter"/>
-              </a:rPr>
-              <a:t>•  The 1B budget tier cannot learn safety negation (DPO tested and rejected); junior-high content is thinner than elementary</a:t>
-            </a:r>
-          </a:p>
-        </p:txBody>
-      </p:sp>
-    </p:spTree>
-  </p:cSld>
-  <p:clrMapOvr>
-    <a:masterClrMapping/>
-  </p:clrMapOvr>
-</p:sld>
-</file>
-
 <file path=ppt/slides/slide5.xml><?xml version="1.0" encoding="utf-8"?>
 <p:sld xmlns:a="http://schemas.openxmlformats.org/drawingml/2006/main" xmlns:p="http://schemas.openxmlformats.org/presentationml/2006/main" xmlns:r="http://schemas.openxmlformats.org/officeDocument/2006/relationships">
   <p:cSld>
@@ -7968,7 +7829,7 @@
                 </a:solidFill>
                 <a:latin typeface="Alfa Slab One"/>
               </a:rPr>
-              <a:t>Next 2–3 weeks</a:t>
+              <a:t>Model progress: fluency and pedagogy</a:t>
             </a:r>
           </a:p>
         </p:txBody>
@@ -8003,7 +7864,7 @@
                 </a:solidFill>
                 <a:latin typeface="Inter"/>
               </a:rPr>
-              <a:t>Consolidate the model, then prove it on the device.</a:t>
+              <a:t>From a fluent-but-cautious 3B adapter line to a continued-pretrained 2B base that reads and writes Tagalog and Cebuano: fluency is measured on held-out text, pedagogy on scripted tutoring probes.</a:t>
             </a:r>
           </a:p>
         </p:txBody>
@@ -8121,16 +7982,531 @@
           </a:p>
         </p:txBody>
       </p:sp>
-      <p:sp>
-        <p:nvSpPr>
-          <p:cNvPr id="8" name="TextBox 7"/>
+      <p:pic>
+        <p:nvPicPr>
+          <p:cNvPr id="8" name="Picture 7" descr="ppl.png"/>
+          <p:cNvPicPr>
+            <a:picLocks noChangeAspect="1"/>
+          </p:cNvPicPr>
+          <p:nvPr/>
+        </p:nvPicPr>
+        <p:blipFill>
+          <a:blip r:embed="rId3"/>
+          <a:stretch>
+            <a:fillRect/>
+          </a:stretch>
+        </p:blipFill>
+        <p:spPr>
+          <a:xfrm>
+            <a:off x="457200" y="1737360"/>
+            <a:ext cx="4846320" cy="3028950"/>
+          </a:xfrm>
+          <a:prstGeom prst="rect">
+            <a:avLst/>
+          </a:prstGeom>
+        </p:spPr>
+      </p:pic>
+      <p:sp>
+        <p:nvSpPr>
+          <p:cNvPr id="9" name="TextBox 8"/>
           <p:cNvSpPr txBox="1"/>
           <p:nvPr/>
         </p:nvSpPr>
         <p:spPr>
           <a:xfrm>
-            <a:off x="457200" y="1783080"/>
-            <a:ext cx="5760720" cy="4572000"/>
+            <a:off x="457200" y="4892040"/>
+            <a:ext cx="5303520" cy="274320"/>
+          </a:xfrm>
+          <a:prstGeom prst="rect">
+            <a:avLst/>
+          </a:prstGeom>
+          <a:noFill/>
+        </p:spPr>
+        <p:txBody>
+          <a:bodyPr wrap="square" anchor="t">
+            <a:spAutoFit/>
+          </a:bodyPr>
+          <a:lstStyle/>
+          <a:p>
+            <a:pPr algn="l"/>
+            <a:r>
+              <a:rPr sz="950" b="0">
+                <a:solidFill>
+                  <a:srgbClr val="5B6B52"/>
+                </a:solidFill>
+                <a:latin typeface="Inter"/>
+              </a:rPr>
+              <a:t>Tiles: pedagogy figures are from the June 3B line; language accuracy and hedging from the August 2B (SFT v1). The 2B capability run is pending.</a:t>
+            </a:r>
+          </a:p>
+        </p:txBody>
+      </p:sp>
+      <p:sp>
+        <p:nvSpPr>
+          <p:cNvPr id="10" name="Rounded Rectangle 9"/>
+          <p:cNvSpPr/>
+          <p:nvPr/>
+        </p:nvSpPr>
+        <p:spPr>
+          <a:xfrm>
+            <a:off x="457200" y="5230368"/>
+            <a:ext cx="1645920" cy="1188720"/>
+          </a:xfrm>
+          <a:prstGeom prst="roundRect">
+            <a:avLst>
+              <a:gd name="adj" fmla="val 6000"/>
+            </a:avLst>
+          </a:prstGeom>
+          <a:solidFill>
+            <a:srgbClr val="F4EAD5"/>
+          </a:solidFill>
+          <a:ln w="12700">
+            <a:solidFill>
+              <a:srgbClr val="1C3B2E"/>
+            </a:solidFill>
+          </a:ln>
+        </p:spPr>
+        <p:style>
+          <a:lnRef idx="1">
+            <a:schemeClr val="accent1"/>
+          </a:lnRef>
+          <a:fillRef idx="3">
+            <a:schemeClr val="accent1"/>
+          </a:fillRef>
+          <a:effectRef idx="2">
+            <a:schemeClr val="accent1"/>
+          </a:effectRef>
+          <a:fontRef idx="minor">
+            <a:schemeClr val="lt1"/>
+          </a:fontRef>
+        </p:style>
+        <p:txBody>
+          <a:bodyPr rtlCol="0" anchor="ctr"/>
+          <a:lstStyle/>
+          <a:p>
+            <a:pPr algn="ctr"/>
+          </a:p>
+        </p:txBody>
+      </p:sp>
+      <p:sp>
+        <p:nvSpPr>
+          <p:cNvPr id="11" name="TextBox 10"/>
+          <p:cNvSpPr txBox="1"/>
+          <p:nvPr/>
+        </p:nvSpPr>
+        <p:spPr>
+          <a:xfrm>
+            <a:off x="457200" y="5266944"/>
+            <a:ext cx="1645920" cy="411480"/>
+          </a:xfrm>
+          <a:prstGeom prst="rect">
+            <a:avLst/>
+          </a:prstGeom>
+          <a:noFill/>
+        </p:spPr>
+        <p:txBody>
+          <a:bodyPr wrap="square" anchor="t">
+            <a:spAutoFit/>
+          </a:bodyPr>
+          <a:lstStyle/>
+          <a:p>
+            <a:pPr algn="ctr"/>
+            <a:r>
+              <a:rPr sz="1500" b="0">
+                <a:solidFill>
+                  <a:srgbClr val="1C3B2E"/>
+                </a:solidFill>
+                <a:latin typeface="Alfa Slab One"/>
+              </a:rPr>
+              <a:t>3.49 → 3.72</a:t>
+            </a:r>
+          </a:p>
+        </p:txBody>
+      </p:sp>
+      <p:sp>
+        <p:nvSpPr>
+          <p:cNvPr id="12" name="TextBox 11"/>
+          <p:cNvSpPr txBox="1"/>
+          <p:nvPr/>
+        </p:nvSpPr>
+        <p:spPr>
+          <a:xfrm>
+            <a:off x="512064" y="5650992"/>
+            <a:ext cx="1536192" cy="731520"/>
+          </a:xfrm>
+          <a:prstGeom prst="rect">
+            <a:avLst/>
+          </a:prstGeom>
+          <a:noFill/>
+        </p:spPr>
+        <p:txBody>
+          <a:bodyPr wrap="square" anchor="t">
+            <a:spAutoFit/>
+          </a:bodyPr>
+          <a:lstStyle/>
+          <a:p>
+            <a:pPr algn="ctr"/>
+            <a:r>
+              <a:rPr sz="850" b="0">
+                <a:solidFill>
+                  <a:srgbClr val="1C3B2E"/>
+                </a:solidFill>
+                <a:latin typeface="Inter"/>
+              </a:rPr>
+              <a:t>capability score (0–5), 102 probes — June 3B line, rebalance only</a:t>
+            </a:r>
+          </a:p>
+        </p:txBody>
+      </p:sp>
+      <p:sp>
+        <p:nvSpPr>
+          <p:cNvPr id="13" name="Rounded Rectangle 12"/>
+          <p:cNvSpPr/>
+          <p:nvPr/>
+        </p:nvSpPr>
+        <p:spPr>
+          <a:xfrm>
+            <a:off x="2212848" y="5230368"/>
+            <a:ext cx="1645920" cy="1188720"/>
+          </a:xfrm>
+          <a:prstGeom prst="roundRect">
+            <a:avLst>
+              <a:gd name="adj" fmla="val 6000"/>
+            </a:avLst>
+          </a:prstGeom>
+          <a:solidFill>
+            <a:srgbClr val="F4EAD5"/>
+          </a:solidFill>
+          <a:ln w="12700">
+            <a:solidFill>
+              <a:srgbClr val="1C3B2E"/>
+            </a:solidFill>
+          </a:ln>
+        </p:spPr>
+        <p:style>
+          <a:lnRef idx="1">
+            <a:schemeClr val="accent1"/>
+          </a:lnRef>
+          <a:fillRef idx="3">
+            <a:schemeClr val="accent1"/>
+          </a:fillRef>
+          <a:effectRef idx="2">
+            <a:schemeClr val="accent1"/>
+          </a:effectRef>
+          <a:fontRef idx="minor">
+            <a:schemeClr val="lt1"/>
+          </a:fontRef>
+        </p:style>
+        <p:txBody>
+          <a:bodyPr rtlCol="0" anchor="ctr"/>
+          <a:lstStyle/>
+          <a:p>
+            <a:pPr algn="ctr"/>
+          </a:p>
+        </p:txBody>
+      </p:sp>
+      <p:sp>
+        <p:nvSpPr>
+          <p:cNvPr id="14" name="TextBox 13"/>
+          <p:cNvSpPr txBox="1"/>
+          <p:nvPr/>
+        </p:nvSpPr>
+        <p:spPr>
+          <a:xfrm>
+            <a:off x="2212848" y="5266944"/>
+            <a:ext cx="1645920" cy="411480"/>
+          </a:xfrm>
+          <a:prstGeom prst="rect">
+            <a:avLst/>
+          </a:prstGeom>
+          <a:noFill/>
+        </p:spPr>
+        <p:txBody>
+          <a:bodyPr wrap="square" anchor="t">
+            <a:spAutoFit/>
+          </a:bodyPr>
+          <a:lstStyle/>
+          <a:p>
+            <a:pPr algn="ctr"/>
+            <a:r>
+              <a:rPr sz="1500" b="0">
+                <a:solidFill>
+                  <a:srgbClr val="1C3B2E"/>
+                </a:solidFill>
+                <a:latin typeface="Alfa Slab One"/>
+              </a:rPr>
+              <a:t>99 · 96 · 94%</a:t>
+            </a:r>
+          </a:p>
+        </p:txBody>
+      </p:sp>
+      <p:sp>
+        <p:nvSpPr>
+          <p:cNvPr id="15" name="TextBox 14"/>
+          <p:cNvSpPr txBox="1"/>
+          <p:nvPr/>
+        </p:nvSpPr>
+        <p:spPr>
+          <a:xfrm>
+            <a:off x="2267712" y="5650992"/>
+            <a:ext cx="1536192" cy="731520"/>
+          </a:xfrm>
+          <a:prstGeom prst="rect">
+            <a:avLst/>
+          </a:prstGeom>
+          <a:noFill/>
+        </p:spPr>
+        <p:txBody>
+          <a:bodyPr wrap="square" anchor="t">
+            <a:spAutoFit/>
+          </a:bodyPr>
+          <a:lstStyle/>
+          <a:p>
+            <a:pPr algn="ctr"/>
+            <a:r>
+              <a:rPr sz="850" b="0">
+                <a:solidFill>
+                  <a:srgbClr val="1C3B2E"/>
+                </a:solidFill>
+                <a:latin typeface="Inter"/>
+              </a:rPr>
+              <a:t>reply-language accuracy, SFT v1 2B (tl · ceb · en); Cebuano 99% corrected</a:t>
+            </a:r>
+          </a:p>
+        </p:txBody>
+      </p:sp>
+      <p:sp>
+        <p:nvSpPr>
+          <p:cNvPr id="16" name="Rounded Rectangle 15"/>
+          <p:cNvSpPr/>
+          <p:nvPr/>
+        </p:nvSpPr>
+        <p:spPr>
+          <a:xfrm>
+            <a:off x="3968496" y="5230368"/>
+            <a:ext cx="1645920" cy="1188720"/>
+          </a:xfrm>
+          <a:prstGeom prst="roundRect">
+            <a:avLst>
+              <a:gd name="adj" fmla="val 6000"/>
+            </a:avLst>
+          </a:prstGeom>
+          <a:solidFill>
+            <a:srgbClr val="F4EAD5"/>
+          </a:solidFill>
+          <a:ln w="12700">
+            <a:solidFill>
+              <a:srgbClr val="1C3B2E"/>
+            </a:solidFill>
+          </a:ln>
+        </p:spPr>
+        <p:style>
+          <a:lnRef idx="1">
+            <a:schemeClr val="accent1"/>
+          </a:lnRef>
+          <a:fillRef idx="3">
+            <a:schemeClr val="accent1"/>
+          </a:fillRef>
+          <a:effectRef idx="2">
+            <a:schemeClr val="accent1"/>
+          </a:effectRef>
+          <a:fontRef idx="minor">
+            <a:schemeClr val="lt1"/>
+          </a:fontRef>
+        </p:style>
+        <p:txBody>
+          <a:bodyPr rtlCol="0" anchor="ctr"/>
+          <a:lstStyle/>
+          <a:p>
+            <a:pPr algn="ctr"/>
+          </a:p>
+        </p:txBody>
+      </p:sp>
+      <p:sp>
+        <p:nvSpPr>
+          <p:cNvPr id="17" name="TextBox 16"/>
+          <p:cNvSpPr txBox="1"/>
+          <p:nvPr/>
+        </p:nvSpPr>
+        <p:spPr>
+          <a:xfrm>
+            <a:off x="3968496" y="5266944"/>
+            <a:ext cx="1645920" cy="411480"/>
+          </a:xfrm>
+          <a:prstGeom prst="rect">
+            <a:avLst/>
+          </a:prstGeom>
+          <a:noFill/>
+        </p:spPr>
+        <p:txBody>
+          <a:bodyPr wrap="square" anchor="t">
+            <a:spAutoFit/>
+          </a:bodyPr>
+          <a:lstStyle/>
+          <a:p>
+            <a:pPr algn="ctr"/>
+            <a:r>
+              <a:rPr sz="1500" b="0">
+                <a:solidFill>
+                  <a:srgbClr val="1C3B2E"/>
+                </a:solidFill>
+                <a:latin typeface="Alfa Slab One"/>
+              </a:rPr>
+              <a:t>64%</a:t>
+            </a:r>
+          </a:p>
+        </p:txBody>
+      </p:sp>
+      <p:sp>
+        <p:nvSpPr>
+          <p:cNvPr id="18" name="TextBox 17"/>
+          <p:cNvSpPr txBox="1"/>
+          <p:nvPr/>
+        </p:nvSpPr>
+        <p:spPr>
+          <a:xfrm>
+            <a:off x="4023359" y="5650992"/>
+            <a:ext cx="1536192" cy="731520"/>
+          </a:xfrm>
+          <a:prstGeom prst="rect">
+            <a:avLst/>
+          </a:prstGeom>
+          <a:noFill/>
+        </p:spPr>
+        <p:txBody>
+          <a:bodyPr wrap="square" anchor="t">
+            <a:spAutoFit/>
+          </a:bodyPr>
+          <a:lstStyle/>
+          <a:p>
+            <a:pPr algn="ctr"/>
+            <a:r>
+              <a:rPr sz="850" b="0">
+                <a:solidFill>
+                  <a:srgbClr val="1C3B2E"/>
+                </a:solidFill>
+                <a:latin typeface="Inter"/>
+              </a:rPr>
+              <a:t>of Tagalog replies open with a hedge; two-thirds still explain the term</a:t>
+            </a:r>
+          </a:p>
+        </p:txBody>
+      </p:sp>
+      <p:sp>
+        <p:nvSpPr>
+          <p:cNvPr id="19" name="TextBox 18"/>
+          <p:cNvSpPr txBox="1"/>
+          <p:nvPr/>
+        </p:nvSpPr>
+        <p:spPr>
+          <a:xfrm>
+            <a:off x="5852160" y="1737360"/>
+            <a:ext cx="5852160" cy="365760"/>
+          </a:xfrm>
+          <a:prstGeom prst="rect">
+            <a:avLst/>
+          </a:prstGeom>
+          <a:noFill/>
+        </p:spPr>
+        <p:txBody>
+          <a:bodyPr wrap="square" anchor="t">
+            <a:spAutoFit/>
+          </a:bodyPr>
+          <a:lstStyle/>
+          <a:p>
+            <a:pPr algn="l"/>
+            <a:r>
+              <a:rPr sz="1300" b="0">
+                <a:solidFill>
+                  <a:srgbClr val="20342C"/>
+                </a:solidFill>
+                <a:latin typeface="Alfa Slab One"/>
+              </a:rPr>
+              <a:t>Pedagogy (measured on scripted probes)</a:t>
+            </a:r>
+          </a:p>
+        </p:txBody>
+      </p:sp>
+      <p:sp>
+        <p:nvSpPr>
+          <p:cNvPr id="20" name="TextBox 19"/>
+          <p:cNvSpPr txBox="1"/>
+          <p:nvPr/>
+        </p:nvSpPr>
+        <p:spPr>
+          <a:xfrm>
+            <a:off x="5852160" y="2103120"/>
+            <a:ext cx="5852160" cy="1737360"/>
+          </a:xfrm>
+          <a:prstGeom prst="rect">
+            <a:avLst/>
+          </a:prstGeom>
+          <a:noFill/>
+        </p:spPr>
+        <p:txBody>
+          <a:bodyPr wrap="square" anchor="t">
+            <a:spAutoFit/>
+          </a:bodyPr>
+          <a:lstStyle/>
+          <a:p>
+            <a:pPr algn="l"/>
+            <a:r>
+              <a:rPr sz="1250" b="0">
+                <a:solidFill>
+                  <a:srgbClr val="1C3B2E"/>
+                </a:solidFill>
+                <a:latin typeface="Inter"/>
+              </a:rPr>
+              <a:t>Scripted probes (102 in June, 143 now; 11 tiers, LLM-judged 0–5) showed the June model fluent but over-cautious: 19 of 91 answerable questions were refused. A retrieval fix plus a small data rebalance (+82 rows) lifted the score 3.32 → 3.72 (rebalance alone +0.22), and grounding faithfulness was fixed — the tutor defers to retrieved verified facts and abstains when none apply. The 2B line inherits the same harness; its capability run is the next measurement.</a:t>
+            </a:r>
+          </a:p>
+        </p:txBody>
+      </p:sp>
+      <p:sp>
+        <p:nvSpPr>
+          <p:cNvPr id="21" name="TextBox 20"/>
+          <p:cNvSpPr txBox="1"/>
+          <p:nvPr/>
+        </p:nvSpPr>
+        <p:spPr>
+          <a:xfrm>
+            <a:off x="5852160" y="3886200"/>
+            <a:ext cx="5852160" cy="365760"/>
+          </a:xfrm>
+          <a:prstGeom prst="rect">
+            <a:avLst/>
+          </a:prstGeom>
+          <a:noFill/>
+        </p:spPr>
+        <p:txBody>
+          <a:bodyPr wrap="square" anchor="t">
+            <a:spAutoFit/>
+          </a:bodyPr>
+          <a:lstStyle/>
+          <a:p>
+            <a:pPr algn="l"/>
+            <a:r>
+              <a:rPr sz="1300" b="0">
+                <a:solidFill>
+                  <a:srgbClr val="20342C"/>
+                </a:solidFill>
+                <a:latin typeface="Alfa Slab One"/>
+              </a:rPr>
+              <a:t>Known weaknesses (measured)</a:t>
+            </a:r>
+          </a:p>
+        </p:txBody>
+      </p:sp>
+      <p:sp>
+        <p:nvSpPr>
+          <p:cNvPr id="22" name="TextBox 21"/>
+          <p:cNvSpPr txBox="1"/>
+          <p:nvPr/>
+        </p:nvSpPr>
+        <p:spPr>
+          <a:xfrm>
+            <a:off x="5852160" y="4251960"/>
+            <a:ext cx="5852160" cy="2011680"/>
           </a:xfrm>
           <a:prstGeom prst="rect">
             <a:avLst/>
@@ -8149,13 +8525,13 @@
               </a:spcAft>
             </a:pPr>
             <a:r>
-              <a:rPr sz="1400">
+              <a:rPr sz="1150">
                 <a:solidFill>
                   <a:srgbClr val="1C3B2E"/>
                 </a:solidFill>
                 <a:latin typeface="Inter"/>
               </a:rPr>
-              <a:t>•  More SFT and knowledge distillation on the CPT base (mode-locked buckets, teacher-generated tutoring turns)</a:t>
+              <a:t>•  Hedging: the SFT v1 2B prefixes 64% of Tagalog replies with a 'not sure' clause on grade-5 terms; about two-thirds of those then explain the term — a template-wording effect, not a knowledge gap</a:t>
             </a:r>
           </a:p>
           <a:p>
@@ -8165,13 +8541,13 @@
               </a:spcAft>
             </a:pPr>
             <a:r>
-              <a:rPr sz="1400">
+              <a:rPr sz="1150">
                 <a:solidFill>
                   <a:srgbClr val="1C3B2E"/>
                 </a:solidFill>
                 <a:latin typeface="Inter"/>
               </a:rPr>
-              <a:t>•  Extensive synthetic testing on-device: scripted student sessions on the Redmi, TTFT and per-page latency budgets</a:t>
+              <a:t>•  English mode-lock is the 2B's fragile edge (94% vs 99% in Tagalog and Cebuano); misroutes fall to Tagalog</a:t>
             </a:r>
           </a:p>
           <a:p>
@@ -8181,183 +8557,13 @@
               </a:spcAft>
             </a:pPr>
             <a:r>
-              <a:rPr sz="1400">
+              <a:rPr sz="1150">
                 <a:solidFill>
                   <a:srgbClr val="1C3B2E"/>
                 </a:solidFill>
                 <a:latin typeface="Inter"/>
               </a:rPr>
-              <a:t>•  Model-as-judge quality control on every generated fact, quiz and translation (decorrelated judge, AUP-safe routing)</a:t>
-            </a:r>
-          </a:p>
-          <a:p>
-            <a:pPr>
-              <a:spcAft>
-                <a:spcPts val="500"/>
-              </a:spcAft>
-            </a:pPr>
-            <a:r>
-              <a:rPr sz="1400">
-                <a:solidFill>
-                  <a:srgbClr val="1C3B2E"/>
-                </a:solidFill>
-                <a:latin typeface="Inter"/>
-              </a:rPr>
-              <a:t>•  APK-level optimisations: bundle size (engravings subset, indexed PNG), cold start, SQLite migrations, edge-walk cost</a:t>
-            </a:r>
-          </a:p>
-        </p:txBody>
-      </p:sp>
-      <p:sp>
-        <p:nvSpPr>
-          <p:cNvPr id="9" name="TextBox 8"/>
-          <p:cNvSpPr txBox="1"/>
-          <p:nvPr/>
-        </p:nvSpPr>
-        <p:spPr>
-          <a:xfrm>
-            <a:off x="6309360" y="1783080"/>
-            <a:ext cx="5486400" cy="4572000"/>
-          </a:xfrm>
-          <a:prstGeom prst="rect">
-            <a:avLst/>
-          </a:prstGeom>
-          <a:noFill/>
-        </p:spPr>
-        <p:txBody>
-          <a:bodyPr wrap="square">
-            <a:spAutoFit/>
-          </a:bodyPr>
-          <a:lstStyle/>
-          <a:p>
-            <a:pPr>
-              <a:spcAft>
-                <a:spcPts val="500"/>
-              </a:spcAft>
-            </a:pPr>
-            <a:r>
-              <a:rPr sz="1400">
-                <a:solidFill>
-                  <a:srgbClr val="1C3B2E"/>
-                </a:solidFill>
-                <a:latin typeface="Inter"/>
-              </a:rPr>
-              <a:t>•  Native-speaker review of the Tagalog and Cebuano copy (onboarding, settings, hedging clause)</a:t>
-            </a:r>
-          </a:p>
-          <a:p>
-            <a:pPr>
-              <a:spcAft>
-                <a:spcPts val="500"/>
-              </a:spcAft>
-            </a:pPr>
-            <a:r>
-              <a:rPr sz="1400">
-                <a:solidFill>
-                  <a:srgbClr val="1C3B2E"/>
-                </a:solidFill>
-                <a:latin typeface="Inter"/>
-              </a:rPr>
-              <a:t>•  Junior-high gap fill: Lane B facts for the 16 remaining thin competencies; module-card supply</a:t>
-            </a:r>
-          </a:p>
-          <a:p>
-            <a:pPr>
-              <a:spcAft>
-                <a:spcPts val="500"/>
-              </a:spcAft>
-            </a:pPr>
-            <a:r>
-              <a:rPr sz="1400">
-                <a:solidFill>
-                  <a:srgbClr val="1C3B2E"/>
-                </a:solidFill>
-                <a:latin typeface="Inter"/>
-              </a:rPr>
-              <a:t>•  Finish the quiz lane (10.7k pool cards still without a question) and per-competency Miss-Card labels</a:t>
-            </a:r>
-          </a:p>
-          <a:p>
-            <a:pPr>
-              <a:spcAft>
-                <a:spcPts val="500"/>
-              </a:spcAft>
-            </a:pPr>
-            <a:r>
-              <a:rPr sz="1400">
-                <a:solidFill>
-                  <a:srgbClr val="1C3B2E"/>
-                </a:solidFill>
-                <a:latin typeface="Inter"/>
-              </a:rPr>
-              <a:t>•  Over-the-air fact-bank updates so content ships without an APK</a:t>
-            </a:r>
-          </a:p>
-          <a:p>
-            <a:pPr>
-              <a:spcAft>
-                <a:spcPts val="500"/>
-              </a:spcAft>
-            </a:pPr>
-            <a:r>
-              <a:rPr sz="1400">
-                <a:solidFill>
-                  <a:srgbClr val="1C3B2E"/>
-                </a:solidFill>
-                <a:latin typeface="Inter"/>
-              </a:rPr>
-              <a:t>•  Retrieval-QA cases per new competency before each gate run</a:t>
-            </a:r>
-          </a:p>
-          <a:p>
-            <a:pPr>
-              <a:spcAft>
-                <a:spcPts val="500"/>
-              </a:spcAft>
-            </a:pPr>
-            <a:r>
-              <a:rPr sz="1400">
-                <a:solidFill>
-                  <a:srgbClr val="1C3B2E"/>
-                </a:solidFill>
-                <a:latin typeface="Inter"/>
-              </a:rPr>
-              <a:t>•  Draft a classroom-pilot protocol (consent, offline logging, pre/post measures) to propose to DepEd schools</a:t>
-            </a:r>
-          </a:p>
-        </p:txBody>
-      </p:sp>
-      <p:sp>
-        <p:nvSpPr>
-          <p:cNvPr id="10" name="TextBox 9"/>
-          <p:cNvSpPr txBox="1"/>
-          <p:nvPr/>
-        </p:nvSpPr>
-        <p:spPr>
-          <a:xfrm>
-            <a:off x="457200" y="5577840"/>
-            <a:ext cx="11247120" cy="365760"/>
-          </a:xfrm>
-          <a:prstGeom prst="rect">
-            <a:avLst/>
-          </a:prstGeom>
-          <a:noFill/>
-        </p:spPr>
-        <p:txBody>
-          <a:bodyPr wrap="square" anchor="t">
-            <a:spAutoFit/>
-          </a:bodyPr>
-          <a:lstStyle/>
-          <a:p>
-            <a:pPr algn="l"/>
-            <a:r>
-              <a:rPr sz="1300" b="1">
-                <a:solidFill>
-                  <a:srgbClr val="20342C"/>
-                </a:solidFill>
-                <a:latin typeface="Inter"/>
-              </a:rPr>
-              <a:t>To report next time: the 2B capability run on the same 143 probes; on-device TTFT and per-page latency on the Redmi; quiz coverage after the lane completes; bundle size after optimisation.</a:t>
+              <a:t>•  The 1B budget tier cannot learn safety negation (DPO tested and rejected); junior-high content is thinner than elementary</a:t>
             </a:r>
           </a:p>
         </p:txBody>
@@ -8442,7 +8648,7 @@
                 </a:solidFill>
                 <a:latin typeface="Alfa Slab One"/>
               </a:rPr>
-              <a:t>Links</a:t>
+              <a:t>Next 2–3 weeks</a:t>
             </a:r>
           </a:p>
         </p:txBody>
@@ -8477,7 +8683,7 @@
                 </a:solidFill>
                 <a:latin typeface="Inter"/>
               </a:rPr>
-              <a:t>Code, build and evaluation records are public; model weights follow once the release checklist is done.</a:t>
+              <a:t>Consolidate the model, then prove it on the device.</a:t>
             </a:r>
           </a:p>
         </p:txBody>
@@ -8591,6 +8797,480 @@
                 <a:latin typeface="Inter"/>
               </a:rPr>
               <a:t>6</a:t>
+            </a:r>
+          </a:p>
+        </p:txBody>
+      </p:sp>
+      <p:sp>
+        <p:nvSpPr>
+          <p:cNvPr id="8" name="TextBox 7"/>
+          <p:cNvSpPr txBox="1"/>
+          <p:nvPr/>
+        </p:nvSpPr>
+        <p:spPr>
+          <a:xfrm>
+            <a:off x="457200" y="1783080"/>
+            <a:ext cx="5760720" cy="4572000"/>
+          </a:xfrm>
+          <a:prstGeom prst="rect">
+            <a:avLst/>
+          </a:prstGeom>
+          <a:noFill/>
+        </p:spPr>
+        <p:txBody>
+          <a:bodyPr wrap="square">
+            <a:spAutoFit/>
+          </a:bodyPr>
+          <a:lstStyle/>
+          <a:p>
+            <a:pPr>
+              <a:spcAft>
+                <a:spcPts val="500"/>
+              </a:spcAft>
+            </a:pPr>
+            <a:r>
+              <a:rPr sz="1400">
+                <a:solidFill>
+                  <a:srgbClr val="1C3B2E"/>
+                </a:solidFill>
+                <a:latin typeface="Inter"/>
+              </a:rPr>
+              <a:t>•  More SFT and knowledge distillation on the CPT base (mode-locked buckets, teacher-generated tutoring turns)</a:t>
+            </a:r>
+          </a:p>
+          <a:p>
+            <a:pPr>
+              <a:spcAft>
+                <a:spcPts val="500"/>
+              </a:spcAft>
+            </a:pPr>
+            <a:r>
+              <a:rPr sz="1400">
+                <a:solidFill>
+                  <a:srgbClr val="1C3B2E"/>
+                </a:solidFill>
+                <a:latin typeface="Inter"/>
+              </a:rPr>
+              <a:t>•  Extensive synthetic testing on-device: scripted student sessions on the Redmi, TTFT and per-page latency budgets</a:t>
+            </a:r>
+          </a:p>
+          <a:p>
+            <a:pPr>
+              <a:spcAft>
+                <a:spcPts val="500"/>
+              </a:spcAft>
+            </a:pPr>
+            <a:r>
+              <a:rPr sz="1400">
+                <a:solidFill>
+                  <a:srgbClr val="1C3B2E"/>
+                </a:solidFill>
+                <a:latin typeface="Inter"/>
+              </a:rPr>
+              <a:t>•  Model-as-judge quality control on every generated fact, quiz and translation (decorrelated judge, AUP-safe routing)</a:t>
+            </a:r>
+          </a:p>
+          <a:p>
+            <a:pPr>
+              <a:spcAft>
+                <a:spcPts val="500"/>
+              </a:spcAft>
+            </a:pPr>
+            <a:r>
+              <a:rPr sz="1400">
+                <a:solidFill>
+                  <a:srgbClr val="1C3B2E"/>
+                </a:solidFill>
+                <a:latin typeface="Inter"/>
+              </a:rPr>
+              <a:t>•  APK-level optimisations: bundle size (engravings subset, indexed PNG), cold start, SQLite migrations, edge-walk cost</a:t>
+            </a:r>
+          </a:p>
+        </p:txBody>
+      </p:sp>
+      <p:sp>
+        <p:nvSpPr>
+          <p:cNvPr id="9" name="TextBox 8"/>
+          <p:cNvSpPr txBox="1"/>
+          <p:nvPr/>
+        </p:nvSpPr>
+        <p:spPr>
+          <a:xfrm>
+            <a:off x="6309360" y="1783080"/>
+            <a:ext cx="5486400" cy="4572000"/>
+          </a:xfrm>
+          <a:prstGeom prst="rect">
+            <a:avLst/>
+          </a:prstGeom>
+          <a:noFill/>
+        </p:spPr>
+        <p:txBody>
+          <a:bodyPr wrap="square">
+            <a:spAutoFit/>
+          </a:bodyPr>
+          <a:lstStyle/>
+          <a:p>
+            <a:pPr>
+              <a:spcAft>
+                <a:spcPts val="500"/>
+              </a:spcAft>
+            </a:pPr>
+            <a:r>
+              <a:rPr sz="1400">
+                <a:solidFill>
+                  <a:srgbClr val="1C3B2E"/>
+                </a:solidFill>
+                <a:latin typeface="Inter"/>
+              </a:rPr>
+              <a:t>•  Native-speaker review of the Tagalog and Cebuano copy (onboarding, settings, hedging clause)</a:t>
+            </a:r>
+          </a:p>
+          <a:p>
+            <a:pPr>
+              <a:spcAft>
+                <a:spcPts val="500"/>
+              </a:spcAft>
+            </a:pPr>
+            <a:r>
+              <a:rPr sz="1400">
+                <a:solidFill>
+                  <a:srgbClr val="1C3B2E"/>
+                </a:solidFill>
+                <a:latin typeface="Inter"/>
+              </a:rPr>
+              <a:t>•  Junior-high gap fill: Lane B facts for the 16 remaining thin competencies; module-card supply</a:t>
+            </a:r>
+          </a:p>
+          <a:p>
+            <a:pPr>
+              <a:spcAft>
+                <a:spcPts val="500"/>
+              </a:spcAft>
+            </a:pPr>
+            <a:r>
+              <a:rPr sz="1400">
+                <a:solidFill>
+                  <a:srgbClr val="1C3B2E"/>
+                </a:solidFill>
+                <a:latin typeface="Inter"/>
+              </a:rPr>
+              <a:t>•  Finish the quiz lane (10.7k pool cards still without a question) and per-competency Miss-Card labels</a:t>
+            </a:r>
+          </a:p>
+          <a:p>
+            <a:pPr>
+              <a:spcAft>
+                <a:spcPts val="500"/>
+              </a:spcAft>
+            </a:pPr>
+            <a:r>
+              <a:rPr sz="1400">
+                <a:solidFill>
+                  <a:srgbClr val="1C3B2E"/>
+                </a:solidFill>
+                <a:latin typeface="Inter"/>
+              </a:rPr>
+              <a:t>•  Over-the-air fact-bank updates so content ships without an APK</a:t>
+            </a:r>
+          </a:p>
+          <a:p>
+            <a:pPr>
+              <a:spcAft>
+                <a:spcPts val="500"/>
+              </a:spcAft>
+            </a:pPr>
+            <a:r>
+              <a:rPr sz="1400">
+                <a:solidFill>
+                  <a:srgbClr val="1C3B2E"/>
+                </a:solidFill>
+                <a:latin typeface="Inter"/>
+              </a:rPr>
+              <a:t>•  Retrieval-QA cases per new competency before each gate run</a:t>
+            </a:r>
+          </a:p>
+          <a:p>
+            <a:pPr>
+              <a:spcAft>
+                <a:spcPts val="500"/>
+              </a:spcAft>
+            </a:pPr>
+            <a:r>
+              <a:rPr sz="1400">
+                <a:solidFill>
+                  <a:srgbClr val="1C3B2E"/>
+                </a:solidFill>
+                <a:latin typeface="Inter"/>
+              </a:rPr>
+              <a:t>•  Draft a classroom-pilot protocol (consent, offline logging, pre/post measures) to propose to DepEd schools</a:t>
+            </a:r>
+          </a:p>
+        </p:txBody>
+      </p:sp>
+      <p:sp>
+        <p:nvSpPr>
+          <p:cNvPr id="10" name="TextBox 9"/>
+          <p:cNvSpPr txBox="1"/>
+          <p:nvPr/>
+        </p:nvSpPr>
+        <p:spPr>
+          <a:xfrm>
+            <a:off x="457200" y="5577840"/>
+            <a:ext cx="11247120" cy="365760"/>
+          </a:xfrm>
+          <a:prstGeom prst="rect">
+            <a:avLst/>
+          </a:prstGeom>
+          <a:noFill/>
+        </p:spPr>
+        <p:txBody>
+          <a:bodyPr wrap="square" anchor="t">
+            <a:spAutoFit/>
+          </a:bodyPr>
+          <a:lstStyle/>
+          <a:p>
+            <a:pPr algn="l"/>
+            <a:r>
+              <a:rPr sz="1300" b="1">
+                <a:solidFill>
+                  <a:srgbClr val="20342C"/>
+                </a:solidFill>
+                <a:latin typeface="Inter"/>
+              </a:rPr>
+              <a:t>To report next time: the 2B capability run on the same 143 probes; on-device TTFT and per-page latency on the Redmi; quiz coverage after the lane completes; bundle size after optimisation.</a:t>
+            </a:r>
+          </a:p>
+        </p:txBody>
+      </p:sp>
+    </p:spTree>
+  </p:cSld>
+  <p:clrMapOvr>
+    <a:masterClrMapping/>
+  </p:clrMapOvr>
+</p:sld>
+</file>
+
+<file path=ppt/slides/slide7.xml><?xml version="1.0" encoding="utf-8"?>
+<p:sld xmlns:a="http://schemas.openxmlformats.org/drawingml/2006/main" xmlns:p="http://schemas.openxmlformats.org/presentationml/2006/main" xmlns:r="http://schemas.openxmlformats.org/officeDocument/2006/relationships">
+  <p:cSld>
+    <p:bg>
+      <p:bgPr>
+        <a:solidFill>
+          <a:srgbClr val="FDFDF6"/>
+        </a:solidFill>
+        <a:effectLst/>
+      </p:bgPr>
+    </p:bg>
+    <p:spTree>
+      <p:nvGrpSpPr>
+        <p:cNvPr id="1" name=""/>
+        <p:cNvGrpSpPr/>
+        <p:nvPr/>
+      </p:nvGrpSpPr>
+      <p:grpSpPr/>
+      <p:pic>
+        <p:nvPicPr>
+          <p:cNvPr id="2" name="Picture 1" descr="icon.png"/>
+          <p:cNvPicPr>
+            <a:picLocks noChangeAspect="1"/>
+          </p:cNvPicPr>
+          <p:nvPr/>
+        </p:nvPicPr>
+        <p:blipFill>
+          <a:blip r:embed="rId2"/>
+          <a:stretch>
+            <a:fillRect/>
+          </a:stretch>
+        </p:blipFill>
+        <p:spPr>
+          <a:xfrm>
+            <a:off x="411480" y="274320"/>
+            <a:ext cx="548640" cy="548640"/>
+          </a:xfrm>
+          <a:prstGeom prst="rect">
+            <a:avLst/>
+          </a:prstGeom>
+        </p:spPr>
+      </p:pic>
+      <p:sp>
+        <p:nvSpPr>
+          <p:cNvPr id="3" name="TextBox 2"/>
+          <p:cNvSpPr txBox="1"/>
+          <p:nvPr/>
+        </p:nvSpPr>
+        <p:spPr>
+          <a:xfrm>
+            <a:off x="1097280" y="274320"/>
+            <a:ext cx="10607040" cy="640080"/>
+          </a:xfrm>
+          <a:prstGeom prst="rect">
+            <a:avLst/>
+          </a:prstGeom>
+          <a:noFill/>
+        </p:spPr>
+        <p:txBody>
+          <a:bodyPr wrap="square" anchor="t">
+            <a:spAutoFit/>
+          </a:bodyPr>
+          <a:lstStyle/>
+          <a:p>
+            <a:pPr algn="l"/>
+            <a:r>
+              <a:rPr sz="2600" b="0">
+                <a:solidFill>
+                  <a:srgbClr val="20342C"/>
+                </a:solidFill>
+                <a:latin typeface="Alfa Slab One"/>
+              </a:rPr>
+              <a:t>Links</a:t>
+            </a:r>
+          </a:p>
+        </p:txBody>
+      </p:sp>
+      <p:sp>
+        <p:nvSpPr>
+          <p:cNvPr id="4" name="TextBox 3"/>
+          <p:cNvSpPr txBox="1"/>
+          <p:nvPr/>
+        </p:nvSpPr>
+        <p:spPr>
+          <a:xfrm>
+            <a:off x="457200" y="914400"/>
+            <a:ext cx="11247120" cy="640080"/>
+          </a:xfrm>
+          <a:prstGeom prst="rect">
+            <a:avLst/>
+          </a:prstGeom>
+          <a:noFill/>
+        </p:spPr>
+        <p:txBody>
+          <a:bodyPr wrap="square" anchor="t">
+            <a:spAutoFit/>
+          </a:bodyPr>
+          <a:lstStyle/>
+          <a:p>
+            <a:pPr algn="l"/>
+            <a:r>
+              <a:rPr sz="1600" b="1">
+                <a:solidFill>
+                  <a:srgbClr val="1C3B2E"/>
+                </a:solidFill>
+                <a:latin typeface="Inter"/>
+              </a:rPr>
+              <a:t>Code, build and evaluation records are public; model weights follow once the release checklist is done.</a:t>
+            </a:r>
+          </a:p>
+        </p:txBody>
+      </p:sp>
+      <p:sp>
+        <p:nvSpPr>
+          <p:cNvPr id="5" name="Rectangle 4"/>
+          <p:cNvSpPr/>
+          <p:nvPr/>
+        </p:nvSpPr>
+        <p:spPr>
+          <a:xfrm>
+            <a:off x="457200" y="1554480"/>
+            <a:ext cx="11274552" cy="18000"/>
+          </a:xfrm>
+          <a:prstGeom prst="rect">
+            <a:avLst/>
+          </a:prstGeom>
+          <a:solidFill>
+            <a:srgbClr val="D8A03A"/>
+          </a:solidFill>
+          <a:ln>
+            <a:noFill/>
+          </a:ln>
+        </p:spPr>
+        <p:style>
+          <a:lnRef idx="1">
+            <a:schemeClr val="accent1"/>
+          </a:lnRef>
+          <a:fillRef idx="3">
+            <a:schemeClr val="accent1"/>
+          </a:fillRef>
+          <a:effectRef idx="2">
+            <a:schemeClr val="accent1"/>
+          </a:effectRef>
+          <a:fontRef idx="minor">
+            <a:schemeClr val="lt1"/>
+          </a:fontRef>
+        </p:style>
+        <p:txBody>
+          <a:bodyPr rtlCol="0" anchor="ctr"/>
+          <a:lstStyle/>
+          <a:p>
+            <a:pPr algn="ctr"/>
+          </a:p>
+        </p:txBody>
+      </p:sp>
+      <p:sp>
+        <p:nvSpPr>
+          <p:cNvPr id="6" name="TextBox 5"/>
+          <p:cNvSpPr txBox="1"/>
+          <p:nvPr/>
+        </p:nvSpPr>
+        <p:spPr>
+          <a:xfrm>
+            <a:off x="457200" y="6446520"/>
+            <a:ext cx="8229600" cy="274320"/>
+          </a:xfrm>
+          <a:prstGeom prst="rect">
+            <a:avLst/>
+          </a:prstGeom>
+          <a:noFill/>
+        </p:spPr>
+        <p:txBody>
+          <a:bodyPr wrap="square" anchor="t">
+            <a:spAutoFit/>
+          </a:bodyPr>
+          <a:lstStyle/>
+          <a:p>
+            <a:pPr algn="l"/>
+            <a:r>
+              <a:rPr sz="1100" b="0">
+                <a:solidFill>
+                  <a:srgbClr val="5B6B52"/>
+                </a:solidFill>
+                <a:latin typeface="Inter"/>
+              </a:rPr>
+              <a:t>Hiraia · progress update · early September 2026 · hiraia.org</a:t>
+            </a:r>
+          </a:p>
+        </p:txBody>
+      </p:sp>
+      <p:sp>
+        <p:nvSpPr>
+          <p:cNvPr id="7" name="TextBox 6"/>
+          <p:cNvSpPr txBox="1"/>
+          <p:nvPr/>
+        </p:nvSpPr>
+        <p:spPr>
+          <a:xfrm>
+            <a:off x="11247120" y="6446520"/>
+            <a:ext cx="548640" cy="274320"/>
+          </a:xfrm>
+          <a:prstGeom prst="rect">
+            <a:avLst/>
+          </a:prstGeom>
+          <a:noFill/>
+        </p:spPr>
+        <p:txBody>
+          <a:bodyPr wrap="square" anchor="t">
+            <a:spAutoFit/>
+          </a:bodyPr>
+          <a:lstStyle/>
+          <a:p>
+            <a:pPr algn="r"/>
+            <a:r>
+              <a:rPr sz="1100" b="0">
+                <a:solidFill>
+                  <a:srgbClr val="5B6B52"/>
+                </a:solidFill>
+                <a:latin typeface="Inter"/>
+              </a:rPr>
+              <a:t>7</a:t>
             </a:r>
           </a:p>
         </p:txBody>

--- a/docs/deck/Hiraia-progress-update-2026-09.pptx
+++ b/docs/deck/Hiraia-progress-update-2026-09.pptx
@@ -4726,7 +4726,7 @@
         <p:spPr>
           <a:xfrm>
             <a:off x="9464040" y="960120"/>
-            <a:ext cx="2343705" cy="5029200"/>
+            <a:ext cx="2344274" cy="5029200"/>
           </a:xfrm>
           <a:prstGeom prst="rect">
             <a:avLst/>
@@ -5053,7 +5053,7 @@
         <p:spPr>
           <a:xfrm>
             <a:off x="713232" y="1828800"/>
-            <a:ext cx="1640593" cy="3520440"/>
+            <a:ext cx="1640992" cy="3520440"/>
           </a:xfrm>
           <a:prstGeom prst="rect">
             <a:avLst/>
@@ -5147,7 +5147,7 @@
         <p:spPr>
           <a:xfrm>
             <a:off x="3511296" y="1828800"/>
-            <a:ext cx="1640593" cy="3520440"/>
+            <a:ext cx="1640992" cy="3520440"/>
           </a:xfrm>
           <a:prstGeom prst="rect">
             <a:avLst/>
@@ -5241,7 +5241,7 @@
         <p:spPr>
           <a:xfrm>
             <a:off x="6309360" y="1828800"/>
-            <a:ext cx="1640593" cy="3520440"/>
+            <a:ext cx="1640992" cy="3520440"/>
           </a:xfrm>
           <a:prstGeom prst="rect">
             <a:avLst/>
@@ -5335,7 +5335,7 @@
         <p:spPr>
           <a:xfrm>
             <a:off x="9107424" y="1828800"/>
-            <a:ext cx="1640593" cy="3520440"/>
+            <a:ext cx="1640992" cy="3520440"/>
           </a:xfrm>
           <a:prstGeom prst="rect">
             <a:avLst/>
@@ -7324,7 +7324,7 @@
         <p:spPr>
           <a:xfrm>
             <a:off x="7589520" y="1737360"/>
-            <a:ext cx="1384917" cy="2971800"/>
+            <a:ext cx="1385253" cy="2971800"/>
           </a:xfrm>
           <a:prstGeom prst="rect">
             <a:avLst/>
@@ -7383,7 +7383,7 @@
         <p:spPr>
           <a:xfrm>
             <a:off x="9555480" y="1737360"/>
-            <a:ext cx="1384917" cy="2971800"/>
+            <a:ext cx="1385253" cy="2971800"/>
           </a:xfrm>
           <a:prstGeom prst="rect">
             <a:avLst/>

--- a/docs/deck/Hiraia-progress-update-2026-09.pptx
+++ b/docs/deck/Hiraia-progress-update-2026-09.pptx
@@ -7165,7 +7165,7 @@
                 </a:solidFill>
                 <a:latin typeface="Inter"/>
               </a:rPr>
-              <a:t>Cards are weighted by the student's grade and the curriculum quarter inferred from the device date; the boost moves through the school year by itself.</a:t>
+              <a:t>Cards are weighted by the student's grade and the curriculum quarter inferred from the device date; the boost moves through the school year by itself, and flattens across the whole grade once school is out.</a:t>
             </a:r>
           </a:p>
         </p:txBody>
@@ -7444,11 +7444,12 @@
                 <a:tableStyleId>{5C22544A-7EE6-4342-B048-85BDC9FD1C3A}</a:tableStyleId>
               </a:tblPr>
               <a:tblGrid>
-                <a:gridCol w="1463040"/>
-                <a:gridCol w="1188720"/>
-                <a:gridCol w="1463040"/>
-                <a:gridCol w="1371600"/>
-                <a:gridCol w="1280160"/>
+                <a:gridCol w="1234440"/>
+                <a:gridCol w="960120"/>
+                <a:gridCol w="1234440"/>
+                <a:gridCol w="1143000"/>
+                <a:gridCol w="1417320"/>
+                <a:gridCol w="777240"/>
               </a:tblGrid>
               <a:tr h="256032">
                 <a:tc>
@@ -7457,7 +7458,7 @@
                     <a:lstStyle/>
                     <a:p>
                       <a:r>
-                        <a:rPr sz="1000" b="1">
+                        <a:rPr sz="900" b="1">
                           <a:solidFill>
                             <a:srgbClr val="1C3B2E"/>
                           </a:solidFill>
@@ -7479,7 +7480,7 @@
                     <a:lstStyle/>
                     <a:p>
                       <a:r>
-                        <a:rPr sz="1000" b="1">
+                        <a:rPr sz="900" b="1">
                           <a:solidFill>
                             <a:srgbClr val="1C3B2E"/>
                           </a:solidFill>
@@ -7501,7 +7502,7 @@
                     <a:lstStyle/>
                     <a:p>
                       <a:r>
-                        <a:rPr sz="1000" b="1">
+                        <a:rPr sz="900" b="1">
                           <a:solidFill>
                             <a:srgbClr val="1C3B2E"/>
                           </a:solidFill>
@@ -7523,7 +7524,7 @@
                     <a:lstStyle/>
                     <a:p>
                       <a:r>
-                        <a:rPr sz="1000" b="1">
+                        <a:rPr sz="900" b="1">
                           <a:solidFill>
                             <a:srgbClr val="1C3B2E"/>
                           </a:solidFill>
@@ -7545,7 +7546,29 @@
                     <a:lstStyle/>
                     <a:p>
                       <a:r>
-                        <a:rPr sz="1000" b="1">
+                        <a:rPr sz="900" b="1">
+                          <a:solidFill>
+                            <a:srgbClr val="1C3B2E"/>
+                          </a:solidFill>
+                          <a:latin typeface="Inter"/>
+                        </a:rPr>
+                        <a:t>school out: any cell of the grade</a:t>
+                      </a:r>
+                    </a:p>
+                  </a:txBody>
+                  <a:tcPr marL="54864" marR="54864" marT="18288" marB="18288">
+                    <a:solidFill>
+                      <a:srgbClr val="F4EAD5"/>
+                    </a:solidFill>
+                  </a:tcPr>
+                </a:tc>
+                <a:tc>
+                  <a:txBody>
+                    <a:bodyPr/>
+                    <a:lstStyle/>
+                    <a:p>
+                      <a:r>
+                        <a:rPr sz="900" b="1">
                           <a:solidFill>
                             <a:srgbClr val="1C3B2E"/>
                           </a:solidFill>
@@ -7569,7 +7592,7 @@
                     <a:lstStyle/>
                     <a:p>
                       <a:r>
-                        <a:rPr sz="1000" b="0">
+                        <a:rPr sz="900" b="0">
                           <a:solidFill>
                             <a:srgbClr val="1C3B2E"/>
                           </a:solidFill>
@@ -7591,7 +7614,7 @@
                     <a:lstStyle/>
                     <a:p>
                       <a:r>
-                        <a:rPr sz="1000" b="0">
+                        <a:rPr sz="900" b="0">
                           <a:solidFill>
                             <a:srgbClr val="1C3B2E"/>
                           </a:solidFill>
@@ -7613,7 +7636,7 @@
                     <a:lstStyle/>
                     <a:p>
                       <a:r>
-                        <a:rPr sz="1000" b="0">
+                        <a:rPr sz="900" b="0">
                           <a:solidFill>
                             <a:srgbClr val="1C3B2E"/>
                           </a:solidFill>
@@ -7635,7 +7658,7 @@
                     <a:lstStyle/>
                     <a:p>
                       <a:r>
-                        <a:rPr sz="1000" b="0">
+                        <a:rPr sz="900" b="0">
                           <a:solidFill>
                             <a:srgbClr val="1C3B2E"/>
                           </a:solidFill>
@@ -7657,7 +7680,29 @@
                     <a:lstStyle/>
                     <a:p>
                       <a:r>
-                        <a:rPr sz="1000" b="0">
+                        <a:rPr sz="900" b="0">
+                          <a:solidFill>
+                            <a:srgbClr val="1C3B2E"/>
+                          </a:solidFill>
+                          <a:latin typeface="Inter"/>
+                        </a:rPr>
+                        <a:t>×6</a:t>
+                      </a:r>
+                    </a:p>
+                  </a:txBody>
+                  <a:tcPr marL="54864" marR="54864" marT="18288" marB="18288">
+                    <a:solidFill>
+                      <a:srgbClr val="FDFDF6"/>
+                    </a:solidFill>
+                  </a:tcPr>
+                </a:tc>
+                <a:tc>
+                  <a:txBody>
+                    <a:bodyPr/>
+                    <a:lstStyle/>
+                    <a:p>
+                      <a:r>
+                        <a:rPr sz="900" b="0">
                           <a:solidFill>
                             <a:srgbClr val="1C3B2E"/>
                           </a:solidFill>

--- a/docs/deck/Hiraia-progress-update-2026-09.pptx
+++ b/docs/deck/Hiraia-progress-update-2026-09.pptx
@@ -1028,7 +1028,7 @@
           <a:lstStyle/>
           <a:p>
             <a:r>
-              <a:t>Plan items trace to: rag/pipeline/FACT-SWARM-SPEC.md (Lane B, quiz lane, module cards), rag/pipeline/FEED-WEIGHTING.md (Miss-Card labels, edge-walk cost), finetuning/eval/routing/README.md (hedge-clause wording sweep), finetuning/cpt/*.md (SFT/KD on the CPT base), memory of on-device measurements on the Redmi SD685 (kitten tier ~4.4 tok/s, TTFT ~24 s).</a:t>
+              <a:t>Plan items trace to: rag/pipeline/FACT-SWARM-SPEC.md (Lane B, quiz lane, module cards), rag/pipeline/FEED-WEIGHTING.md (Miss-Card labels, edge-walk cost), finetuning/eval/routing/README.md (hedge-clause wording sweep), finetuning/cpt/*.md (SFT/KD on the CPT base), on-device measurements on the Redmi SD685 (~4.4 tok/s, TTFT ~24 s) belong to the retired 1B budget tier; the project has since unified on a single 6 GB+ tier.</a:t>
             </a:r>
           </a:p>
         </p:txBody>
@@ -4236,7 +4236,7 @@
                 </a:solidFill>
                 <a:latin typeface="Inter"/>
               </a:rPr>
-              <a:t>An offline, on-device science tutor for Filipino grade-school students (Grades 3–10), aligned to the DepEd MATATAG curriculum, in Tagalog, Cebuano and English. The published build (v0.1) targets Android 12+ phones with 6 GB+ memory; a 1B budget tier runs on a Redmi (Snapdragon 685) in unpublished builds.</a:t>
+              <a:t>An offline, on-device science tutor for Filipino grade-school students (Grades 3–10), aligned to the DepEd MATATAG curriculum, in Tagalog, Cebuano and English. The build targets Android 12+ phones with 6 GB or more memory, a single device tier: a 3B model with GPU offload, its Tagalog and Cebuano adapters bundled in the APK.</a:t>
             </a:r>
           </a:p>
         </p:txBody>
@@ -8608,7 +8608,7 @@
                 </a:solidFill>
                 <a:latin typeface="Inter"/>
               </a:rPr>
-              <a:t>•  The 1B budget tier cannot learn safety negation (DPO tested and rejected); junior-high content is thinner than elementary</a:t>
+              <a:t>•  Junior-high content is thinner than elementary. The 1B budget tier could not learn safety negation (DPO tested and rejected) and has been retired — the build now targets 6 GB+ devices only</a:t>
             </a:r>
           </a:p>
         </p:txBody>
@@ -8896,7 +8896,7 @@
                 </a:solidFill>
                 <a:latin typeface="Inter"/>
               </a:rPr>
-              <a:t>•  Extensive synthetic testing on-device: scripted student sessions on the Redmi, TTFT and per-page latency budgets</a:t>
+              <a:t>•  Extensive synthetic testing on-device: scripted student sessions on target hardware, TTFT and per-page latency budgets</a:t>
             </a:r>
           </a:p>
           <a:p>
@@ -9082,7 +9082,7 @@
                 </a:solidFill>
                 <a:latin typeface="Inter"/>
               </a:rPr>
-              <a:t>To report next time: the 2B capability run on the same 143 probes; on-device TTFT and per-page latency on the Redmi; quiz coverage after the lane completes; bundle size after optimisation.</a:t>
+              <a:t>To report next time: the 2B capability run on the same 143 probes; on-device TTFT and per-page latency; quiz coverage after the lane completes; bundle size after optimisation.</a:t>
             </a:r>
           </a:p>
         </p:txBody>
